--- a/Priceless_Bank_Apresentacao.pptx
+++ b/Priceless_Bank_Apresentacao.pptx
@@ -3854,7 +3854,7 @@
         </p:nvSpPr>
         <p:spPr>
           <a:xfrm>
-            <a:off x="6903720" y="1783080"/>
+            <a:off x="7726680" y="1783080"/>
             <a:ext cx="2011680" cy="274320"/>
           </a:xfrm>
           <a:prstGeom prst="rect">
@@ -3893,7 +3893,7 @@
         </p:nvSpPr>
         <p:spPr>
           <a:xfrm>
-            <a:off x="8275320" y="1783080"/>
+            <a:off x="9555480" y="1783080"/>
             <a:ext cx="2011680" cy="274320"/>
           </a:xfrm>
           <a:prstGeom prst="rect">
@@ -3926,46 +3926,7 @@
       </p:sp>
       <p:sp>
         <p:nvSpPr>
-          <p:cNvPr id="9" name="Text 7"/>
-          <p:cNvSpPr/>
-          <p:nvPr/>
-        </p:nvSpPr>
-        <p:spPr>
-          <a:xfrm>
-            <a:off x="9829800" y="1783080"/>
-            <a:ext cx="2011680" cy="274320"/>
-          </a:xfrm>
-          <a:prstGeom prst="rect">
-            <a:avLst/>
-          </a:prstGeom>
-          <a:noFill/>
-          <a:ln/>
-        </p:spPr>
-        <p:txBody>
-          <a:bodyPr wrap="square" lIns="0" tIns="0" rIns="0" bIns="0" rtlCol="0" anchor="ctr"/>
-          <a:lstStyle/>
-          <a:p>
-            <a:pPr indent="0" marL="0">
-              <a:buNone/>
-            </a:pPr>
-            <a:r>
-              <a:rPr lang="en-US" sz="1100" b="1" spc="100" kern="0" dirty="0">
-                <a:solidFill>
-                  <a:srgbClr val="5A6784"/>
-                </a:solidFill>
-                <a:latin typeface="Calibri" pitchFamily="34" charset="0"/>
-                <a:ea typeface="Calibri" pitchFamily="34" charset="-122"/>
-                <a:cs typeface="Calibri" pitchFamily="34" charset="-120"/>
-              </a:rPr>
-              <a:t>Prazo</a:t>
-            </a:r>
-            <a:endParaRPr lang="en-US" sz="1100" dirty="0"/>
-          </a:p>
-        </p:txBody>
-      </p:sp>
-      <p:sp>
-        <p:nvSpPr>
-          <p:cNvPr id="10" name="Shape 8"/>
+          <p:cNvPr id="9" name="Shape 7"/>
           <p:cNvSpPr/>
           <p:nvPr/>
         </p:nvSpPr>
@@ -3987,7 +3948,7 @@
       </p:sp>
       <p:sp>
         <p:nvSpPr>
-          <p:cNvPr id="11" name="Text 9"/>
+          <p:cNvPr id="10" name="Text 8"/>
           <p:cNvSpPr/>
           <p:nvPr/>
         </p:nvSpPr>
@@ -4026,40 +3987,79 @@
       </p:sp>
       <p:sp>
         <p:nvSpPr>
+          <p:cNvPr id="11" name="Text 9"/>
+          <p:cNvSpPr/>
+          <p:nvPr/>
+        </p:nvSpPr>
+        <p:spPr>
+          <a:xfrm>
+            <a:off x="1417320" y="2148840"/>
+            <a:ext cx="6766560" cy="384048"/>
+          </a:xfrm>
+          <a:prstGeom prst="rect">
+            <a:avLst/>
+          </a:prstGeom>
+          <a:noFill/>
+          <a:ln/>
+        </p:spPr>
+        <p:txBody>
+          <a:bodyPr wrap="square" lIns="0" tIns="0" rIns="0" bIns="0" rtlCol="0" anchor="ctr"/>
+          <a:lstStyle/>
+          <a:p>
+            <a:pPr indent="0" marL="0">
+              <a:buNone/>
+            </a:pPr>
+            <a:r>
+              <a:rPr lang="en-US" sz="1300" dirty="0">
+                <a:solidFill>
+                  <a:srgbClr val="13223F"/>
+                </a:solidFill>
+                <a:latin typeface="Calibri" pitchFamily="34" charset="0"/>
+                <a:ea typeface="Calibri" pitchFamily="34" charset="-122"/>
+                <a:cs typeface="Calibri" pitchFamily="34" charset="-120"/>
+              </a:rPr>
+              <a:t>Descobrir por que a emissão de cartão parou</a:t>
+            </a:r>
+            <a:endParaRPr lang="en-US" sz="1300" dirty="0"/>
+          </a:p>
+        </p:txBody>
+      </p:sp>
+      <p:sp>
+        <p:nvSpPr>
           <p:cNvPr id="12" name="Text 10"/>
           <p:cNvSpPr/>
           <p:nvPr/>
         </p:nvSpPr>
         <p:spPr>
           <a:xfrm>
-            <a:off x="1417320" y="2148840"/>
-            <a:ext cx="5943600" cy="384048"/>
-          </a:xfrm>
-          <a:prstGeom prst="rect">
-            <a:avLst/>
-          </a:prstGeom>
-          <a:noFill/>
-          <a:ln/>
-        </p:spPr>
-        <p:txBody>
-          <a:bodyPr wrap="square" lIns="0" tIns="0" rIns="0" bIns="0" rtlCol="0" anchor="ctr"/>
-          <a:lstStyle/>
-          <a:p>
-            <a:pPr indent="0" marL="0">
-              <a:buNone/>
-            </a:pPr>
-            <a:r>
-              <a:rPr lang="en-US" sz="1300" dirty="0">
-                <a:solidFill>
-                  <a:srgbClr val="13223F"/>
-                </a:solidFill>
-                <a:latin typeface="Calibri" pitchFamily="34" charset="0"/>
-                <a:ea typeface="Calibri" pitchFamily="34" charset="-122"/>
-                <a:cs typeface="Calibri" pitchFamily="34" charset="-120"/>
-              </a:rPr>
-              <a:t>Descobrir por que a emissão de cartão parou</a:t>
-            </a:r>
-            <a:endParaRPr lang="en-US" sz="1300" dirty="0"/>
+            <a:off x="7726680" y="2148840"/>
+            <a:ext cx="1463040" cy="384048"/>
+          </a:xfrm>
+          <a:prstGeom prst="rect">
+            <a:avLst/>
+          </a:prstGeom>
+          <a:noFill/>
+          <a:ln/>
+        </p:spPr>
+        <p:txBody>
+          <a:bodyPr wrap="square" lIns="0" tIns="0" rIns="0" bIns="0" rtlCol="0" anchor="ctr"/>
+          <a:lstStyle/>
+          <a:p>
+            <a:pPr indent="0" marL="0">
+              <a:buNone/>
+            </a:pPr>
+            <a:r>
+              <a:rPr lang="en-US" sz="1200" dirty="0">
+                <a:solidFill>
+                  <a:srgbClr val="5A6784"/>
+                </a:solidFill>
+                <a:latin typeface="Calibri" pitchFamily="34" charset="0"/>
+                <a:ea typeface="Calibri" pitchFamily="34" charset="-122"/>
+                <a:cs typeface="Calibri" pitchFamily="34" charset="-120"/>
+              </a:rPr>
+              <a:t>Alto</a:t>
+            </a:r>
+            <a:endParaRPr lang="en-US" sz="1200" dirty="0"/>
           </a:p>
         </p:txBody>
       </p:sp>
@@ -4071,8 +4071,8 @@
         </p:nvSpPr>
         <p:spPr>
           <a:xfrm>
-            <a:off x="6903720" y="2148840"/>
-            <a:ext cx="1280160" cy="384048"/>
+            <a:off x="9555480" y="2148840"/>
+            <a:ext cx="1463040" cy="384048"/>
           </a:xfrm>
           <a:prstGeom prst="rect">
             <a:avLst/>
@@ -4096,7 +4096,7 @@
                 <a:ea typeface="Calibri" pitchFamily="34" charset="-122"/>
                 <a:cs typeface="Calibri" pitchFamily="34" charset="-120"/>
               </a:rPr>
-              <a:t>Alto</a:t>
+              <a:t>Baixo</a:t>
             </a:r>
             <a:endParaRPr lang="en-US" sz="1200" dirty="0"/>
           </a:p>
@@ -4105,84 +4105,6 @@
       <p:sp>
         <p:nvSpPr>
           <p:cNvPr id="14" name="Text 12"/>
-          <p:cNvSpPr/>
-          <p:nvPr/>
-        </p:nvSpPr>
-        <p:spPr>
-          <a:xfrm>
-            <a:off x="8275320" y="2148840"/>
-            <a:ext cx="1280160" cy="384048"/>
-          </a:xfrm>
-          <a:prstGeom prst="rect">
-            <a:avLst/>
-          </a:prstGeom>
-          <a:noFill/>
-          <a:ln/>
-        </p:spPr>
-        <p:txBody>
-          <a:bodyPr wrap="square" lIns="0" tIns="0" rIns="0" bIns="0" rtlCol="0" anchor="ctr"/>
-          <a:lstStyle/>
-          <a:p>
-            <a:pPr indent="0" marL="0">
-              <a:buNone/>
-            </a:pPr>
-            <a:r>
-              <a:rPr lang="en-US" sz="1200" dirty="0">
-                <a:solidFill>
-                  <a:srgbClr val="5A6784"/>
-                </a:solidFill>
-                <a:latin typeface="Calibri" pitchFamily="34" charset="0"/>
-                <a:ea typeface="Calibri" pitchFamily="34" charset="-122"/>
-                <a:cs typeface="Calibri" pitchFamily="34" charset="-120"/>
-              </a:rPr>
-              <a:t>Baixo</a:t>
-            </a:r>
-            <a:endParaRPr lang="en-US" sz="1200" dirty="0"/>
-          </a:p>
-        </p:txBody>
-      </p:sp>
-      <p:sp>
-        <p:nvSpPr>
-          <p:cNvPr id="15" name="Text 13"/>
-          <p:cNvSpPr/>
-          <p:nvPr/>
-        </p:nvSpPr>
-        <p:spPr>
-          <a:xfrm>
-            <a:off x="9829800" y="2148840"/>
-            <a:ext cx="1554480" cy="384048"/>
-          </a:xfrm>
-          <a:prstGeom prst="rect">
-            <a:avLst/>
-          </a:prstGeom>
-          <a:noFill/>
-          <a:ln/>
-        </p:spPr>
-        <p:txBody>
-          <a:bodyPr wrap="square" lIns="0" tIns="0" rIns="0" bIns="0" rtlCol="0" anchor="ctr"/>
-          <a:lstStyle/>
-          <a:p>
-            <a:pPr indent="0" marL="0">
-              <a:buNone/>
-            </a:pPr>
-            <a:r>
-              <a:rPr lang="en-US" sz="1200" dirty="0">
-                <a:solidFill>
-                  <a:srgbClr val="5A6784"/>
-                </a:solidFill>
-                <a:latin typeface="Calibri" pitchFamily="34" charset="0"/>
-                <a:ea typeface="Calibri" pitchFamily="34" charset="-122"/>
-                <a:cs typeface="Calibri" pitchFamily="34" charset="-120"/>
-              </a:rPr>
-              <a:t>30 dias</a:t>
-            </a:r>
-            <a:endParaRPr lang="en-US" sz="1200" dirty="0"/>
-          </a:p>
-        </p:txBody>
-      </p:sp>
-      <p:sp>
-        <p:nvSpPr>
-          <p:cNvPr id="16" name="Text 14"/>
           <p:cNvSpPr/>
           <p:nvPr/>
         </p:nvSpPr>
@@ -4221,53 +4143,92 @@
       </p:sp>
       <p:sp>
         <p:nvSpPr>
+          <p:cNvPr id="15" name="Text 13"/>
+          <p:cNvSpPr/>
+          <p:nvPr/>
+        </p:nvSpPr>
+        <p:spPr>
+          <a:xfrm>
+            <a:off x="1417320" y="2715768"/>
+            <a:ext cx="6766560" cy="384048"/>
+          </a:xfrm>
+          <a:prstGeom prst="rect">
+            <a:avLst/>
+          </a:prstGeom>
+          <a:noFill/>
+          <a:ln/>
+        </p:spPr>
+        <p:txBody>
+          <a:bodyPr wrap="square" lIns="0" tIns="0" rIns="0" bIns="0" rtlCol="0" anchor="ctr"/>
+          <a:lstStyle/>
+          <a:p>
+            <a:pPr indent="0" marL="0">
+              <a:buNone/>
+            </a:pPr>
+            <a:r>
+              <a:rPr lang="en-US" sz="1300" dirty="0">
+                <a:solidFill>
+                  <a:srgbClr val="13223F"/>
+                </a:solidFill>
+                <a:latin typeface="Calibri" pitchFamily="34" charset="0"/>
+                <a:ea typeface="Calibri" pitchFamily="34" charset="-122"/>
+                <a:cs typeface="Calibri" pitchFamily="34" charset="-120"/>
+              </a:rPr>
+              <a:t>Recadastrar os 255 clientes sem renda</a:t>
+            </a:r>
+            <a:endParaRPr lang="en-US" sz="1300" dirty="0"/>
+          </a:p>
+        </p:txBody>
+      </p:sp>
+      <p:sp>
+        <p:nvSpPr>
+          <p:cNvPr id="16" name="Text 14"/>
+          <p:cNvSpPr/>
+          <p:nvPr/>
+        </p:nvSpPr>
+        <p:spPr>
+          <a:xfrm>
+            <a:off x="7726680" y="2715768"/>
+            <a:ext cx="1463040" cy="384048"/>
+          </a:xfrm>
+          <a:prstGeom prst="rect">
+            <a:avLst/>
+          </a:prstGeom>
+          <a:noFill/>
+          <a:ln/>
+        </p:spPr>
+        <p:txBody>
+          <a:bodyPr wrap="square" lIns="0" tIns="0" rIns="0" bIns="0" rtlCol="0" anchor="ctr"/>
+          <a:lstStyle/>
+          <a:p>
+            <a:pPr indent="0" marL="0">
+              <a:buNone/>
+            </a:pPr>
+            <a:r>
+              <a:rPr lang="en-US" sz="1200" dirty="0">
+                <a:solidFill>
+                  <a:srgbClr val="5A6784"/>
+                </a:solidFill>
+                <a:latin typeface="Calibri" pitchFamily="34" charset="0"/>
+                <a:ea typeface="Calibri" pitchFamily="34" charset="-122"/>
+                <a:cs typeface="Calibri" pitchFamily="34" charset="-120"/>
+              </a:rPr>
+              <a:t>Médio</a:t>
+            </a:r>
+            <a:endParaRPr lang="en-US" sz="1200" dirty="0"/>
+          </a:p>
+        </p:txBody>
+      </p:sp>
+      <p:sp>
+        <p:nvSpPr>
           <p:cNvPr id="17" name="Text 15"/>
           <p:cNvSpPr/>
           <p:nvPr/>
         </p:nvSpPr>
         <p:spPr>
           <a:xfrm>
-            <a:off x="1417320" y="2715768"/>
-            <a:ext cx="5943600" cy="384048"/>
-          </a:xfrm>
-          <a:prstGeom prst="rect">
-            <a:avLst/>
-          </a:prstGeom>
-          <a:noFill/>
-          <a:ln/>
-        </p:spPr>
-        <p:txBody>
-          <a:bodyPr wrap="square" lIns="0" tIns="0" rIns="0" bIns="0" rtlCol="0" anchor="ctr"/>
-          <a:lstStyle/>
-          <a:p>
-            <a:pPr indent="0" marL="0">
-              <a:buNone/>
-            </a:pPr>
-            <a:r>
-              <a:rPr lang="en-US" sz="1300" dirty="0">
-                <a:solidFill>
-                  <a:srgbClr val="13223F"/>
-                </a:solidFill>
-                <a:latin typeface="Calibri" pitchFamily="34" charset="0"/>
-                <a:ea typeface="Calibri" pitchFamily="34" charset="-122"/>
-                <a:cs typeface="Calibri" pitchFamily="34" charset="-120"/>
-              </a:rPr>
-              <a:t>Recadastrar os 255 clientes sem renda</a:t>
-            </a:r>
-            <a:endParaRPr lang="en-US" sz="1300" dirty="0"/>
-          </a:p>
-        </p:txBody>
-      </p:sp>
-      <p:sp>
-        <p:nvSpPr>
-          <p:cNvPr id="18" name="Text 16"/>
-          <p:cNvSpPr/>
-          <p:nvPr/>
-        </p:nvSpPr>
-        <p:spPr>
-          <a:xfrm>
-            <a:off x="6903720" y="2715768"/>
-            <a:ext cx="1280160" cy="384048"/>
+            <a:off x="9555480" y="2715768"/>
+            <a:ext cx="1463040" cy="384048"/>
           </a:xfrm>
           <a:prstGeom prst="rect">
             <a:avLst/>
@@ -4291,7 +4252,7 @@
                 <a:ea typeface="Calibri" pitchFamily="34" charset="-122"/>
                 <a:cs typeface="Calibri" pitchFamily="34" charset="-120"/>
               </a:rPr>
-              <a:t>Médio</a:t>
+              <a:t>Baixo</a:t>
             </a:r>
             <a:endParaRPr lang="en-US" sz="1200" dirty="0"/>
           </a:p>
@@ -4299,85 +4260,7 @@
       </p:sp>
       <p:sp>
         <p:nvSpPr>
-          <p:cNvPr id="19" name="Text 17"/>
-          <p:cNvSpPr/>
-          <p:nvPr/>
-        </p:nvSpPr>
-        <p:spPr>
-          <a:xfrm>
-            <a:off x="8275320" y="2715768"/>
-            <a:ext cx="1280160" cy="384048"/>
-          </a:xfrm>
-          <a:prstGeom prst="rect">
-            <a:avLst/>
-          </a:prstGeom>
-          <a:noFill/>
-          <a:ln/>
-        </p:spPr>
-        <p:txBody>
-          <a:bodyPr wrap="square" lIns="0" tIns="0" rIns="0" bIns="0" rtlCol="0" anchor="ctr"/>
-          <a:lstStyle/>
-          <a:p>
-            <a:pPr indent="0" marL="0">
-              <a:buNone/>
-            </a:pPr>
-            <a:r>
-              <a:rPr lang="en-US" sz="1200" dirty="0">
-                <a:solidFill>
-                  <a:srgbClr val="5A6784"/>
-                </a:solidFill>
-                <a:latin typeface="Calibri" pitchFamily="34" charset="0"/>
-                <a:ea typeface="Calibri" pitchFamily="34" charset="-122"/>
-                <a:cs typeface="Calibri" pitchFamily="34" charset="-120"/>
-              </a:rPr>
-              <a:t>Baixo</a:t>
-            </a:r>
-            <a:endParaRPr lang="en-US" sz="1200" dirty="0"/>
-          </a:p>
-        </p:txBody>
-      </p:sp>
-      <p:sp>
-        <p:nvSpPr>
-          <p:cNvPr id="20" name="Text 18"/>
-          <p:cNvSpPr/>
-          <p:nvPr/>
-        </p:nvSpPr>
-        <p:spPr>
-          <a:xfrm>
-            <a:off x="9829800" y="2715768"/>
-            <a:ext cx="1554480" cy="384048"/>
-          </a:xfrm>
-          <a:prstGeom prst="rect">
-            <a:avLst/>
-          </a:prstGeom>
-          <a:noFill/>
-          <a:ln/>
-        </p:spPr>
-        <p:txBody>
-          <a:bodyPr wrap="square" lIns="0" tIns="0" rIns="0" bIns="0" rtlCol="0" anchor="ctr"/>
-          <a:lstStyle/>
-          <a:p>
-            <a:pPr indent="0" marL="0">
-              <a:buNone/>
-            </a:pPr>
-            <a:r>
-              <a:rPr lang="en-US" sz="1200" dirty="0">
-                <a:solidFill>
-                  <a:srgbClr val="5A6784"/>
-                </a:solidFill>
-                <a:latin typeface="Calibri" pitchFamily="34" charset="0"/>
-                <a:ea typeface="Calibri" pitchFamily="34" charset="-122"/>
-                <a:cs typeface="Calibri" pitchFamily="34" charset="-120"/>
-              </a:rPr>
-              <a:t>90 dias</a:t>
-            </a:r>
-            <a:endParaRPr lang="en-US" sz="1200" dirty="0"/>
-          </a:p>
-        </p:txBody>
-      </p:sp>
-      <p:sp>
-        <p:nvSpPr>
-          <p:cNvPr id="21" name="Shape 19"/>
+          <p:cNvPr id="18" name="Shape 16"/>
           <p:cNvSpPr/>
           <p:nvPr/>
         </p:nvSpPr>
@@ -4399,7 +4282,7 @@
       </p:sp>
       <p:sp>
         <p:nvSpPr>
-          <p:cNvPr id="22" name="Text 20"/>
+          <p:cNvPr id="19" name="Text 17"/>
           <p:cNvSpPr/>
           <p:nvPr/>
         </p:nvSpPr>
@@ -4438,163 +4321,124 @@
       </p:sp>
       <p:sp>
         <p:nvSpPr>
+          <p:cNvPr id="20" name="Text 18"/>
+          <p:cNvSpPr/>
+          <p:nvPr/>
+        </p:nvSpPr>
+        <p:spPr>
+          <a:xfrm>
+            <a:off x="1417320" y="3282696"/>
+            <a:ext cx="6766560" cy="384048"/>
+          </a:xfrm>
+          <a:prstGeom prst="rect">
+            <a:avLst/>
+          </a:prstGeom>
+          <a:noFill/>
+          <a:ln/>
+        </p:spPr>
+        <p:txBody>
+          <a:bodyPr wrap="square" lIns="0" tIns="0" rIns="0" bIns="0" rtlCol="0" anchor="ctr"/>
+          <a:lstStyle/>
+          <a:p>
+            <a:pPr indent="0" marL="0">
+              <a:buNone/>
+            </a:pPr>
+            <a:r>
+              <a:rPr lang="en-US" sz="1300" dirty="0">
+                <a:solidFill>
+                  <a:srgbClr val="13223F"/>
+                </a:solidFill>
+                <a:latin typeface="Calibri" pitchFamily="34" charset="0"/>
+                <a:ea typeface="Calibri" pitchFamily="34" charset="-122"/>
+                <a:cs typeface="Calibri" pitchFamily="34" charset="-120"/>
+              </a:rPr>
+              <a:t>Programa de domicílio de renda</a:t>
+            </a:r>
+            <a:endParaRPr lang="en-US" sz="1300" dirty="0"/>
+          </a:p>
+        </p:txBody>
+      </p:sp>
+      <p:sp>
+        <p:nvSpPr>
+          <p:cNvPr id="21" name="Text 19"/>
+          <p:cNvSpPr/>
+          <p:nvPr/>
+        </p:nvSpPr>
+        <p:spPr>
+          <a:xfrm>
+            <a:off x="7726680" y="3282696"/>
+            <a:ext cx="1463040" cy="384048"/>
+          </a:xfrm>
+          <a:prstGeom prst="rect">
+            <a:avLst/>
+          </a:prstGeom>
+          <a:noFill/>
+          <a:ln/>
+        </p:spPr>
+        <p:txBody>
+          <a:bodyPr wrap="square" lIns="0" tIns="0" rIns="0" bIns="0" rtlCol="0" anchor="ctr"/>
+          <a:lstStyle/>
+          <a:p>
+            <a:pPr indent="0" marL="0">
+              <a:buNone/>
+            </a:pPr>
+            <a:r>
+              <a:rPr lang="en-US" sz="1200" dirty="0">
+                <a:solidFill>
+                  <a:srgbClr val="5A6784"/>
+                </a:solidFill>
+                <a:latin typeface="Calibri" pitchFamily="34" charset="0"/>
+                <a:ea typeface="Calibri" pitchFamily="34" charset="-122"/>
+                <a:cs typeface="Calibri" pitchFamily="34" charset="-120"/>
+              </a:rPr>
+              <a:t>Alto</a:t>
+            </a:r>
+            <a:endParaRPr lang="en-US" sz="1200" dirty="0"/>
+          </a:p>
+        </p:txBody>
+      </p:sp>
+      <p:sp>
+        <p:nvSpPr>
+          <p:cNvPr id="22" name="Text 20"/>
+          <p:cNvSpPr/>
+          <p:nvPr/>
+        </p:nvSpPr>
+        <p:spPr>
+          <a:xfrm>
+            <a:off x="9555480" y="3282696"/>
+            <a:ext cx="1463040" cy="384048"/>
+          </a:xfrm>
+          <a:prstGeom prst="rect">
+            <a:avLst/>
+          </a:prstGeom>
+          <a:noFill/>
+          <a:ln/>
+        </p:spPr>
+        <p:txBody>
+          <a:bodyPr wrap="square" lIns="0" tIns="0" rIns="0" bIns="0" rtlCol="0" anchor="ctr"/>
+          <a:lstStyle/>
+          <a:p>
+            <a:pPr indent="0" marL="0">
+              <a:buNone/>
+            </a:pPr>
+            <a:r>
+              <a:rPr lang="en-US" sz="1200" dirty="0">
+                <a:solidFill>
+                  <a:srgbClr val="5A6784"/>
+                </a:solidFill>
+                <a:latin typeface="Calibri" pitchFamily="34" charset="0"/>
+                <a:ea typeface="Calibri" pitchFamily="34" charset="-122"/>
+                <a:cs typeface="Calibri" pitchFamily="34" charset="-120"/>
+              </a:rPr>
+              <a:t>Alto</a:t>
+            </a:r>
+            <a:endParaRPr lang="en-US" sz="1200" dirty="0"/>
+          </a:p>
+        </p:txBody>
+      </p:sp>
+      <p:sp>
+        <p:nvSpPr>
           <p:cNvPr id="23" name="Text 21"/>
-          <p:cNvSpPr/>
-          <p:nvPr/>
-        </p:nvSpPr>
-        <p:spPr>
-          <a:xfrm>
-            <a:off x="1417320" y="3282696"/>
-            <a:ext cx="5943600" cy="384048"/>
-          </a:xfrm>
-          <a:prstGeom prst="rect">
-            <a:avLst/>
-          </a:prstGeom>
-          <a:noFill/>
-          <a:ln/>
-        </p:spPr>
-        <p:txBody>
-          <a:bodyPr wrap="square" lIns="0" tIns="0" rIns="0" bIns="0" rtlCol="0" anchor="ctr"/>
-          <a:lstStyle/>
-          <a:p>
-            <a:pPr indent="0" marL="0">
-              <a:buNone/>
-            </a:pPr>
-            <a:r>
-              <a:rPr lang="en-US" sz="1300" dirty="0">
-                <a:solidFill>
-                  <a:srgbClr val="13223F"/>
-                </a:solidFill>
-                <a:latin typeface="Calibri" pitchFamily="34" charset="0"/>
-                <a:ea typeface="Calibri" pitchFamily="34" charset="-122"/>
-                <a:cs typeface="Calibri" pitchFamily="34" charset="-120"/>
-              </a:rPr>
-              <a:t>Programa de domicílio de renda</a:t>
-            </a:r>
-            <a:endParaRPr lang="en-US" sz="1300" dirty="0"/>
-          </a:p>
-        </p:txBody>
-      </p:sp>
-      <p:sp>
-        <p:nvSpPr>
-          <p:cNvPr id="24" name="Text 22"/>
-          <p:cNvSpPr/>
-          <p:nvPr/>
-        </p:nvSpPr>
-        <p:spPr>
-          <a:xfrm>
-            <a:off x="6903720" y="3282696"/>
-            <a:ext cx="1280160" cy="384048"/>
-          </a:xfrm>
-          <a:prstGeom prst="rect">
-            <a:avLst/>
-          </a:prstGeom>
-          <a:noFill/>
-          <a:ln/>
-        </p:spPr>
-        <p:txBody>
-          <a:bodyPr wrap="square" lIns="0" tIns="0" rIns="0" bIns="0" rtlCol="0" anchor="ctr"/>
-          <a:lstStyle/>
-          <a:p>
-            <a:pPr indent="0" marL="0">
-              <a:buNone/>
-            </a:pPr>
-            <a:r>
-              <a:rPr lang="en-US" sz="1200" dirty="0">
-                <a:solidFill>
-                  <a:srgbClr val="5A6784"/>
-                </a:solidFill>
-                <a:latin typeface="Calibri" pitchFamily="34" charset="0"/>
-                <a:ea typeface="Calibri" pitchFamily="34" charset="-122"/>
-                <a:cs typeface="Calibri" pitchFamily="34" charset="-120"/>
-              </a:rPr>
-              <a:t>Alto</a:t>
-            </a:r>
-            <a:endParaRPr lang="en-US" sz="1200" dirty="0"/>
-          </a:p>
-        </p:txBody>
-      </p:sp>
-      <p:sp>
-        <p:nvSpPr>
-          <p:cNvPr id="25" name="Text 23"/>
-          <p:cNvSpPr/>
-          <p:nvPr/>
-        </p:nvSpPr>
-        <p:spPr>
-          <a:xfrm>
-            <a:off x="8275320" y="3282696"/>
-            <a:ext cx="1280160" cy="384048"/>
-          </a:xfrm>
-          <a:prstGeom prst="rect">
-            <a:avLst/>
-          </a:prstGeom>
-          <a:noFill/>
-          <a:ln/>
-        </p:spPr>
-        <p:txBody>
-          <a:bodyPr wrap="square" lIns="0" tIns="0" rIns="0" bIns="0" rtlCol="0" anchor="ctr"/>
-          <a:lstStyle/>
-          <a:p>
-            <a:pPr indent="0" marL="0">
-              <a:buNone/>
-            </a:pPr>
-            <a:r>
-              <a:rPr lang="en-US" sz="1200" dirty="0">
-                <a:solidFill>
-                  <a:srgbClr val="5A6784"/>
-                </a:solidFill>
-                <a:latin typeface="Calibri" pitchFamily="34" charset="0"/>
-                <a:ea typeface="Calibri" pitchFamily="34" charset="-122"/>
-                <a:cs typeface="Calibri" pitchFamily="34" charset="-120"/>
-              </a:rPr>
-              <a:t>Alto</a:t>
-            </a:r>
-            <a:endParaRPr lang="en-US" sz="1200" dirty="0"/>
-          </a:p>
-        </p:txBody>
-      </p:sp>
-      <p:sp>
-        <p:nvSpPr>
-          <p:cNvPr id="26" name="Text 24"/>
-          <p:cNvSpPr/>
-          <p:nvPr/>
-        </p:nvSpPr>
-        <p:spPr>
-          <a:xfrm>
-            <a:off x="9829800" y="3282696"/>
-            <a:ext cx="1554480" cy="384048"/>
-          </a:xfrm>
-          <a:prstGeom prst="rect">
-            <a:avLst/>
-          </a:prstGeom>
-          <a:noFill/>
-          <a:ln/>
-        </p:spPr>
-        <p:txBody>
-          <a:bodyPr wrap="square" lIns="0" tIns="0" rIns="0" bIns="0" rtlCol="0" anchor="ctr"/>
-          <a:lstStyle/>
-          <a:p>
-            <a:pPr indent="0" marL="0">
-              <a:buNone/>
-            </a:pPr>
-            <a:r>
-              <a:rPr lang="en-US" sz="1200" dirty="0">
-                <a:solidFill>
-                  <a:srgbClr val="5A6784"/>
-                </a:solidFill>
-                <a:latin typeface="Calibri" pitchFamily="34" charset="0"/>
-                <a:ea typeface="Calibri" pitchFamily="34" charset="-122"/>
-                <a:cs typeface="Calibri" pitchFamily="34" charset="-120"/>
-              </a:rPr>
-              <a:t>12 meses</a:t>
-            </a:r>
-            <a:endParaRPr lang="en-US" sz="1200" dirty="0"/>
-          </a:p>
-        </p:txBody>
-      </p:sp>
-      <p:sp>
-        <p:nvSpPr>
-          <p:cNvPr id="27" name="Text 25"/>
           <p:cNvSpPr/>
           <p:nvPr/>
         </p:nvSpPr>
@@ -4633,14 +4477,14 @@
       </p:sp>
       <p:sp>
         <p:nvSpPr>
-          <p:cNvPr id="28" name="Text 26"/>
+          <p:cNvPr id="24" name="Text 22"/>
           <p:cNvSpPr/>
           <p:nvPr/>
         </p:nvSpPr>
         <p:spPr>
           <a:xfrm>
             <a:off x="1417320" y="3849624"/>
-            <a:ext cx="5943600" cy="384048"/>
+            <a:ext cx="6766560" cy="384048"/>
           </a:xfrm>
           <a:prstGeom prst="rect">
             <a:avLst/>
@@ -4672,14 +4516,14 @@
       </p:sp>
       <p:sp>
         <p:nvSpPr>
-          <p:cNvPr id="29" name="Text 27"/>
-          <p:cNvSpPr/>
-          <p:nvPr/>
-        </p:nvSpPr>
-        <p:spPr>
-          <a:xfrm>
-            <a:off x="6903720" y="3849624"/>
-            <a:ext cx="1280160" cy="384048"/>
+          <p:cNvPr id="25" name="Text 23"/>
+          <p:cNvSpPr/>
+          <p:nvPr/>
+        </p:nvSpPr>
+        <p:spPr>
+          <a:xfrm>
+            <a:off x="7726680" y="3849624"/>
+            <a:ext cx="1463040" cy="384048"/>
           </a:xfrm>
           <a:prstGeom prst="rect">
             <a:avLst/>
@@ -4711,14 +4555,14 @@
       </p:sp>
       <p:sp>
         <p:nvSpPr>
-          <p:cNvPr id="30" name="Text 28"/>
-          <p:cNvSpPr/>
-          <p:nvPr/>
-        </p:nvSpPr>
-        <p:spPr>
-          <a:xfrm>
-            <a:off x="8275320" y="3849624"/>
-            <a:ext cx="1280160" cy="384048"/>
+          <p:cNvPr id="26" name="Text 24"/>
+          <p:cNvSpPr/>
+          <p:nvPr/>
+        </p:nvSpPr>
+        <p:spPr>
+          <a:xfrm>
+            <a:off x="9555480" y="3849624"/>
+            <a:ext cx="1463040" cy="384048"/>
           </a:xfrm>
           <a:prstGeom prst="rect">
             <a:avLst/>
@@ -4750,46 +4594,7 @@
       </p:sp>
       <p:sp>
         <p:nvSpPr>
-          <p:cNvPr id="31" name="Text 29"/>
-          <p:cNvSpPr/>
-          <p:nvPr/>
-        </p:nvSpPr>
-        <p:spPr>
-          <a:xfrm>
-            <a:off x="9829800" y="3849624"/>
-            <a:ext cx="1554480" cy="384048"/>
-          </a:xfrm>
-          <a:prstGeom prst="rect">
-            <a:avLst/>
-          </a:prstGeom>
-          <a:noFill/>
-          <a:ln/>
-        </p:spPr>
-        <p:txBody>
-          <a:bodyPr wrap="square" lIns="0" tIns="0" rIns="0" bIns="0" rtlCol="0" anchor="ctr"/>
-          <a:lstStyle/>
-          <a:p>
-            <a:pPr indent="0" marL="0">
-              <a:buNone/>
-            </a:pPr>
-            <a:r>
-              <a:rPr lang="en-US" sz="1200" dirty="0">
-                <a:solidFill>
-                  <a:srgbClr val="5A6784"/>
-                </a:solidFill>
-                <a:latin typeface="Calibri" pitchFamily="34" charset="0"/>
-                <a:ea typeface="Calibri" pitchFamily="34" charset="-122"/>
-                <a:cs typeface="Calibri" pitchFamily="34" charset="-120"/>
-              </a:rPr>
-              <a:t>6 meses</a:t>
-            </a:r>
-            <a:endParaRPr lang="en-US" sz="1200" dirty="0"/>
-          </a:p>
-        </p:txBody>
-      </p:sp>
-      <p:sp>
-        <p:nvSpPr>
-          <p:cNvPr id="32" name="Shape 30"/>
+          <p:cNvPr id="27" name="Shape 25"/>
           <p:cNvSpPr/>
           <p:nvPr/>
         </p:nvSpPr>
@@ -4811,7 +4616,7 @@
       </p:sp>
       <p:sp>
         <p:nvSpPr>
-          <p:cNvPr id="33" name="Text 31"/>
+          <p:cNvPr id="28" name="Text 26"/>
           <p:cNvSpPr/>
           <p:nvPr/>
         </p:nvSpPr>
@@ -4850,14 +4655,14 @@
       </p:sp>
       <p:sp>
         <p:nvSpPr>
-          <p:cNvPr id="34" name="Text 32"/>
+          <p:cNvPr id="29" name="Text 27"/>
           <p:cNvSpPr/>
           <p:nvPr/>
         </p:nvSpPr>
         <p:spPr>
           <a:xfrm>
             <a:off x="1417320" y="4416552"/>
-            <a:ext cx="5943600" cy="384048"/>
+            <a:ext cx="6766560" cy="384048"/>
           </a:xfrm>
           <a:prstGeom prst="rect">
             <a:avLst/>
@@ -4889,14 +4694,14 @@
       </p:sp>
       <p:sp>
         <p:nvSpPr>
-          <p:cNvPr id="35" name="Text 33"/>
-          <p:cNvSpPr/>
-          <p:nvPr/>
-        </p:nvSpPr>
-        <p:spPr>
-          <a:xfrm>
-            <a:off x="6903720" y="4416552"/>
-            <a:ext cx="1280160" cy="384048"/>
+          <p:cNvPr id="30" name="Text 28"/>
+          <p:cNvSpPr/>
+          <p:nvPr/>
+        </p:nvSpPr>
+        <p:spPr>
+          <a:xfrm>
+            <a:off x="7726680" y="4416552"/>
+            <a:ext cx="1463040" cy="384048"/>
           </a:xfrm>
           <a:prstGeom prst="rect">
             <a:avLst/>
@@ -4928,14 +4733,14 @@
       </p:sp>
       <p:sp>
         <p:nvSpPr>
-          <p:cNvPr id="36" name="Text 34"/>
-          <p:cNvSpPr/>
-          <p:nvPr/>
-        </p:nvSpPr>
-        <p:spPr>
-          <a:xfrm>
-            <a:off x="8275320" y="4416552"/>
-            <a:ext cx="1280160" cy="384048"/>
+          <p:cNvPr id="31" name="Text 29"/>
+          <p:cNvSpPr/>
+          <p:nvPr/>
+        </p:nvSpPr>
+        <p:spPr>
+          <a:xfrm>
+            <a:off x="9555480" y="4416552"/>
+            <a:ext cx="1463040" cy="384048"/>
           </a:xfrm>
           <a:prstGeom prst="rect">
             <a:avLst/>
@@ -4967,46 +4772,7 @@
       </p:sp>
       <p:sp>
         <p:nvSpPr>
-          <p:cNvPr id="37" name="Text 35"/>
-          <p:cNvSpPr/>
-          <p:nvPr/>
-        </p:nvSpPr>
-        <p:spPr>
-          <a:xfrm>
-            <a:off x="9829800" y="4416552"/>
-            <a:ext cx="1554480" cy="384048"/>
-          </a:xfrm>
-          <a:prstGeom prst="rect">
-            <a:avLst/>
-          </a:prstGeom>
-          <a:noFill/>
-          <a:ln/>
-        </p:spPr>
-        <p:txBody>
-          <a:bodyPr wrap="square" lIns="0" tIns="0" rIns="0" bIns="0" rtlCol="0" anchor="ctr"/>
-          <a:lstStyle/>
-          <a:p>
-            <a:pPr indent="0" marL="0">
-              <a:buNone/>
-            </a:pPr>
-            <a:r>
-              <a:rPr lang="en-US" sz="1200" dirty="0">
-                <a:solidFill>
-                  <a:srgbClr val="5A6784"/>
-                </a:solidFill>
-                <a:latin typeface="Calibri" pitchFamily="34" charset="0"/>
-                <a:ea typeface="Calibri" pitchFamily="34" charset="-122"/>
-                <a:cs typeface="Calibri" pitchFamily="34" charset="-120"/>
-              </a:rPr>
-              <a:t>9 meses</a:t>
-            </a:r>
-            <a:endParaRPr lang="en-US" sz="1200" dirty="0"/>
-          </a:p>
-        </p:txBody>
-      </p:sp>
-      <p:sp>
-        <p:nvSpPr>
-          <p:cNvPr id="38" name="Text 36"/>
+          <p:cNvPr id="32" name="Text 30"/>
           <p:cNvSpPr/>
           <p:nvPr/>
         </p:nvSpPr>
@@ -5045,14 +4811,14 @@
       </p:sp>
       <p:sp>
         <p:nvSpPr>
-          <p:cNvPr id="39" name="Text 37"/>
+          <p:cNvPr id="33" name="Text 31"/>
           <p:cNvSpPr/>
           <p:nvPr/>
         </p:nvSpPr>
         <p:spPr>
           <a:xfrm>
             <a:off x="1417320" y="4983480"/>
-            <a:ext cx="5943600" cy="384048"/>
+            <a:ext cx="6766560" cy="384048"/>
           </a:xfrm>
           <a:prstGeom prst="rect">
             <a:avLst/>
@@ -5076,7 +4842,7 @@
                 <a:ea typeface="Calibri" pitchFamily="34" charset="-122"/>
                 <a:cs typeface="Calibri" pitchFamily="34" charset="-120"/>
               </a:rPr>
-              <a:t>Ativação assistida de cartão em 30 dias</a:t>
+              <a:t>Ativação assistida de cartão</a:t>
             </a:r>
             <a:endParaRPr lang="en-US" sz="1300" dirty="0"/>
           </a:p>
@@ -5084,14 +4850,14 @@
       </p:sp>
       <p:sp>
         <p:nvSpPr>
-          <p:cNvPr id="40" name="Text 38"/>
-          <p:cNvSpPr/>
-          <p:nvPr/>
-        </p:nvSpPr>
-        <p:spPr>
-          <a:xfrm>
-            <a:off x="6903720" y="4983480"/>
-            <a:ext cx="1280160" cy="384048"/>
+          <p:cNvPr id="34" name="Text 32"/>
+          <p:cNvSpPr/>
+          <p:nvPr/>
+        </p:nvSpPr>
+        <p:spPr>
+          <a:xfrm>
+            <a:off x="7726680" y="4983480"/>
+            <a:ext cx="1463040" cy="384048"/>
           </a:xfrm>
           <a:prstGeom prst="rect">
             <a:avLst/>
@@ -5123,14 +4889,14 @@
       </p:sp>
       <p:sp>
         <p:nvSpPr>
-          <p:cNvPr id="41" name="Text 39"/>
-          <p:cNvSpPr/>
-          <p:nvPr/>
-        </p:nvSpPr>
-        <p:spPr>
-          <a:xfrm>
-            <a:off x="8275320" y="4983480"/>
-            <a:ext cx="1280160" cy="384048"/>
+          <p:cNvPr id="35" name="Text 33"/>
+          <p:cNvSpPr/>
+          <p:nvPr/>
+        </p:nvSpPr>
+        <p:spPr>
+          <a:xfrm>
+            <a:off x="9555480" y="4983480"/>
+            <a:ext cx="1463040" cy="384048"/>
           </a:xfrm>
           <a:prstGeom prst="rect">
             <a:avLst/>
@@ -5162,46 +4928,7 @@
       </p:sp>
       <p:sp>
         <p:nvSpPr>
-          <p:cNvPr id="42" name="Text 40"/>
-          <p:cNvSpPr/>
-          <p:nvPr/>
-        </p:nvSpPr>
-        <p:spPr>
-          <a:xfrm>
-            <a:off x="9829800" y="4983480"/>
-            <a:ext cx="1554480" cy="384048"/>
-          </a:xfrm>
-          <a:prstGeom prst="rect">
-            <a:avLst/>
-          </a:prstGeom>
-          <a:noFill/>
-          <a:ln/>
-        </p:spPr>
-        <p:txBody>
-          <a:bodyPr wrap="square" lIns="0" tIns="0" rIns="0" bIns="0" rtlCol="0" anchor="ctr"/>
-          <a:lstStyle/>
-          <a:p>
-            <a:pPr indent="0" marL="0">
-              <a:buNone/>
-            </a:pPr>
-            <a:r>
-              <a:rPr lang="en-US" sz="1200" dirty="0">
-                <a:solidFill>
-                  <a:srgbClr val="5A6784"/>
-                </a:solidFill>
-                <a:latin typeface="Calibri" pitchFamily="34" charset="0"/>
-                <a:ea typeface="Calibri" pitchFamily="34" charset="-122"/>
-                <a:cs typeface="Calibri" pitchFamily="34" charset="-120"/>
-              </a:rPr>
-              <a:t>90 dias</a:t>
-            </a:r>
-            <a:endParaRPr lang="en-US" sz="1200" dirty="0"/>
-          </a:p>
-        </p:txBody>
-      </p:sp>
-      <p:sp>
-        <p:nvSpPr>
-          <p:cNvPr id="43" name="Shape 41"/>
+          <p:cNvPr id="36" name="Shape 34"/>
           <p:cNvSpPr/>
           <p:nvPr/>
         </p:nvSpPr>
@@ -5223,7 +4950,7 @@
       </p:sp>
       <p:sp>
         <p:nvSpPr>
-          <p:cNvPr id="44" name="Text 42"/>
+          <p:cNvPr id="37" name="Text 35"/>
           <p:cNvSpPr/>
           <p:nvPr/>
         </p:nvSpPr>
@@ -5262,14 +4989,14 @@
       </p:sp>
       <p:sp>
         <p:nvSpPr>
-          <p:cNvPr id="45" name="Text 43"/>
+          <p:cNvPr id="38" name="Text 36"/>
           <p:cNvSpPr/>
           <p:nvPr/>
         </p:nvSpPr>
         <p:spPr>
           <a:xfrm>
             <a:off x="1417320" y="5550408"/>
-            <a:ext cx="5943600" cy="384048"/>
+            <a:ext cx="6766560" cy="384048"/>
           </a:xfrm>
           <a:prstGeom prst="rect">
             <a:avLst/>
@@ -5301,14 +5028,14 @@
       </p:sp>
       <p:sp>
         <p:nvSpPr>
-          <p:cNvPr id="46" name="Text 44"/>
-          <p:cNvSpPr/>
-          <p:nvPr/>
-        </p:nvSpPr>
-        <p:spPr>
-          <a:xfrm>
-            <a:off x="6903720" y="5550408"/>
-            <a:ext cx="1280160" cy="384048"/>
+          <p:cNvPr id="39" name="Text 37"/>
+          <p:cNvSpPr/>
+          <p:nvPr/>
+        </p:nvSpPr>
+        <p:spPr>
+          <a:xfrm>
+            <a:off x="7726680" y="5550408"/>
+            <a:ext cx="1463040" cy="384048"/>
           </a:xfrm>
           <a:prstGeom prst="rect">
             <a:avLst/>
@@ -5340,14 +5067,14 @@
       </p:sp>
       <p:sp>
         <p:nvSpPr>
-          <p:cNvPr id="47" name="Text 45"/>
-          <p:cNvSpPr/>
-          <p:nvPr/>
-        </p:nvSpPr>
-        <p:spPr>
-          <a:xfrm>
-            <a:off x="8275320" y="5550408"/>
-            <a:ext cx="1280160" cy="384048"/>
+          <p:cNvPr id="40" name="Text 38"/>
+          <p:cNvSpPr/>
+          <p:nvPr/>
+        </p:nvSpPr>
+        <p:spPr>
+          <a:xfrm>
+            <a:off x="9555480" y="5550408"/>
+            <a:ext cx="1463040" cy="384048"/>
           </a:xfrm>
           <a:prstGeom prst="rect">
             <a:avLst/>
@@ -5379,46 +5106,7 @@
       </p:sp>
       <p:sp>
         <p:nvSpPr>
-          <p:cNvPr id="48" name="Text 46"/>
-          <p:cNvSpPr/>
-          <p:nvPr/>
-        </p:nvSpPr>
-        <p:spPr>
-          <a:xfrm>
-            <a:off x="9829800" y="5550408"/>
-            <a:ext cx="1554480" cy="384048"/>
-          </a:xfrm>
-          <a:prstGeom prst="rect">
-            <a:avLst/>
-          </a:prstGeom>
-          <a:noFill/>
-          <a:ln/>
-        </p:spPr>
-        <p:txBody>
-          <a:bodyPr wrap="square" lIns="0" tIns="0" rIns="0" bIns="0" rtlCol="0" anchor="ctr"/>
-          <a:lstStyle/>
-          <a:p>
-            <a:pPr indent="0" marL="0">
-              <a:buNone/>
-            </a:pPr>
-            <a:r>
-              <a:rPr lang="en-US" sz="1200" dirty="0">
-                <a:solidFill>
-                  <a:srgbClr val="5A6784"/>
-                </a:solidFill>
-                <a:latin typeface="Calibri" pitchFamily="34" charset="0"/>
-                <a:ea typeface="Calibri" pitchFamily="34" charset="-122"/>
-                <a:cs typeface="Calibri" pitchFamily="34" charset="-120"/>
-              </a:rPr>
-              <a:t>6 meses</a:t>
-            </a:r>
-            <a:endParaRPr lang="en-US" sz="1200" dirty="0"/>
-          </a:p>
-        </p:txBody>
-      </p:sp>
-      <p:sp>
-        <p:nvSpPr>
-          <p:cNvPr id="49" name="Text 47"/>
+          <p:cNvPr id="41" name="Text 39"/>
           <p:cNvSpPr/>
           <p:nvPr/>
         </p:nvSpPr>
@@ -5626,11 +5314,11 @@
         <p:spPr>
           <a:xfrm>
             <a:off x="640080" y="1783080"/>
-            <a:ext cx="2606040" cy="658368"/>
+            <a:ext cx="2606040" cy="713232"/>
           </a:xfrm>
           <a:prstGeom prst="roundRect">
             <a:avLst>
-              <a:gd name="adj" fmla="val 11111"/>
+              <a:gd name="adj" fmla="val 10256"/>
             </a:avLst>
           </a:prstGeom>
           <a:solidFill>
@@ -5647,8 +5335,8 @@
         </p:nvSpPr>
         <p:spPr>
           <a:xfrm>
-            <a:off x="640080" y="1783080"/>
-            <a:ext cx="2606040" cy="658368"/>
+            <a:off x="749808" y="1783080"/>
+            <a:ext cx="2386584" cy="713232"/>
           </a:xfrm>
           <a:prstGeom prst="rect">
             <a:avLst/>
@@ -5664,7 +5352,7 @@
               <a:buNone/>
             </a:pPr>
             <a:r>
-              <a:rPr lang="en-US" sz="2000" b="1" dirty="0">
+              <a:rPr lang="en-US" sz="1600" b="1" dirty="0">
                 <a:solidFill>
                   <a:srgbClr val="FFFFFF"/>
                 </a:solidFill>
@@ -5672,9 +5360,9 @@
                 <a:ea typeface="Cambria" pitchFamily="34" charset="-122"/>
                 <a:cs typeface="Cambria" pitchFamily="34" charset="-120"/>
               </a:rPr>
-              <a:t>30 dias</a:t>
-            </a:r>
-            <a:endParaRPr lang="en-US" sz="2000" dirty="0"/>
+              <a:t>Parar a hemorragia</a:t>
+            </a:r>
+            <a:endParaRPr lang="en-US" sz="1600" dirty="0"/>
           </a:p>
         </p:txBody>
       </p:sp>
@@ -5686,46 +5374,7 @@
         </p:nvSpPr>
         <p:spPr>
           <a:xfrm>
-            <a:off x="685800" y="2560320"/>
-            <a:ext cx="2514600" cy="365760"/>
-          </a:xfrm>
-          <a:prstGeom prst="rect">
-            <a:avLst/>
-          </a:prstGeom>
-          <a:noFill/>
-          <a:ln/>
-        </p:spPr>
-        <p:txBody>
-          <a:bodyPr wrap="square" lIns="0" tIns="0" rIns="0" bIns="0" rtlCol="0" anchor="ctr"/>
-          <a:lstStyle/>
-          <a:p>
-            <a:pPr indent="0" marL="0">
-              <a:buNone/>
-            </a:pPr>
-            <a:r>
-              <a:rPr lang="en-US" sz="1500" b="1" dirty="0">
-                <a:solidFill>
-                  <a:srgbClr val="13223F"/>
-                </a:solidFill>
-                <a:latin typeface="Cambria" pitchFamily="34" charset="0"/>
-                <a:ea typeface="Cambria" pitchFamily="34" charset="-122"/>
-                <a:cs typeface="Cambria" pitchFamily="34" charset="-120"/>
-              </a:rPr>
-              <a:t>Parar a hemorragia</a:t>
-            </a:r>
-            <a:endParaRPr lang="en-US" sz="1500" dirty="0"/>
-          </a:p>
-        </p:txBody>
-      </p:sp>
-      <p:sp>
-        <p:nvSpPr>
-          <p:cNvPr id="9" name="Text 7"/>
-          <p:cNvSpPr/>
-          <p:nvPr/>
-        </p:nvSpPr>
-        <p:spPr>
-          <a:xfrm>
-            <a:off x="685800" y="2999232"/>
+            <a:off x="685800" y="2697480"/>
             <a:ext cx="2514600" cy="1828800"/>
           </a:xfrm>
           <a:prstGeom prst="rect">
@@ -5813,13 +5462,55 @@
       </p:sp>
       <p:sp>
         <p:nvSpPr>
+          <p:cNvPr id="9" name="Text 7"/>
+          <p:cNvSpPr/>
+          <p:nvPr/>
+        </p:nvSpPr>
+        <p:spPr>
+          <a:xfrm>
+            <a:off x="685800" y="4114800"/>
+            <a:ext cx="2514600" cy="457200"/>
+          </a:xfrm>
+          <a:prstGeom prst="rect">
+            <a:avLst/>
+          </a:prstGeom>
+          <a:noFill/>
+          <a:ln/>
+        </p:spPr>
+        <p:txBody>
+          <a:bodyPr wrap="square" lIns="0" tIns="0" rIns="0" bIns="0" rtlCol="0" anchor="t"/>
+          <a:lstStyle/>
+          <a:p>
+            <a:pPr indent="0" marL="0">
+              <a:lnSpc>
+                <a:spcPts val="1500"/>
+              </a:lnSpc>
+              <a:buNone/>
+            </a:pPr>
+            <a:r>
+              <a:rPr lang="en-US" sz="1200" i="1" dirty="0">
+                <a:solidFill>
+                  <a:srgbClr val="E5484D"/>
+                </a:solidFill>
+                <a:latin typeface="Calibri" pitchFamily="34" charset="0"/>
+                <a:ea typeface="Calibri" pitchFamily="34" charset="-122"/>
+                <a:cs typeface="Calibri" pitchFamily="34" charset="-120"/>
+              </a:rPr>
+              <a:t>Saber o tamanho do buraco</a:t>
+            </a:r>
+            <a:endParaRPr lang="en-US" sz="1200" dirty="0"/>
+          </a:p>
+        </p:txBody>
+      </p:sp>
+      <p:sp>
+        <p:nvSpPr>
           <p:cNvPr id="10" name="Text 8"/>
           <p:cNvSpPr/>
           <p:nvPr/>
         </p:nvSpPr>
         <p:spPr>
           <a:xfrm>
-            <a:off x="3273552" y="1965960"/>
+            <a:off x="3273552" y="1993392"/>
             <a:ext cx="219456" cy="320040"/>
           </a:xfrm>
           <a:prstGeom prst="rect">
@@ -5859,11 +5550,11 @@
         <p:spPr>
           <a:xfrm>
             <a:off x="3493008" y="1783080"/>
-            <a:ext cx="2606040" cy="658368"/>
+            <a:ext cx="2606040" cy="713232"/>
           </a:xfrm>
           <a:prstGeom prst="roundRect">
             <a:avLst>
-              <a:gd name="adj" fmla="val 11111"/>
+              <a:gd name="adj" fmla="val 10256"/>
             </a:avLst>
           </a:prstGeom>
           <a:solidFill>
@@ -5880,8 +5571,8 @@
         </p:nvSpPr>
         <p:spPr>
           <a:xfrm>
-            <a:off x="3493008" y="1783080"/>
-            <a:ext cx="2606040" cy="658368"/>
+            <a:off x="3602736" y="1783080"/>
+            <a:ext cx="2386584" cy="713232"/>
           </a:xfrm>
           <a:prstGeom prst="rect">
             <a:avLst/>
@@ -5897,7 +5588,7 @@
               <a:buNone/>
             </a:pPr>
             <a:r>
-              <a:rPr lang="en-US" sz="2000" b="1" dirty="0">
+              <a:rPr lang="en-US" sz="1600" b="1" dirty="0">
                 <a:solidFill>
                   <a:srgbClr val="FFFFFF"/>
                 </a:solidFill>
@@ -5905,9 +5596,9 @@
                 <a:ea typeface="Cambria" pitchFamily="34" charset="-122"/>
                 <a:cs typeface="Cambria" pitchFamily="34" charset="-120"/>
               </a:rPr>
-              <a:t>90 dias</a:t>
-            </a:r>
-            <a:endParaRPr lang="en-US" sz="2000" dirty="0"/>
+              <a:t>Quick wins</a:t>
+            </a:r>
+            <a:endParaRPr lang="en-US" sz="1600" dirty="0"/>
           </a:p>
         </p:txBody>
       </p:sp>
@@ -5919,46 +5610,7 @@
         </p:nvSpPr>
         <p:spPr>
           <a:xfrm>
-            <a:off x="3538728" y="2560320"/>
-            <a:ext cx="2514600" cy="365760"/>
-          </a:xfrm>
-          <a:prstGeom prst="rect">
-            <a:avLst/>
-          </a:prstGeom>
-          <a:noFill/>
-          <a:ln/>
-        </p:spPr>
-        <p:txBody>
-          <a:bodyPr wrap="square" lIns="0" tIns="0" rIns="0" bIns="0" rtlCol="0" anchor="ctr"/>
-          <a:lstStyle/>
-          <a:p>
-            <a:pPr indent="0" marL="0">
-              <a:buNone/>
-            </a:pPr>
-            <a:r>
-              <a:rPr lang="en-US" sz="1500" b="1" dirty="0">
-                <a:solidFill>
-                  <a:srgbClr val="13223F"/>
-                </a:solidFill>
-                <a:latin typeface="Cambria" pitchFamily="34" charset="0"/>
-                <a:ea typeface="Cambria" pitchFamily="34" charset="-122"/>
-                <a:cs typeface="Cambria" pitchFamily="34" charset="-120"/>
-              </a:rPr>
-              <a:t>Quick wins</a:t>
-            </a:r>
-            <a:endParaRPr lang="en-US" sz="1500" dirty="0"/>
-          </a:p>
-        </p:txBody>
-      </p:sp>
-      <p:sp>
-        <p:nvSpPr>
-          <p:cNvPr id="14" name="Text 12"/>
-          <p:cNvSpPr/>
-          <p:nvPr/>
-        </p:nvSpPr>
-        <p:spPr>
-          <a:xfrm>
-            <a:off x="3538728" y="2999232"/>
+            <a:off x="3538728" y="2697480"/>
             <a:ext cx="2514600" cy="1828800"/>
           </a:xfrm>
           <a:prstGeom prst="rect">
@@ -6014,7 +5666,7 @@
                 <a:ea typeface="Calibri" pitchFamily="34" charset="-122"/>
                 <a:cs typeface="Calibri" pitchFamily="34" charset="-120"/>
               </a:rPr>
-              <a:t>Onboarding de ativação em 30 dias</a:t>
+              <a:t>Onboarding de ativação assistida</a:t>
             </a:r>
             <a:endParaRPr lang="en-US" sz="1250" dirty="0"/>
           </a:p>
@@ -6046,13 +5698,55 @@
       </p:sp>
       <p:sp>
         <p:nvSpPr>
+          <p:cNvPr id="14" name="Text 12"/>
+          <p:cNvSpPr/>
+          <p:nvPr/>
+        </p:nvSpPr>
+        <p:spPr>
+          <a:xfrm>
+            <a:off x="3538728" y="4114800"/>
+            <a:ext cx="2514600" cy="457200"/>
+          </a:xfrm>
+          <a:prstGeom prst="rect">
+            <a:avLst/>
+          </a:prstGeom>
+          <a:noFill/>
+          <a:ln/>
+        </p:spPr>
+        <p:txBody>
+          <a:bodyPr wrap="square" lIns="0" tIns="0" rIns="0" bIns="0" rtlCol="0" anchor="t"/>
+          <a:lstStyle/>
+          <a:p>
+            <a:pPr indent="0" marL="0">
+              <a:lnSpc>
+                <a:spcPts val="1500"/>
+              </a:lnSpc>
+              <a:buNone/>
+            </a:pPr>
+            <a:r>
+              <a:rPr lang="en-US" sz="1200" i="1" dirty="0">
+                <a:solidFill>
+                  <a:srgbClr val="B06A1E"/>
+                </a:solidFill>
+                <a:latin typeface="Calibri" pitchFamily="34" charset="0"/>
+                <a:ea typeface="Calibri" pitchFamily="34" charset="-122"/>
+                <a:cs typeface="Calibri" pitchFamily="34" charset="-120"/>
+              </a:rPr>
+              <a:t>Resultado sem projeto grande</a:t>
+            </a:r>
+            <a:endParaRPr lang="en-US" sz="1200" dirty="0"/>
+          </a:p>
+        </p:txBody>
+      </p:sp>
+      <p:sp>
+        <p:nvSpPr>
           <p:cNvPr id="15" name="Text 13"/>
           <p:cNvSpPr/>
           <p:nvPr/>
         </p:nvSpPr>
         <p:spPr>
           <a:xfrm>
-            <a:off x="6126480" y="1965960"/>
+            <a:off x="6126480" y="1993392"/>
             <a:ext cx="219456" cy="320040"/>
           </a:xfrm>
           <a:prstGeom prst="rect">
@@ -6092,11 +5786,11 @@
         <p:spPr>
           <a:xfrm>
             <a:off x="6345936" y="1783080"/>
-            <a:ext cx="2606040" cy="658368"/>
+            <a:ext cx="2606040" cy="713232"/>
           </a:xfrm>
           <a:prstGeom prst="roundRect">
             <a:avLst>
-              <a:gd name="adj" fmla="val 11111"/>
+              <a:gd name="adj" fmla="val 10256"/>
             </a:avLst>
           </a:prstGeom>
           <a:solidFill>
@@ -6113,8 +5807,8 @@
         </p:nvSpPr>
         <p:spPr>
           <a:xfrm>
-            <a:off x="6345936" y="1783080"/>
-            <a:ext cx="2606040" cy="658368"/>
+            <a:off x="6455664" y="1783080"/>
+            <a:ext cx="2386584" cy="713232"/>
           </a:xfrm>
           <a:prstGeom prst="rect">
             <a:avLst/>
@@ -6130,7 +5824,7 @@
               <a:buNone/>
             </a:pPr>
             <a:r>
-              <a:rPr lang="en-US" sz="2000" b="1" dirty="0">
+              <a:rPr lang="en-US" sz="1600" b="1" dirty="0">
                 <a:solidFill>
                   <a:srgbClr val="FFFFFF"/>
                 </a:solidFill>
@@ -6138,9 +5832,9 @@
                 <a:ea typeface="Cambria" pitchFamily="34" charset="-122"/>
                 <a:cs typeface="Cambria" pitchFamily="34" charset="-120"/>
               </a:rPr>
-              <a:t>180 dias</a:t>
-            </a:r>
-            <a:endParaRPr lang="en-US" sz="2000" dirty="0"/>
+              <a:t>Reabrir a entrada</a:t>
+            </a:r>
+            <a:endParaRPr lang="en-US" sz="1600" dirty="0"/>
           </a:p>
         </p:txBody>
       </p:sp>
@@ -6152,46 +5846,7 @@
         </p:nvSpPr>
         <p:spPr>
           <a:xfrm>
-            <a:off x="6391656" y="2560320"/>
-            <a:ext cx="2514600" cy="365760"/>
-          </a:xfrm>
-          <a:prstGeom prst="rect">
-            <a:avLst/>
-          </a:prstGeom>
-          <a:noFill/>
-          <a:ln/>
-        </p:spPr>
-        <p:txBody>
-          <a:bodyPr wrap="square" lIns="0" tIns="0" rIns="0" bIns="0" rtlCol="0" anchor="ctr"/>
-          <a:lstStyle/>
-          <a:p>
-            <a:pPr indent="0" marL="0">
-              <a:buNone/>
-            </a:pPr>
-            <a:r>
-              <a:rPr lang="en-US" sz="1500" b="1" dirty="0">
-                <a:solidFill>
-                  <a:srgbClr val="13223F"/>
-                </a:solidFill>
-                <a:latin typeface="Cambria" pitchFamily="34" charset="0"/>
-                <a:ea typeface="Cambria" pitchFamily="34" charset="-122"/>
-                <a:cs typeface="Cambria" pitchFamily="34" charset="-120"/>
-              </a:rPr>
-              <a:t>Reabrir a entrada</a:t>
-            </a:r>
-            <a:endParaRPr lang="en-US" sz="1500" dirty="0"/>
-          </a:p>
-        </p:txBody>
-      </p:sp>
-      <p:sp>
-        <p:nvSpPr>
-          <p:cNvPr id="19" name="Text 17"/>
-          <p:cNvSpPr/>
-          <p:nvPr/>
-        </p:nvSpPr>
-        <p:spPr>
-          <a:xfrm>
-            <a:off x="6391656" y="2999232"/>
+            <a:off x="6391656" y="2697480"/>
             <a:ext cx="2514600" cy="1828800"/>
           </a:xfrm>
           <a:prstGeom prst="rect">
@@ -6279,13 +5934,55 @@
       </p:sp>
       <p:sp>
         <p:nvSpPr>
+          <p:cNvPr id="19" name="Text 17"/>
+          <p:cNvSpPr/>
+          <p:nvPr/>
+        </p:nvSpPr>
+        <p:spPr>
+          <a:xfrm>
+            <a:off x="6391656" y="4114800"/>
+            <a:ext cx="2514600" cy="457200"/>
+          </a:xfrm>
+          <a:prstGeom prst="rect">
+            <a:avLst/>
+          </a:prstGeom>
+          <a:noFill/>
+          <a:ln/>
+        </p:spPr>
+        <p:txBody>
+          <a:bodyPr wrap="square" lIns="0" tIns="0" rIns="0" bIns="0" rtlCol="0" anchor="t"/>
+          <a:lstStyle/>
+          <a:p>
+            <a:pPr indent="0" marL="0">
+              <a:lnSpc>
+                <a:spcPts val="1500"/>
+              </a:lnSpc>
+              <a:buNone/>
+            </a:pPr>
+            <a:r>
+              <a:rPr lang="en-US" sz="1200" i="1" dirty="0">
+                <a:solidFill>
+                  <a:srgbClr val="3E8FB0"/>
+                </a:solidFill>
+                <a:latin typeface="Calibri" pitchFamily="34" charset="0"/>
+                <a:ea typeface="Calibri" pitchFamily="34" charset="-122"/>
+                <a:cs typeface="Calibri" pitchFamily="34" charset="-120"/>
+              </a:rPr>
+              <a:t>Volta a entrar cliente novo</a:t>
+            </a:r>
+            <a:endParaRPr lang="en-US" sz="1200" dirty="0"/>
+          </a:p>
+        </p:txBody>
+      </p:sp>
+      <p:sp>
+        <p:nvSpPr>
           <p:cNvPr id="20" name="Text 18"/>
           <p:cNvSpPr/>
           <p:nvPr/>
         </p:nvSpPr>
         <p:spPr>
           <a:xfrm>
-            <a:off x="8979408" y="1965960"/>
+            <a:off x="8979408" y="1993392"/>
             <a:ext cx="219456" cy="320040"/>
           </a:xfrm>
           <a:prstGeom prst="rect">
@@ -6325,11 +6022,11 @@
         <p:spPr>
           <a:xfrm>
             <a:off x="9198864" y="1783080"/>
-            <a:ext cx="2606040" cy="658368"/>
+            <a:ext cx="2606040" cy="713232"/>
           </a:xfrm>
           <a:prstGeom prst="roundRect">
             <a:avLst>
-              <a:gd name="adj" fmla="val 11111"/>
+              <a:gd name="adj" fmla="val 10256"/>
             </a:avLst>
           </a:prstGeom>
           <a:solidFill>
@@ -6346,8 +6043,8 @@
         </p:nvSpPr>
         <p:spPr>
           <a:xfrm>
-            <a:off x="9198864" y="1783080"/>
-            <a:ext cx="2606040" cy="658368"/>
+            <a:off x="9308592" y="1783080"/>
+            <a:ext cx="2386584" cy="713232"/>
           </a:xfrm>
           <a:prstGeom prst="rect">
             <a:avLst/>
@@ -6363,7 +6060,7 @@
               <a:buNone/>
             </a:pPr>
             <a:r>
-              <a:rPr lang="en-US" sz="2000" b="1" dirty="0">
+              <a:rPr lang="en-US" sz="1600" b="1" dirty="0">
                 <a:solidFill>
                   <a:srgbClr val="FFFFFF"/>
                 </a:solidFill>
@@ -6371,9 +6068,9 @@
                 <a:ea typeface="Cambria" pitchFamily="34" charset="-122"/>
                 <a:cs typeface="Cambria" pitchFamily="34" charset="-120"/>
               </a:rPr>
-              <a:t>360 dias</a:t>
-            </a:r>
-            <a:endParaRPr lang="en-US" sz="2000" dirty="0"/>
+              <a:t>Principalidade</a:t>
+            </a:r>
+            <a:endParaRPr lang="en-US" sz="1600" dirty="0"/>
           </a:p>
         </p:txBody>
       </p:sp>
@@ -6385,46 +6082,7 @@
         </p:nvSpPr>
         <p:spPr>
           <a:xfrm>
-            <a:off x="9244584" y="2560320"/>
-            <a:ext cx="2514600" cy="365760"/>
-          </a:xfrm>
-          <a:prstGeom prst="rect">
-            <a:avLst/>
-          </a:prstGeom>
-          <a:noFill/>
-          <a:ln/>
-        </p:spPr>
-        <p:txBody>
-          <a:bodyPr wrap="square" lIns="0" tIns="0" rIns="0" bIns="0" rtlCol="0" anchor="ctr"/>
-          <a:lstStyle/>
-          <a:p>
-            <a:pPr indent="0" marL="0">
-              <a:buNone/>
-            </a:pPr>
-            <a:r>
-              <a:rPr lang="en-US" sz="1500" b="1" dirty="0">
-                <a:solidFill>
-                  <a:srgbClr val="13223F"/>
-                </a:solidFill>
-                <a:latin typeface="Cambria" pitchFamily="34" charset="0"/>
-                <a:ea typeface="Cambria" pitchFamily="34" charset="-122"/>
-                <a:cs typeface="Cambria" pitchFamily="34" charset="-120"/>
-              </a:rPr>
-              <a:t>Principalidade</a:t>
-            </a:r>
-            <a:endParaRPr lang="en-US" sz="1500" dirty="0"/>
-          </a:p>
-        </p:txBody>
-      </p:sp>
-      <p:sp>
-        <p:nvSpPr>
-          <p:cNvPr id="24" name="Text 22"/>
-          <p:cNvSpPr/>
-          <p:nvPr/>
-        </p:nvSpPr>
-        <p:spPr>
-          <a:xfrm>
-            <a:off x="9244584" y="2999232"/>
+            <a:off x="9244584" y="2697480"/>
             <a:ext cx="2514600" cy="1828800"/>
           </a:xfrm>
           <a:prstGeom prst="rect">
@@ -6507,6 +6165,48 @@
               <a:t>25% com crédito recorrente</a:t>
             </a:r>
             <a:endParaRPr lang="en-US" sz="1250" dirty="0"/>
+          </a:p>
+        </p:txBody>
+      </p:sp>
+      <p:sp>
+        <p:nvSpPr>
+          <p:cNvPr id="24" name="Text 22"/>
+          <p:cNvSpPr/>
+          <p:nvPr/>
+        </p:nvSpPr>
+        <p:spPr>
+          <a:xfrm>
+            <a:off x="9244584" y="4114800"/>
+            <a:ext cx="2514600" cy="457200"/>
+          </a:xfrm>
+          <a:prstGeom prst="rect">
+            <a:avLst/>
+          </a:prstGeom>
+          <a:noFill/>
+          <a:ln/>
+        </p:spPr>
+        <p:txBody>
+          <a:bodyPr wrap="square" lIns="0" tIns="0" rIns="0" bIns="0" rtlCol="0" anchor="t"/>
+          <a:lstStyle/>
+          <a:p>
+            <a:pPr indent="0" marL="0">
+              <a:lnSpc>
+                <a:spcPts val="1500"/>
+              </a:lnSpc>
+              <a:buNone/>
+            </a:pPr>
+            <a:r>
+              <a:rPr lang="en-US" sz="1200" i="1" dirty="0">
+                <a:solidFill>
+                  <a:srgbClr val="00A896"/>
+                </a:solidFill>
+                <a:latin typeface="Calibri" pitchFamily="34" charset="0"/>
+                <a:ea typeface="Calibri" pitchFamily="34" charset="-122"/>
+                <a:cs typeface="Calibri" pitchFamily="34" charset="-120"/>
+              </a:rPr>
+              <a:t>O salário passa a cair aqui</a:t>
+            </a:r>
+            <a:endParaRPr lang="en-US" sz="1200" dirty="0"/>
           </a:p>
         </p:txBody>
       </p:sp>

--- a/Priceless_Bank_Apresentacao.pptx
+++ b/Priceless_Bank_Apresentacao.pptx
@@ -4352,7 +4352,7 @@
                 <a:ea typeface="Calibri" pitchFamily="34" charset="-122"/>
                 <a:cs typeface="Calibri" pitchFamily="34" charset="-120"/>
               </a:rPr>
-              <a:t>Programa de domicílio de renda</a:t>
+              <a:t>Abertura de conta 100% digital</a:t>
             </a:r>
             <a:endParaRPr lang="en-US" sz="1300" dirty="0"/>
           </a:p>
@@ -4430,7 +4430,7 @@
                 <a:ea typeface="Calibri" pitchFamily="34" charset="-122"/>
                 <a:cs typeface="Calibri" pitchFamily="34" charset="-120"/>
               </a:rPr>
-              <a:t>Alto</a:t>
+              <a:t>Médio</a:t>
             </a:r>
             <a:endParaRPr lang="en-US" sz="1200" dirty="0"/>
           </a:p>
@@ -4508,7 +4508,7 @@
                 <a:ea typeface="Calibri" pitchFamily="34" charset="-122"/>
                 <a:cs typeface="Calibri" pitchFamily="34" charset="-120"/>
               </a:rPr>
-              <a:t>Abertura de conta 100% digital</a:t>
+              <a:t>Investimento que vira limite de cartão</a:t>
             </a:r>
             <a:endParaRPr lang="en-US" sz="1300" dirty="0"/>
           </a:p>
@@ -4686,7 +4686,7 @@
                 <a:ea typeface="Calibri" pitchFamily="34" charset="-122"/>
                 <a:cs typeface="Calibri" pitchFamily="34" charset="-120"/>
               </a:rPr>
-              <a:t>Investimento que vira limite de cartão</a:t>
+              <a:t>Ativação assistida de cartão</a:t>
             </a:r>
             <a:endParaRPr lang="en-US" sz="1300" dirty="0"/>
           </a:p>
@@ -4725,7 +4725,7 @@
                 <a:ea typeface="Calibri" pitchFamily="34" charset="-122"/>
                 <a:cs typeface="Calibri" pitchFamily="34" charset="-120"/>
               </a:rPr>
-              <a:t>Alto</a:t>
+              <a:t>Médio</a:t>
             </a:r>
             <a:endParaRPr lang="en-US" sz="1200" dirty="0"/>
           </a:p>
@@ -4764,7 +4764,7 @@
                 <a:ea typeface="Calibri" pitchFamily="34" charset="-122"/>
                 <a:cs typeface="Calibri" pitchFamily="34" charset="-120"/>
               </a:rPr>
-              <a:t>Médio</a:t>
+              <a:t>Baixo</a:t>
             </a:r>
             <a:endParaRPr lang="en-US" sz="1200" dirty="0"/>
           </a:p>
@@ -4842,7 +4842,7 @@
                 <a:ea typeface="Calibri" pitchFamily="34" charset="-122"/>
                 <a:cs typeface="Calibri" pitchFamily="34" charset="-120"/>
               </a:rPr>
-              <a:t>Ativação assistida de cartão</a:t>
+              <a:t>Investigação técnica do PIX</a:t>
             </a:r>
             <a:endParaRPr lang="en-US" sz="1300" dirty="0"/>
           </a:p>
@@ -4920,7 +4920,7 @@
                 <a:ea typeface="Calibri" pitchFamily="34" charset="-122"/>
                 <a:cs typeface="Calibri" pitchFamily="34" charset="-120"/>
               </a:rPr>
-              <a:t>Baixo</a:t>
+              <a:t>Médio</a:t>
             </a:r>
             <a:endParaRPr lang="en-US" sz="1200" dirty="0"/>
           </a:p>
@@ -4928,91 +4928,30 @@
       </p:sp>
       <p:sp>
         <p:nvSpPr>
-          <p:cNvPr id="36" name="Shape 34"/>
-          <p:cNvSpPr/>
-          <p:nvPr/>
-        </p:nvSpPr>
-        <p:spPr>
-          <a:xfrm>
-            <a:off x="640080" y="5495544"/>
-            <a:ext cx="10881360" cy="512064"/>
-          </a:xfrm>
-          <a:prstGeom prst="roundRect">
-            <a:avLst>
-              <a:gd name="adj" fmla="val 8929"/>
-            </a:avLst>
-          </a:prstGeom>
-          <a:solidFill>
-            <a:srgbClr val="F4F6FA"/>
-          </a:solidFill>
-          <a:ln/>
-        </p:spPr>
-      </p:sp>
-      <p:sp>
-        <p:nvSpPr>
-          <p:cNvPr id="37" name="Text 35"/>
-          <p:cNvSpPr/>
-          <p:nvPr/>
-        </p:nvSpPr>
-        <p:spPr>
-          <a:xfrm>
-            <a:off x="777240" y="5550408"/>
-            <a:ext cx="548640" cy="384048"/>
-          </a:xfrm>
-          <a:prstGeom prst="rect">
-            <a:avLst/>
-          </a:prstGeom>
-          <a:noFill/>
-          <a:ln/>
-        </p:spPr>
-        <p:txBody>
-          <a:bodyPr wrap="square" lIns="0" tIns="0" rIns="0" bIns="0" rtlCol="0" anchor="ctr"/>
-          <a:lstStyle/>
-          <a:p>
-            <a:pPr indent="0" marL="0">
-              <a:buNone/>
-            </a:pPr>
-            <a:r>
-              <a:rPr lang="en-US" sz="1400" b="1" dirty="0">
-                <a:solidFill>
-                  <a:srgbClr val="5A6784"/>
-                </a:solidFill>
-                <a:latin typeface="Cambria" pitchFamily="34" charset="0"/>
-                <a:ea typeface="Cambria" pitchFamily="34" charset="-122"/>
-                <a:cs typeface="Cambria" pitchFamily="34" charset="-120"/>
-              </a:rPr>
-              <a:t>7ª</a:t>
-            </a:r>
-            <a:endParaRPr lang="en-US" sz="1400" dirty="0"/>
-          </a:p>
-        </p:txBody>
-      </p:sp>
-      <p:sp>
-        <p:nvSpPr>
-          <p:cNvPr id="38" name="Text 36"/>
-          <p:cNvSpPr/>
-          <p:nvPr/>
-        </p:nvSpPr>
-        <p:spPr>
-          <a:xfrm>
-            <a:off x="1417320" y="5550408"/>
-            <a:ext cx="6766560" cy="384048"/>
-          </a:xfrm>
-          <a:prstGeom prst="rect">
-            <a:avLst/>
-          </a:prstGeom>
-          <a:noFill/>
-          <a:ln/>
-        </p:spPr>
-        <p:txBody>
-          <a:bodyPr wrap="square" lIns="0" tIns="0" rIns="0" bIns="0" rtlCol="0" anchor="ctr"/>
-          <a:lstStyle/>
-          <a:p>
-            <a:pPr indent="0" marL="0">
-              <a:buNone/>
-            </a:pPr>
-            <a:r>
-              <a:rPr lang="en-US" sz="1300" dirty="0">
+          <p:cNvPr id="36" name="Text 34"/>
+          <p:cNvSpPr/>
+          <p:nvPr/>
+        </p:nvSpPr>
+        <p:spPr>
+          <a:xfrm>
+            <a:off x="640080" y="5806440"/>
+            <a:ext cx="10881360" cy="365760"/>
+          </a:xfrm>
+          <a:prstGeom prst="rect">
+            <a:avLst/>
+          </a:prstGeom>
+          <a:noFill/>
+          <a:ln/>
+        </p:spPr>
+        <p:txBody>
+          <a:bodyPr wrap="square" lIns="0" tIns="0" rIns="0" bIns="0" rtlCol="0" anchor="ctr"/>
+          <a:lstStyle/>
+          <a:p>
+            <a:pPr indent="0" marL="0">
+              <a:buNone/>
+            </a:pPr>
+            <a:r>
+              <a:rPr lang="en-US" sz="1300" i="1" dirty="0">
                 <a:solidFill>
                   <a:srgbClr val="13223F"/>
                 </a:solidFill>
@@ -5020,124 +4959,7 @@
                 <a:ea typeface="Calibri" pitchFamily="34" charset="-122"/>
                 <a:cs typeface="Calibri" pitchFamily="34" charset="-120"/>
               </a:rPr>
-              <a:t>Investigação técnica do PIX</a:t>
-            </a:r>
-            <a:endParaRPr lang="en-US" sz="1300" dirty="0"/>
-          </a:p>
-        </p:txBody>
-      </p:sp>
-      <p:sp>
-        <p:nvSpPr>
-          <p:cNvPr id="39" name="Text 37"/>
-          <p:cNvSpPr/>
-          <p:nvPr/>
-        </p:nvSpPr>
-        <p:spPr>
-          <a:xfrm>
-            <a:off x="7726680" y="5550408"/>
-            <a:ext cx="1463040" cy="384048"/>
-          </a:xfrm>
-          <a:prstGeom prst="rect">
-            <a:avLst/>
-          </a:prstGeom>
-          <a:noFill/>
-          <a:ln/>
-        </p:spPr>
-        <p:txBody>
-          <a:bodyPr wrap="square" lIns="0" tIns="0" rIns="0" bIns="0" rtlCol="0" anchor="ctr"/>
-          <a:lstStyle/>
-          <a:p>
-            <a:pPr indent="0" marL="0">
-              <a:buNone/>
-            </a:pPr>
-            <a:r>
-              <a:rPr lang="en-US" sz="1200" dirty="0">
-                <a:solidFill>
-                  <a:srgbClr val="5A6784"/>
-                </a:solidFill>
-                <a:latin typeface="Calibri" pitchFamily="34" charset="0"/>
-                <a:ea typeface="Calibri" pitchFamily="34" charset="-122"/>
-                <a:cs typeface="Calibri" pitchFamily="34" charset="-120"/>
-              </a:rPr>
-              <a:t>Médio</a:t>
-            </a:r>
-            <a:endParaRPr lang="en-US" sz="1200" dirty="0"/>
-          </a:p>
-        </p:txBody>
-      </p:sp>
-      <p:sp>
-        <p:nvSpPr>
-          <p:cNvPr id="40" name="Text 38"/>
-          <p:cNvSpPr/>
-          <p:nvPr/>
-        </p:nvSpPr>
-        <p:spPr>
-          <a:xfrm>
-            <a:off x="9555480" y="5550408"/>
-            <a:ext cx="1463040" cy="384048"/>
-          </a:xfrm>
-          <a:prstGeom prst="rect">
-            <a:avLst/>
-          </a:prstGeom>
-          <a:noFill/>
-          <a:ln/>
-        </p:spPr>
-        <p:txBody>
-          <a:bodyPr wrap="square" lIns="0" tIns="0" rIns="0" bIns="0" rtlCol="0" anchor="ctr"/>
-          <a:lstStyle/>
-          <a:p>
-            <a:pPr indent="0" marL="0">
-              <a:buNone/>
-            </a:pPr>
-            <a:r>
-              <a:rPr lang="en-US" sz="1200" dirty="0">
-                <a:solidFill>
-                  <a:srgbClr val="5A6784"/>
-                </a:solidFill>
-                <a:latin typeface="Calibri" pitchFamily="34" charset="0"/>
-                <a:ea typeface="Calibri" pitchFamily="34" charset="-122"/>
-                <a:cs typeface="Calibri" pitchFamily="34" charset="-120"/>
-              </a:rPr>
-              <a:t>Médio</a:t>
-            </a:r>
-            <a:endParaRPr lang="en-US" sz="1200" dirty="0"/>
-          </a:p>
-        </p:txBody>
-      </p:sp>
-      <p:sp>
-        <p:nvSpPr>
-          <p:cNvPr id="41" name="Text 39"/>
-          <p:cNvSpPr/>
-          <p:nvPr/>
-        </p:nvSpPr>
-        <p:spPr>
-          <a:xfrm>
-            <a:off x="640080" y="6172200"/>
-            <a:ext cx="10881360" cy="365760"/>
-          </a:xfrm>
-          <a:prstGeom prst="rect">
-            <a:avLst/>
-          </a:prstGeom>
-          <a:noFill/>
-          <a:ln/>
-        </p:spPr>
-        <p:txBody>
-          <a:bodyPr wrap="square" lIns="0" tIns="0" rIns="0" bIns="0" rtlCol="0" anchor="ctr"/>
-          <a:lstStyle/>
-          <a:p>
-            <a:pPr indent="0" marL="0">
-              <a:buNone/>
-            </a:pPr>
-            <a:r>
-              <a:rPr lang="en-US" sz="1300" i="1" dirty="0">
-                <a:solidFill>
-                  <a:srgbClr val="13223F"/>
-                </a:solidFill>
-                <a:latin typeface="Calibri" pitchFamily="34" charset="0"/>
-                <a:ea typeface="Calibri" pitchFamily="34" charset="-122"/>
-                <a:cs typeface="Calibri" pitchFamily="34" charset="-120"/>
-              </a:rPr>
-              <a:t>As duas primeiras custam pouco e destravam o resto. A terceira resolve a raiz, e por isso começa junto mesmo sendo a mais lenta.</a:t>
+              <a:t>As duas primeiras custam pouco e destravam o resto. As demais exigem projeto e entram em paralelo, sem esperar a primeira terminar.</a:t>
             </a:r>
             <a:endParaRPr lang="en-US" sz="1300" dirty="0"/>
           </a:p>
@@ -6114,7 +5936,7 @@
                 <a:ea typeface="Calibri" pitchFamily="34" charset="-122"/>
                 <a:cs typeface="Calibri" pitchFamily="34" charset="-120"/>
               </a:rPr>
-              <a:t>Domicílio de renda em escala</a:t>
+              <a:t>Rendimento no saldo em conta</a:t>
             </a:r>
             <a:endParaRPr lang="en-US" sz="1250" dirty="0"/>
           </a:p>
@@ -6204,7 +6026,7 @@
                 <a:ea typeface="Calibri" pitchFamily="34" charset="-122"/>
                 <a:cs typeface="Calibri" pitchFamily="34" charset="-120"/>
               </a:rPr>
-              <a:t>O salário passa a cair aqui</a:t>
+              <a:t>O banco vira a opção padrão</a:t>
             </a:r>
             <a:endParaRPr lang="en-US" sz="1200" dirty="0"/>
           </a:p>

--- a/Priceless_Bank_Apresentacao.pptx
+++ b/Priceless_Bank_Apresentacao.pptx
@@ -17,9 +17,10 @@
     <p:sldId id="265" r:id="rId11"/>
     <p:sldId id="266" r:id="rId12"/>
     <p:sldId id="267" r:id="rId13"/>
+    <p:sldId id="268" r:id="rId14"/>
   </p:sldIdLst>
   <p:notesMasterIdLst>
-    <p:notesMasterId r:id="rId14"/>
+    <p:notesMasterId r:id="rId15"/>
   </p:notesMasterIdLst>
   <p:sldSz cx="12192000" cy="6858000"/>
   <p:notesSz cx="6858000" cy="12192000"/>
@@ -2213,7 +2214,7 @@
           <a:p>
             <a:r>
               <a:rPr lang="en-US" dirty="0"/>
-              <a:t>A primeira é uma pergunta, não um projeto: custa uma reunião e a resposta destrava ou invalida o resto do plano.</a:t>
+              <a:t>O cliente não parou de movimentar dinheiro, movimenta por PIX e para fora. O incentivo paga a troca de trilho, e se paga pelo interchange que a migração gera.</a:t>
             </a:r>
             <a:endParaRPr lang="en-US" dirty="0"/>
           </a:p>
@@ -2301,7 +2302,7 @@
           <a:p>
             <a:r>
               <a:rPr lang="en-US" dirty="0"/>
-              <a:t>Uma métrica só para acompanhar tudo: quanto cada cliente usa o banco. É o número que resume o diagnóstico inteiro.</a:t>
+              <a:t>A primeira é uma pergunta, não um projeto: custa uma reunião e a resposta destrava ou invalida o resto do plano.</a:t>
             </a:r>
             <a:endParaRPr lang="en-US" dirty="0"/>
           </a:p>
@@ -2389,7 +2390,7 @@
           <a:p>
             <a:r>
               <a:rPr lang="en-US" dirty="0"/>
-              <a:t>Fecho. Disputar principalidade, não transação.</a:t>
+              <a:t>Uma métrica só para acompanhar tudo: quanto cada cliente usa o banco. É o número que resume o diagnóstico inteiro.</a:t>
             </a:r>
             <a:endParaRPr lang="en-US" dirty="0"/>
           </a:p>
@@ -2413,6 +2414,94 @@
             <a:fld id="{F7021451-1387-4CA6-816F-3879F97B5CBC}" type="slidenum">
               <a:rPr lang="en-US"/>
               <a:t>12</a:t>
+            </a:fld>
+            <a:endParaRPr lang="en-US"/>
+          </a:p>
+        </p:txBody>
+      </p:sp>
+    </p:spTree>
+    <p:extLst>
+      <p:ext uri="{BB962C8B-B14F-4D97-AF65-F5344CB8AC3E}">
+        <p14:creationId xmlns:p14="http://schemas.microsoft.com/office/powerpoint/2010/main" val="1024086991"/>
+      </p:ext>
+    </p:extLst>
+  </p:cSld>
+  <p:clrMapOvr>
+    <a:masterClrMapping/>
+  </p:clrMapOvr>
+</p:notes>
+</file>
+
+<file path=ppt/notesSlides/notesSlide13.xml><?xml version="1.0" encoding="utf-8"?>
+<p:notes xmlns:a="http://schemas.openxmlformats.org/drawingml/2006/main" xmlns:r="http://schemas.openxmlformats.org/officeDocument/2006/relationships" xmlns:p="http://schemas.openxmlformats.org/presentationml/2006/main">
+  <p:cSld>
+    <p:spTree>
+      <p:nvGrpSpPr>
+        <p:cNvPr id="1" name=""/>
+        <p:cNvGrpSpPr/>
+        <p:nvPr/>
+      </p:nvGrpSpPr>
+      <p:grpSpPr>
+        <a:xfrm>
+          <a:off x="0" y="0"/>
+          <a:ext cx="0" cy="0"/>
+          <a:chOff x="0" y="0"/>
+          <a:chExt cx="0" cy="0"/>
+        </a:xfrm>
+      </p:grpSpPr>
+      <p:sp>
+        <p:nvSpPr>
+          <p:cNvPr id="2" name="Slide Image Placeholder 1"/>
+          <p:cNvSpPr>
+            <a:spLocks noGrp="1" noRot="1" noChangeAspect="1"/>
+          </p:cNvSpPr>
+          <p:nvPr>
+            <p:ph type="sldImg"/>
+          </p:nvPr>
+        </p:nvSpPr>
+        <p:spPr/>
+      </p:sp>
+      <p:sp>
+        <p:nvSpPr>
+          <p:cNvPr id="3" name="Notes Placeholder 2"/>
+          <p:cNvSpPr>
+            <a:spLocks noGrp="1"/>
+          </p:cNvSpPr>
+          <p:nvPr>
+            <p:ph type="body" idx="1"/>
+          </p:nvPr>
+        </p:nvSpPr>
+        <p:spPr/>
+        <p:txBody>
+          <a:bodyPr/>
+          <a:lstStyle/>
+          <a:p>
+            <a:r>
+              <a:rPr lang="en-US" dirty="0"/>
+              <a:t>Fecho. Disputar principalidade, não transação.</a:t>
+            </a:r>
+            <a:endParaRPr lang="en-US" dirty="0"/>
+          </a:p>
+        </p:txBody>
+      </p:sp>
+      <p:sp>
+        <p:nvSpPr>
+          <p:cNvPr id="4" name="Slide Number Placeholder 3"/>
+          <p:cNvSpPr>
+            <a:spLocks noGrp="1"/>
+          </p:cNvSpPr>
+          <p:nvPr>
+            <p:ph type="sldNum" sz="quarter" idx="10"/>
+          </p:nvPr>
+        </p:nvSpPr>
+        <p:spPr/>
+        <p:txBody>
+          <a:bodyPr/>
+          <a:lstStyle/>
+          <a:p>
+            <a:fld id="{F7021451-1387-4CA6-816F-3879F97B5CBC}" type="slidenum">
+              <a:rPr lang="en-US"/>
+              <a:t>13</a:t>
             </a:fld>
             <a:endParaRPr lang="en-US"/>
           </a:p>
@@ -3762,7 +3851,7 @@
                 <a:ea typeface="Cambria" pitchFamily="34" charset="-122"/>
                 <a:cs typeface="Cambria" pitchFamily="34" charset="-120"/>
               </a:rPr>
-              <a:t>Por onde começar</a:t>
+              <a:t>O incentivo para usar o cartão</a:t>
             </a:r>
             <a:endParaRPr lang="en-US" sz="3000" dirty="0"/>
           </a:p>
@@ -3801,7 +3890,7 @@
                 <a:ea typeface="Calibri" pitchFamily="34" charset="-122"/>
                 <a:cs typeface="Calibri" pitchFamily="34" charset="-120"/>
               </a:rPr>
-              <a:t>Ordenado por retorno sobre esforço</a:t>
+              <a:t>O cartão não compete com "não gastar". Compete com o PIX na hora da compra</a:t>
             </a:r>
             <a:endParaRPr lang="en-US" sz="1400" dirty="0"/>
           </a:p>
@@ -3809,30 +3898,131 @@
       </p:sp>
       <p:sp>
         <p:nvSpPr>
-          <p:cNvPr id="6" name="Text 4"/>
-          <p:cNvSpPr/>
-          <p:nvPr/>
-        </p:nvSpPr>
-        <p:spPr>
-          <a:xfrm>
-            <a:off x="1417320" y="1783080"/>
-            <a:ext cx="2011680" cy="274320"/>
-          </a:xfrm>
-          <a:prstGeom prst="rect">
-            <a:avLst/>
-          </a:prstGeom>
-          <a:noFill/>
-          <a:ln/>
-        </p:spPr>
-        <p:txBody>
-          <a:bodyPr wrap="square" lIns="0" tIns="0" rIns="0" bIns="0" rtlCol="0" anchor="ctr"/>
-          <a:lstStyle/>
-          <a:p>
-            <a:pPr indent="0" marL="0">
-              <a:buNone/>
-            </a:pPr>
-            <a:r>
-              <a:rPr lang="en-US" sz="1100" b="1" spc="100" kern="0" dirty="0">
+          <p:cNvPr id="6" name="Shape 4"/>
+          <p:cNvSpPr/>
+          <p:nvPr/>
+        </p:nvSpPr>
+        <p:spPr>
+          <a:xfrm>
+            <a:off x="640080" y="1783080"/>
+            <a:ext cx="457200" cy="457200"/>
+          </a:xfrm>
+          <a:prstGeom prst="ellipse">
+            <a:avLst/>
+          </a:prstGeom>
+          <a:solidFill>
+            <a:srgbClr val="00A896"/>
+          </a:solidFill>
+          <a:ln/>
+        </p:spPr>
+      </p:sp>
+      <p:sp>
+        <p:nvSpPr>
+          <p:cNvPr id="7" name="Text 5"/>
+          <p:cNvSpPr/>
+          <p:nvPr/>
+        </p:nvSpPr>
+        <p:spPr>
+          <a:xfrm>
+            <a:off x="640080" y="1783080"/>
+            <a:ext cx="457200" cy="457200"/>
+          </a:xfrm>
+          <a:prstGeom prst="rect">
+            <a:avLst/>
+          </a:prstGeom>
+          <a:noFill/>
+          <a:ln/>
+        </p:spPr>
+        <p:txBody>
+          <a:bodyPr wrap="square" lIns="0" tIns="0" rIns="0" bIns="0" rtlCol="0" anchor="ctr"/>
+          <a:lstStyle/>
+          <a:p>
+            <a:pPr algn="ctr" indent="0" marL="0">
+              <a:buNone/>
+            </a:pPr>
+            <a:r>
+              <a:rPr lang="en-US" sz="1700" b="1" dirty="0">
+                <a:solidFill>
+                  <a:srgbClr val="FFFFFF"/>
+                </a:solidFill>
+                <a:latin typeface="Calibri" pitchFamily="34" charset="0"/>
+                <a:ea typeface="Calibri" pitchFamily="34" charset="-122"/>
+                <a:cs typeface="Calibri" pitchFamily="34" charset="-120"/>
+              </a:rPr>
+              <a:t>1</a:t>
+            </a:r>
+            <a:endParaRPr lang="en-US" sz="1700" dirty="0"/>
+          </a:p>
+        </p:txBody>
+      </p:sp>
+      <p:sp>
+        <p:nvSpPr>
+          <p:cNvPr id="8" name="Text 6"/>
+          <p:cNvSpPr/>
+          <p:nvPr/>
+        </p:nvSpPr>
+        <p:spPr>
+          <a:xfrm>
+            <a:off x="1298448" y="1746504"/>
+            <a:ext cx="5852160" cy="384048"/>
+          </a:xfrm>
+          <a:prstGeom prst="rect">
+            <a:avLst/>
+          </a:prstGeom>
+          <a:noFill/>
+          <a:ln/>
+        </p:spPr>
+        <p:txBody>
+          <a:bodyPr wrap="square" lIns="0" tIns="0" rIns="0" bIns="0" rtlCol="0" anchor="ctr"/>
+          <a:lstStyle/>
+          <a:p>
+            <a:pPr indent="0" marL="0">
+              <a:buNone/>
+            </a:pPr>
+            <a:r>
+              <a:rPr lang="en-US" sz="1600" b="1" dirty="0">
+                <a:solidFill>
+                  <a:srgbClr val="13223F"/>
+                </a:solidFill>
+                <a:latin typeface="Cambria" pitchFamily="34" charset="0"/>
+                <a:ea typeface="Cambria" pitchFamily="34" charset="-122"/>
+                <a:cs typeface="Cambria" pitchFamily="34" charset="-120"/>
+              </a:rPr>
+              <a:t>Prêmio por contagem, não por valor</a:t>
+            </a:r>
+            <a:endParaRPr lang="en-US" sz="1600" dirty="0"/>
+          </a:p>
+        </p:txBody>
+      </p:sp>
+      <p:sp>
+        <p:nvSpPr>
+          <p:cNvPr id="9" name="Text 7"/>
+          <p:cNvSpPr/>
+          <p:nvPr/>
+        </p:nvSpPr>
+        <p:spPr>
+          <a:xfrm>
+            <a:off x="1298448" y="2185416"/>
+            <a:ext cx="5852160" cy="777240"/>
+          </a:xfrm>
+          <a:prstGeom prst="rect">
+            <a:avLst/>
+          </a:prstGeom>
+          <a:noFill/>
+          <a:ln/>
+        </p:spPr>
+        <p:txBody>
+          <a:bodyPr wrap="square" lIns="0" tIns="0" rIns="0" bIns="0" rtlCol="0" anchor="t"/>
+          <a:lstStyle/>
+          <a:p>
+            <a:pPr indent="0" marL="0">
+              <a:lnSpc>
+                <a:spcPts val="1600"/>
+              </a:lnSpc>
+              <a:buNone/>
+            </a:pPr>
+            <a:r>
+              <a:rPr lang="en-US" sz="1250" dirty="0">
                 <a:solidFill>
                   <a:srgbClr val="5A6784"/>
                 </a:solidFill>
@@ -3840,38 +4030,139 @@
                 <a:ea typeface="Calibri" pitchFamily="34" charset="-122"/>
                 <a:cs typeface="Calibri" pitchFamily="34" charset="-120"/>
               </a:rPr>
-              <a:t>Ação</a:t>
-            </a:r>
-            <a:endParaRPr lang="en-US" sz="1100" dirty="0"/>
-          </a:p>
-        </p:txBody>
-      </p:sp>
-      <p:sp>
-        <p:nvSpPr>
-          <p:cNvPr id="7" name="Text 5"/>
-          <p:cNvSpPr/>
-          <p:nvPr/>
-        </p:nvSpPr>
-        <p:spPr>
-          <a:xfrm>
-            <a:off x="7726680" y="1783080"/>
-            <a:ext cx="2011680" cy="274320"/>
-          </a:xfrm>
-          <a:prstGeom prst="rect">
-            <a:avLst/>
-          </a:prstGeom>
-          <a:noFill/>
-          <a:ln/>
-        </p:spPr>
-        <p:txBody>
-          <a:bodyPr wrap="square" lIns="0" tIns="0" rIns="0" bIns="0" rtlCol="0" anchor="ctr"/>
-          <a:lstStyle/>
-          <a:p>
-            <a:pPr indent="0" marL="0">
-              <a:buNone/>
-            </a:pPr>
-            <a:r>
-              <a:rPr lang="en-US" sz="1100" b="1" spc="100" kern="0" dirty="0">
+              <a:t>Faixas em 5 e 10 compras no mês, com teto. É a métrica-mãe do diagnóstico, e o valor da compra na base é sorteado, não observado.</a:t>
+            </a:r>
+            <a:endParaRPr lang="en-US" sz="1250" dirty="0"/>
+          </a:p>
+        </p:txBody>
+      </p:sp>
+      <p:sp>
+        <p:nvSpPr>
+          <p:cNvPr id="10" name="Shape 8"/>
+          <p:cNvSpPr/>
+          <p:nvPr/>
+        </p:nvSpPr>
+        <p:spPr>
+          <a:xfrm>
+            <a:off x="640080" y="3200400"/>
+            <a:ext cx="457200" cy="457200"/>
+          </a:xfrm>
+          <a:prstGeom prst="ellipse">
+            <a:avLst/>
+          </a:prstGeom>
+          <a:solidFill>
+            <a:srgbClr val="00A896"/>
+          </a:solidFill>
+          <a:ln/>
+        </p:spPr>
+      </p:sp>
+      <p:sp>
+        <p:nvSpPr>
+          <p:cNvPr id="11" name="Text 9"/>
+          <p:cNvSpPr/>
+          <p:nvPr/>
+        </p:nvSpPr>
+        <p:spPr>
+          <a:xfrm>
+            <a:off x="640080" y="3200400"/>
+            <a:ext cx="457200" cy="457200"/>
+          </a:xfrm>
+          <a:prstGeom prst="rect">
+            <a:avLst/>
+          </a:prstGeom>
+          <a:noFill/>
+          <a:ln/>
+        </p:spPr>
+        <p:txBody>
+          <a:bodyPr wrap="square" lIns="0" tIns="0" rIns="0" bIns="0" rtlCol="0" anchor="ctr"/>
+          <a:lstStyle/>
+          <a:p>
+            <a:pPr algn="ctr" indent="0" marL="0">
+              <a:buNone/>
+            </a:pPr>
+            <a:r>
+              <a:rPr lang="en-US" sz="1700" b="1" dirty="0">
+                <a:solidFill>
+                  <a:srgbClr val="FFFFFF"/>
+                </a:solidFill>
+                <a:latin typeface="Calibri" pitchFamily="34" charset="0"/>
+                <a:ea typeface="Calibri" pitchFamily="34" charset="-122"/>
+                <a:cs typeface="Calibri" pitchFamily="34" charset="-120"/>
+              </a:rPr>
+              <a:t>2</a:t>
+            </a:r>
+            <a:endParaRPr lang="en-US" sz="1700" dirty="0"/>
+          </a:p>
+        </p:txBody>
+      </p:sp>
+      <p:sp>
+        <p:nvSpPr>
+          <p:cNvPr id="12" name="Text 10"/>
+          <p:cNvSpPr/>
+          <p:nvPr/>
+        </p:nvSpPr>
+        <p:spPr>
+          <a:xfrm>
+            <a:off x="1298448" y="3163824"/>
+            <a:ext cx="5852160" cy="384048"/>
+          </a:xfrm>
+          <a:prstGeom prst="rect">
+            <a:avLst/>
+          </a:prstGeom>
+          <a:noFill/>
+          <a:ln/>
+        </p:spPr>
+        <p:txBody>
+          <a:bodyPr wrap="square" lIns="0" tIns="0" rIns="0" bIns="0" rtlCol="0" anchor="ctr"/>
+          <a:lstStyle/>
+          <a:p>
+            <a:pPr indent="0" marL="0">
+              <a:buNone/>
+            </a:pPr>
+            <a:r>
+              <a:rPr lang="en-US" sz="1600" b="1" dirty="0">
+                <a:solidFill>
+                  <a:srgbClr val="13223F"/>
+                </a:solidFill>
+                <a:latin typeface="Cambria" pitchFamily="34" charset="0"/>
+                <a:ea typeface="Cambria" pitchFamily="34" charset="-122"/>
+                <a:cs typeface="Cambria" pitchFamily="34" charset="-120"/>
+              </a:rPr>
+              <a:t>Vale para débito</a:t>
+            </a:r>
+            <a:endParaRPr lang="en-US" sz="1600" dirty="0"/>
+          </a:p>
+        </p:txBody>
+      </p:sp>
+      <p:sp>
+        <p:nvSpPr>
+          <p:cNvPr id="13" name="Text 11"/>
+          <p:cNvSpPr/>
+          <p:nvPr/>
+        </p:nvSpPr>
+        <p:spPr>
+          <a:xfrm>
+            <a:off x="1298448" y="3602736"/>
+            <a:ext cx="5852160" cy="777240"/>
+          </a:xfrm>
+          <a:prstGeom prst="rect">
+            <a:avLst/>
+          </a:prstGeom>
+          <a:noFill/>
+          <a:ln/>
+        </p:spPr>
+        <p:txBody>
+          <a:bodyPr wrap="square" lIns="0" tIns="0" rIns="0" bIns="0" rtlCol="0" anchor="t"/>
+          <a:lstStyle/>
+          <a:p>
+            <a:pPr indent="0" marL="0">
+              <a:lnSpc>
+                <a:spcPts val="1600"/>
+              </a:lnSpc>
+              <a:buNone/>
+            </a:pPr>
+            <a:r>
+              <a:rPr lang="en-US" sz="1250" dirty="0">
                 <a:solidFill>
                   <a:srgbClr val="5A6784"/>
                 </a:solidFill>
@@ -3879,38 +4170,139 @@
                 <a:ea typeface="Calibri" pitchFamily="34" charset="-122"/>
                 <a:cs typeface="Calibri" pitchFamily="34" charset="-120"/>
               </a:rPr>
-              <a:t>Impacto</a:t>
-            </a:r>
-            <a:endParaRPr lang="en-US" sz="1100" dirty="0"/>
-          </a:p>
-        </p:txBody>
-      </p:sp>
-      <p:sp>
-        <p:nvSpPr>
-          <p:cNvPr id="8" name="Text 6"/>
-          <p:cNvSpPr/>
-          <p:nvPr/>
-        </p:nvSpPr>
-        <p:spPr>
-          <a:xfrm>
-            <a:off x="9555480" y="1783080"/>
-            <a:ext cx="2011680" cy="274320"/>
-          </a:xfrm>
-          <a:prstGeom prst="rect">
-            <a:avLst/>
-          </a:prstGeom>
-          <a:noFill/>
-          <a:ln/>
-        </p:spPr>
-        <p:txBody>
-          <a:bodyPr wrap="square" lIns="0" tIns="0" rIns="0" bIns="0" rtlCol="0" anchor="ctr"/>
-          <a:lstStyle/>
-          <a:p>
-            <a:pPr indent="0" marL="0">
-              <a:buNone/>
-            </a:pPr>
-            <a:r>
-              <a:rPr lang="en-US" sz="1100" b="1" spc="100" kern="0" dirty="0">
+              <a:t>A maior parte dos cartões da base é débito com limite zero. Benefício exclusivo de crédito não alcança quem precisamos alcançar.</a:t>
+            </a:r>
+            <a:endParaRPr lang="en-US" sz="1250" dirty="0"/>
+          </a:p>
+        </p:txBody>
+      </p:sp>
+      <p:sp>
+        <p:nvSpPr>
+          <p:cNvPr id="14" name="Shape 12"/>
+          <p:cNvSpPr/>
+          <p:nvPr/>
+        </p:nvSpPr>
+        <p:spPr>
+          <a:xfrm>
+            <a:off x="640080" y="4617720"/>
+            <a:ext cx="457200" cy="457200"/>
+          </a:xfrm>
+          <a:prstGeom prst="ellipse">
+            <a:avLst/>
+          </a:prstGeom>
+          <a:solidFill>
+            <a:srgbClr val="00A896"/>
+          </a:solidFill>
+          <a:ln/>
+        </p:spPr>
+      </p:sp>
+      <p:sp>
+        <p:nvSpPr>
+          <p:cNvPr id="15" name="Text 13"/>
+          <p:cNvSpPr/>
+          <p:nvPr/>
+        </p:nvSpPr>
+        <p:spPr>
+          <a:xfrm>
+            <a:off x="640080" y="4617720"/>
+            <a:ext cx="457200" cy="457200"/>
+          </a:xfrm>
+          <a:prstGeom prst="rect">
+            <a:avLst/>
+          </a:prstGeom>
+          <a:noFill/>
+          <a:ln/>
+        </p:spPr>
+        <p:txBody>
+          <a:bodyPr wrap="square" lIns="0" tIns="0" rIns="0" bIns="0" rtlCol="0" anchor="ctr"/>
+          <a:lstStyle/>
+          <a:p>
+            <a:pPr algn="ctr" indent="0" marL="0">
+              <a:buNone/>
+            </a:pPr>
+            <a:r>
+              <a:rPr lang="en-US" sz="1700" b="1" dirty="0">
+                <a:solidFill>
+                  <a:srgbClr val="FFFFFF"/>
+                </a:solidFill>
+                <a:latin typeface="Calibri" pitchFamily="34" charset="0"/>
+                <a:ea typeface="Calibri" pitchFamily="34" charset="-122"/>
+                <a:cs typeface="Calibri" pitchFamily="34" charset="-120"/>
+              </a:rPr>
+              <a:t>3</a:t>
+            </a:r>
+            <a:endParaRPr lang="en-US" sz="1700" dirty="0"/>
+          </a:p>
+        </p:txBody>
+      </p:sp>
+      <p:sp>
+        <p:nvSpPr>
+          <p:cNvPr id="16" name="Text 14"/>
+          <p:cNvSpPr/>
+          <p:nvPr/>
+        </p:nvSpPr>
+        <p:spPr>
+          <a:xfrm>
+            <a:off x="1298448" y="4581144"/>
+            <a:ext cx="5852160" cy="384048"/>
+          </a:xfrm>
+          <a:prstGeom prst="rect">
+            <a:avLst/>
+          </a:prstGeom>
+          <a:noFill/>
+          <a:ln/>
+        </p:spPr>
+        <p:txBody>
+          <a:bodyPr wrap="square" lIns="0" tIns="0" rIns="0" bIns="0" rtlCol="0" anchor="ctr"/>
+          <a:lstStyle/>
+          <a:p>
+            <a:pPr indent="0" marL="0">
+              <a:buNone/>
+            </a:pPr>
+            <a:r>
+              <a:rPr lang="en-US" sz="1600" b="1" dirty="0">
+                <a:solidFill>
+                  <a:srgbClr val="13223F"/>
+                </a:solidFill>
+                <a:latin typeface="Cambria" pitchFamily="34" charset="0"/>
+                <a:ea typeface="Cambria" pitchFamily="34" charset="-122"/>
+                <a:cs typeface="Cambria" pitchFamily="34" charset="-120"/>
+              </a:rPr>
+              <a:t>O crédito cai no saldo, não em pontos</a:t>
+            </a:r>
+            <a:endParaRPr lang="en-US" sz="1600" dirty="0"/>
+          </a:p>
+        </p:txBody>
+      </p:sp>
+      <p:sp>
+        <p:nvSpPr>
+          <p:cNvPr id="17" name="Text 15"/>
+          <p:cNvSpPr/>
+          <p:nvPr/>
+        </p:nvSpPr>
+        <p:spPr>
+          <a:xfrm>
+            <a:off x="1298448" y="5020056"/>
+            <a:ext cx="5852160" cy="777240"/>
+          </a:xfrm>
+          <a:prstGeom prst="rect">
+            <a:avLst/>
+          </a:prstGeom>
+          <a:noFill/>
+          <a:ln/>
+        </p:spPr>
+        <p:txBody>
+          <a:bodyPr wrap="square" lIns="0" tIns="0" rIns="0" bIns="0" rtlCol="0" anchor="t"/>
+          <a:lstStyle/>
+          <a:p>
+            <a:pPr indent="0" marL="0">
+              <a:lnSpc>
+                <a:spcPts val="1600"/>
+              </a:lnSpc>
+              <a:buNone/>
+            </a:pPr>
+            <a:r>
+              <a:rPr lang="en-US" sz="1250" dirty="0">
                 <a:solidFill>
                   <a:srgbClr val="5A6784"/>
                 </a:solidFill>
@@ -3918,134 +4310,206 @@
                 <a:ea typeface="Calibri" pitchFamily="34" charset="-122"/>
                 <a:cs typeface="Calibri" pitchFamily="34" charset="-120"/>
               </a:rPr>
-              <a:t>Esforço</a:t>
-            </a:r>
-            <a:endParaRPr lang="en-US" sz="1100" dirty="0"/>
-          </a:p>
-        </p:txBody>
-      </p:sp>
-      <p:sp>
-        <p:nvSpPr>
-          <p:cNvPr id="9" name="Shape 7"/>
-          <p:cNvSpPr/>
-          <p:nvPr/>
-        </p:nvSpPr>
-        <p:spPr>
-          <a:xfrm>
-            <a:off x="640080" y="2093976"/>
-            <a:ext cx="10881360" cy="512064"/>
+              <a:t>Programa de pontos exige um portal que o cliente já não abre. O saldo é o único lugar por onde o dinheiro dele comprovadamente passa.</a:t>
+            </a:r>
+            <a:endParaRPr lang="en-US" sz="1250" dirty="0"/>
+          </a:p>
+        </p:txBody>
+      </p:sp>
+      <p:sp>
+        <p:nvSpPr>
+          <p:cNvPr id="18" name="Shape 16"/>
+          <p:cNvSpPr/>
+          <p:nvPr/>
+        </p:nvSpPr>
+        <p:spPr>
+          <a:xfrm>
+            <a:off x="7635240" y="1783080"/>
+            <a:ext cx="3886200" cy="1645920"/>
           </a:xfrm>
           <a:prstGeom prst="roundRect">
             <a:avLst>
-              <a:gd name="adj" fmla="val 8929"/>
+              <a:gd name="adj" fmla="val 4444"/>
+            </a:avLst>
+          </a:prstGeom>
+          <a:solidFill>
+            <a:srgbClr val="13223F"/>
+          </a:solidFill>
+          <a:ln/>
+        </p:spPr>
+      </p:sp>
+      <p:sp>
+        <p:nvSpPr>
+          <p:cNvPr id="19" name="Text 17"/>
+          <p:cNvSpPr/>
+          <p:nvPr/>
+        </p:nvSpPr>
+        <p:spPr>
+          <a:xfrm>
+            <a:off x="7882128" y="1938528"/>
+            <a:ext cx="3429000" cy="365760"/>
+          </a:xfrm>
+          <a:prstGeom prst="rect">
+            <a:avLst/>
+          </a:prstGeom>
+          <a:noFill/>
+          <a:ln/>
+        </p:spPr>
+        <p:txBody>
+          <a:bodyPr wrap="square" lIns="0" tIns="0" rIns="0" bIns="0" rtlCol="0" anchor="ctr"/>
+          <a:lstStyle/>
+          <a:p>
+            <a:pPr indent="0" marL="0">
+              <a:buNone/>
+            </a:pPr>
+            <a:r>
+              <a:rPr lang="en-US" sz="1500" b="1" dirty="0">
+                <a:solidFill>
+                  <a:srgbClr val="FFFFFF"/>
+                </a:solidFill>
+                <a:latin typeface="Cambria" pitchFamily="34" charset="0"/>
+                <a:ea typeface="Cambria" pitchFamily="34" charset="-122"/>
+                <a:cs typeface="Cambria" pitchFamily="34" charset="-120"/>
+              </a:rPr>
+              <a:t>Quem paga a conta</a:t>
+            </a:r>
+            <a:endParaRPr lang="en-US" sz="1500" dirty="0"/>
+          </a:p>
+        </p:txBody>
+      </p:sp>
+      <p:sp>
+        <p:nvSpPr>
+          <p:cNvPr id="20" name="Text 18"/>
+          <p:cNvSpPr/>
+          <p:nvPr/>
+        </p:nvSpPr>
+        <p:spPr>
+          <a:xfrm>
+            <a:off x="7882128" y="2359152"/>
+            <a:ext cx="3429000" cy="1325880"/>
+          </a:xfrm>
+          <a:prstGeom prst="rect">
+            <a:avLst/>
+          </a:prstGeom>
+          <a:noFill/>
+          <a:ln/>
+        </p:spPr>
+        <p:txBody>
+          <a:bodyPr wrap="square" lIns="0" tIns="0" rIns="0" bIns="0" rtlCol="0" anchor="t"/>
+          <a:lstStyle/>
+          <a:p>
+            <a:pPr indent="0" marL="0">
+              <a:lnSpc>
+                <a:spcPts val="1600"/>
+              </a:lnSpc>
+              <a:buNone/>
+            </a:pPr>
+            <a:r>
+              <a:rPr lang="en-US" sz="1200" dirty="0">
+                <a:solidFill>
+                  <a:srgbClr val="CADCFC"/>
+                </a:solidFill>
+                <a:latin typeface="Calibri" pitchFamily="34" charset="0"/>
+                <a:ea typeface="Calibri" pitchFamily="34" charset="-122"/>
+                <a:cs typeface="Calibri" pitchFamily="34" charset="-120"/>
+              </a:rPr>
+              <a:t>Compra no cartão gera interchange, PIX não gera nada. Cada transação migrada cria receita que não existia, e é ela que financia o cashback e dá o teto do quanto oferecer.</a:t>
+            </a:r>
+            <a:endParaRPr lang="en-US" sz="1200" dirty="0"/>
+          </a:p>
+        </p:txBody>
+      </p:sp>
+      <p:sp>
+        <p:nvSpPr>
+          <p:cNvPr id="21" name="Shape 19"/>
+          <p:cNvSpPr/>
+          <p:nvPr/>
+        </p:nvSpPr>
+        <p:spPr>
+          <a:xfrm>
+            <a:off x="7635240" y="3703320"/>
+            <a:ext cx="3886200" cy="1645920"/>
+          </a:xfrm>
+          <a:prstGeom prst="roundRect">
+            <a:avLst>
+              <a:gd name="adj" fmla="val 4444"/>
             </a:avLst>
           </a:prstGeom>
           <a:solidFill>
             <a:srgbClr val="F4F6FA"/>
           </a:solidFill>
-          <a:ln/>
-        </p:spPr>
-      </p:sp>
-      <p:sp>
-        <p:nvSpPr>
-          <p:cNvPr id="10" name="Text 8"/>
-          <p:cNvSpPr/>
-          <p:nvPr/>
-        </p:nvSpPr>
-        <p:spPr>
-          <a:xfrm>
-            <a:off x="777240" y="2148840"/>
-            <a:ext cx="548640" cy="384048"/>
-          </a:xfrm>
-          <a:prstGeom prst="rect">
-            <a:avLst/>
-          </a:prstGeom>
-          <a:noFill/>
-          <a:ln/>
-        </p:spPr>
-        <p:txBody>
-          <a:bodyPr wrap="square" lIns="0" tIns="0" rIns="0" bIns="0" rtlCol="0" anchor="ctr"/>
-          <a:lstStyle/>
-          <a:p>
-            <a:pPr indent="0" marL="0">
-              <a:buNone/>
-            </a:pPr>
-            <a:r>
-              <a:rPr lang="en-US" sz="1400" b="1" dirty="0">
-                <a:solidFill>
-                  <a:srgbClr val="E5484D"/>
+          <a:ln w="12700">
+            <a:solidFill>
+              <a:srgbClr val="DDE3EC"/>
+            </a:solidFill>
+            <a:prstDash val="solid"/>
+          </a:ln>
+        </p:spPr>
+      </p:sp>
+      <p:sp>
+        <p:nvSpPr>
+          <p:cNvPr id="22" name="Text 20"/>
+          <p:cNvSpPr/>
+          <p:nvPr/>
+        </p:nvSpPr>
+        <p:spPr>
+          <a:xfrm>
+            <a:off x="7882128" y="3858768"/>
+            <a:ext cx="3429000" cy="365760"/>
+          </a:xfrm>
+          <a:prstGeom prst="rect">
+            <a:avLst/>
+          </a:prstGeom>
+          <a:noFill/>
+          <a:ln/>
+        </p:spPr>
+        <p:txBody>
+          <a:bodyPr wrap="square" lIns="0" tIns="0" rIns="0" bIns="0" rtlCol="0" anchor="ctr"/>
+          <a:lstStyle/>
+          <a:p>
+            <a:pPr indent="0" marL="0">
+              <a:buNone/>
+            </a:pPr>
+            <a:r>
+              <a:rPr lang="en-US" sz="1500" b="1" dirty="0">
+                <a:solidFill>
+                  <a:srgbClr val="13223F"/>
                 </a:solidFill>
                 <a:latin typeface="Cambria" pitchFamily="34" charset="0"/>
                 <a:ea typeface="Cambria" pitchFamily="34" charset="-122"/>
                 <a:cs typeface="Cambria" pitchFamily="34" charset="-120"/>
               </a:rPr>
-              <a:t>1ª</a:t>
-            </a:r>
-            <a:endParaRPr lang="en-US" sz="1400" dirty="0"/>
-          </a:p>
-        </p:txBody>
-      </p:sp>
-      <p:sp>
-        <p:nvSpPr>
-          <p:cNvPr id="11" name="Text 9"/>
-          <p:cNvSpPr/>
-          <p:nvPr/>
-        </p:nvSpPr>
-        <p:spPr>
-          <a:xfrm>
-            <a:off x="1417320" y="2148840"/>
-            <a:ext cx="6766560" cy="384048"/>
-          </a:xfrm>
-          <a:prstGeom prst="rect">
-            <a:avLst/>
-          </a:prstGeom>
-          <a:noFill/>
-          <a:ln/>
-        </p:spPr>
-        <p:txBody>
-          <a:bodyPr wrap="square" lIns="0" tIns="0" rIns="0" bIns="0" rtlCol="0" anchor="ctr"/>
-          <a:lstStyle/>
-          <a:p>
-            <a:pPr indent="0" marL="0">
-              <a:buNone/>
-            </a:pPr>
-            <a:r>
-              <a:rPr lang="en-US" sz="1300" dirty="0">
-                <a:solidFill>
-                  <a:srgbClr val="13223F"/>
-                </a:solidFill>
-                <a:latin typeface="Calibri" pitchFamily="34" charset="0"/>
-                <a:ea typeface="Calibri" pitchFamily="34" charset="-122"/>
-                <a:cs typeface="Calibri" pitchFamily="34" charset="-120"/>
-              </a:rPr>
-              <a:t>Descobrir por que a emissão de cartão parou</a:t>
-            </a:r>
-            <a:endParaRPr lang="en-US" sz="1300" dirty="0"/>
-          </a:p>
-        </p:txBody>
-      </p:sp>
-      <p:sp>
-        <p:nvSpPr>
-          <p:cNvPr id="12" name="Text 10"/>
-          <p:cNvSpPr/>
-          <p:nvPr/>
-        </p:nvSpPr>
-        <p:spPr>
-          <a:xfrm>
-            <a:off x="7726680" y="2148840"/>
-            <a:ext cx="1463040" cy="384048"/>
-          </a:xfrm>
-          <a:prstGeom prst="rect">
-            <a:avLst/>
-          </a:prstGeom>
-          <a:noFill/>
-          <a:ln/>
-        </p:spPr>
-        <p:txBody>
-          <a:bodyPr wrap="square" lIns="0" tIns="0" rIns="0" bIns="0" rtlCol="0" anchor="ctr"/>
-          <a:lstStyle/>
-          <a:p>
-            <a:pPr indent="0" marL="0">
+              <a:t>Como saber se funcionou</a:t>
+            </a:r>
+            <a:endParaRPr lang="en-US" sz="1500" dirty="0"/>
+          </a:p>
+        </p:txBody>
+      </p:sp>
+      <p:sp>
+        <p:nvSpPr>
+          <p:cNvPr id="23" name="Text 21"/>
+          <p:cNvSpPr/>
+          <p:nvPr/>
+        </p:nvSpPr>
+        <p:spPr>
+          <a:xfrm>
+            <a:off x="7882128" y="4279392"/>
+            <a:ext cx="3429000" cy="1325880"/>
+          </a:xfrm>
+          <a:prstGeom prst="rect">
+            <a:avLst/>
+          </a:prstGeom>
+          <a:noFill/>
+          <a:ln/>
+        </p:spPr>
+        <p:txBody>
+          <a:bodyPr wrap="square" lIns="0" tIns="0" rIns="0" bIns="0" rtlCol="0" anchor="t"/>
+          <a:lstStyle/>
+          <a:p>
+            <a:pPr indent="0" marL="0">
+              <a:lnSpc>
+                <a:spcPts val="1600"/>
+              </a:lnSpc>
               <a:buNone/>
             </a:pPr>
             <a:r>
@@ -4057,7 +4521,7 @@
                 <a:ea typeface="Calibri" pitchFamily="34" charset="-122"/>
                 <a:cs typeface="Calibri" pitchFamily="34" charset="-120"/>
               </a:rPr>
-              <a:t>Alto</a:t>
+              <a:t>Metade da base elegível recebe a oferta, metade não. A leitura é transações por cliente ativo entre os dois grupos. Sem grupo de controle, qualquer alta vira mérito da campanha.</a:t>
             </a:r>
             <a:endParaRPr lang="en-US" sz="1200" dirty="0"/>
           </a:p>
@@ -4065,30 +4529,30 @@
       </p:sp>
       <p:sp>
         <p:nvSpPr>
-          <p:cNvPr id="13" name="Text 11"/>
-          <p:cNvSpPr/>
-          <p:nvPr/>
-        </p:nvSpPr>
-        <p:spPr>
-          <a:xfrm>
-            <a:off x="9555480" y="2148840"/>
-            <a:ext cx="1463040" cy="384048"/>
-          </a:xfrm>
-          <a:prstGeom prst="rect">
-            <a:avLst/>
-          </a:prstGeom>
-          <a:noFill/>
-          <a:ln/>
-        </p:spPr>
-        <p:txBody>
-          <a:bodyPr wrap="square" lIns="0" tIns="0" rIns="0" bIns="0" rtlCol="0" anchor="ctr"/>
-          <a:lstStyle/>
-          <a:p>
-            <a:pPr indent="0" marL="0">
-              <a:buNone/>
-            </a:pPr>
-            <a:r>
-              <a:rPr lang="en-US" sz="1200" dirty="0">
+          <p:cNvPr id="24" name="Text 22"/>
+          <p:cNvSpPr/>
+          <p:nvPr/>
+        </p:nvSpPr>
+        <p:spPr>
+          <a:xfrm>
+            <a:off x="640080" y="6382512"/>
+            <a:ext cx="10881360" cy="274320"/>
+          </a:xfrm>
+          <a:prstGeom prst="rect">
+            <a:avLst/>
+          </a:prstGeom>
+          <a:noFill/>
+          <a:ln/>
+        </p:spPr>
+        <p:txBody>
+          <a:bodyPr wrap="square" lIns="0" tIns="0" rIns="0" bIns="0" rtlCol="0" anchor="ctr"/>
+          <a:lstStyle/>
+          <a:p>
+            <a:pPr indent="0" marL="0">
+              <a:buNone/>
+            </a:pPr>
+            <a:r>
+              <a:rPr lang="en-US" sz="950" dirty="0">
                 <a:solidFill>
                   <a:srgbClr val="5A6784"/>
                 </a:solidFill>
@@ -4096,872 +4560,9 @@
                 <a:ea typeface="Calibri" pitchFamily="34" charset="-122"/>
                 <a:cs typeface="Calibri" pitchFamily="34" charset="-120"/>
               </a:rPr>
-              <a:t>Baixo</a:t>
-            </a:r>
-            <a:endParaRPr lang="en-US" sz="1200" dirty="0"/>
-          </a:p>
-        </p:txBody>
-      </p:sp>
-      <p:sp>
-        <p:nvSpPr>
-          <p:cNvPr id="14" name="Text 12"/>
-          <p:cNvSpPr/>
-          <p:nvPr/>
-        </p:nvSpPr>
-        <p:spPr>
-          <a:xfrm>
-            <a:off x="777240" y="2715768"/>
-            <a:ext cx="548640" cy="384048"/>
-          </a:xfrm>
-          <a:prstGeom prst="rect">
-            <a:avLst/>
-          </a:prstGeom>
-          <a:noFill/>
-          <a:ln/>
-        </p:spPr>
-        <p:txBody>
-          <a:bodyPr wrap="square" lIns="0" tIns="0" rIns="0" bIns="0" rtlCol="0" anchor="ctr"/>
-          <a:lstStyle/>
-          <a:p>
-            <a:pPr indent="0" marL="0">
-              <a:buNone/>
-            </a:pPr>
-            <a:r>
-              <a:rPr lang="en-US" sz="1400" b="1" dirty="0">
-                <a:solidFill>
-                  <a:srgbClr val="E5484D"/>
-                </a:solidFill>
-                <a:latin typeface="Cambria" pitchFamily="34" charset="0"/>
-                <a:ea typeface="Cambria" pitchFamily="34" charset="-122"/>
-                <a:cs typeface="Cambria" pitchFamily="34" charset="-120"/>
-              </a:rPr>
-              <a:t>2ª</a:t>
-            </a:r>
-            <a:endParaRPr lang="en-US" sz="1400" dirty="0"/>
-          </a:p>
-        </p:txBody>
-      </p:sp>
-      <p:sp>
-        <p:nvSpPr>
-          <p:cNvPr id="15" name="Text 13"/>
-          <p:cNvSpPr/>
-          <p:nvPr/>
-        </p:nvSpPr>
-        <p:spPr>
-          <a:xfrm>
-            <a:off x="1417320" y="2715768"/>
-            <a:ext cx="6766560" cy="384048"/>
-          </a:xfrm>
-          <a:prstGeom prst="rect">
-            <a:avLst/>
-          </a:prstGeom>
-          <a:noFill/>
-          <a:ln/>
-        </p:spPr>
-        <p:txBody>
-          <a:bodyPr wrap="square" lIns="0" tIns="0" rIns="0" bIns="0" rtlCol="0" anchor="ctr"/>
-          <a:lstStyle/>
-          <a:p>
-            <a:pPr indent="0" marL="0">
-              <a:buNone/>
-            </a:pPr>
-            <a:r>
-              <a:rPr lang="en-US" sz="1300" dirty="0">
-                <a:solidFill>
-                  <a:srgbClr val="13223F"/>
-                </a:solidFill>
-                <a:latin typeface="Calibri" pitchFamily="34" charset="0"/>
-                <a:ea typeface="Calibri" pitchFamily="34" charset="-122"/>
-                <a:cs typeface="Calibri" pitchFamily="34" charset="-120"/>
-              </a:rPr>
-              <a:t>Recadastrar os 255 clientes sem renda</a:t>
-            </a:r>
-            <a:endParaRPr lang="en-US" sz="1300" dirty="0"/>
-          </a:p>
-        </p:txBody>
-      </p:sp>
-      <p:sp>
-        <p:nvSpPr>
-          <p:cNvPr id="16" name="Text 14"/>
-          <p:cNvSpPr/>
-          <p:nvPr/>
-        </p:nvSpPr>
-        <p:spPr>
-          <a:xfrm>
-            <a:off x="7726680" y="2715768"/>
-            <a:ext cx="1463040" cy="384048"/>
-          </a:xfrm>
-          <a:prstGeom prst="rect">
-            <a:avLst/>
-          </a:prstGeom>
-          <a:noFill/>
-          <a:ln/>
-        </p:spPr>
-        <p:txBody>
-          <a:bodyPr wrap="square" lIns="0" tIns="0" rIns="0" bIns="0" rtlCol="0" anchor="ctr"/>
-          <a:lstStyle/>
-          <a:p>
-            <a:pPr indent="0" marL="0">
-              <a:buNone/>
-            </a:pPr>
-            <a:r>
-              <a:rPr lang="en-US" sz="1200" dirty="0">
-                <a:solidFill>
-                  <a:srgbClr val="5A6784"/>
-                </a:solidFill>
-                <a:latin typeface="Calibri" pitchFamily="34" charset="0"/>
-                <a:ea typeface="Calibri" pitchFamily="34" charset="-122"/>
-                <a:cs typeface="Calibri" pitchFamily="34" charset="-120"/>
-              </a:rPr>
-              <a:t>Médio</a:t>
-            </a:r>
-            <a:endParaRPr lang="en-US" sz="1200" dirty="0"/>
-          </a:p>
-        </p:txBody>
-      </p:sp>
-      <p:sp>
-        <p:nvSpPr>
-          <p:cNvPr id="17" name="Text 15"/>
-          <p:cNvSpPr/>
-          <p:nvPr/>
-        </p:nvSpPr>
-        <p:spPr>
-          <a:xfrm>
-            <a:off x="9555480" y="2715768"/>
-            <a:ext cx="1463040" cy="384048"/>
-          </a:xfrm>
-          <a:prstGeom prst="rect">
-            <a:avLst/>
-          </a:prstGeom>
-          <a:noFill/>
-          <a:ln/>
-        </p:spPr>
-        <p:txBody>
-          <a:bodyPr wrap="square" lIns="0" tIns="0" rIns="0" bIns="0" rtlCol="0" anchor="ctr"/>
-          <a:lstStyle/>
-          <a:p>
-            <a:pPr indent="0" marL="0">
-              <a:buNone/>
-            </a:pPr>
-            <a:r>
-              <a:rPr lang="en-US" sz="1200" dirty="0">
-                <a:solidFill>
-                  <a:srgbClr val="5A6784"/>
-                </a:solidFill>
-                <a:latin typeface="Calibri" pitchFamily="34" charset="0"/>
-                <a:ea typeface="Calibri" pitchFamily="34" charset="-122"/>
-                <a:cs typeface="Calibri" pitchFamily="34" charset="-120"/>
-              </a:rPr>
-              <a:t>Baixo</a:t>
-            </a:r>
-            <a:endParaRPr lang="en-US" sz="1200" dirty="0"/>
-          </a:p>
-        </p:txBody>
-      </p:sp>
-      <p:sp>
-        <p:nvSpPr>
-          <p:cNvPr id="18" name="Shape 16"/>
-          <p:cNvSpPr/>
-          <p:nvPr/>
-        </p:nvSpPr>
-        <p:spPr>
-          <a:xfrm>
-            <a:off x="640080" y="3227832"/>
-            <a:ext cx="10881360" cy="512064"/>
-          </a:xfrm>
-          <a:prstGeom prst="roundRect">
-            <a:avLst>
-              <a:gd name="adj" fmla="val 8929"/>
-            </a:avLst>
-          </a:prstGeom>
-          <a:solidFill>
-            <a:srgbClr val="F4F6FA"/>
-          </a:solidFill>
-          <a:ln/>
-        </p:spPr>
-      </p:sp>
-      <p:sp>
-        <p:nvSpPr>
-          <p:cNvPr id="19" name="Text 17"/>
-          <p:cNvSpPr/>
-          <p:nvPr/>
-        </p:nvSpPr>
-        <p:spPr>
-          <a:xfrm>
-            <a:off x="777240" y="3282696"/>
-            <a:ext cx="548640" cy="384048"/>
-          </a:xfrm>
-          <a:prstGeom prst="rect">
-            <a:avLst/>
-          </a:prstGeom>
-          <a:noFill/>
-          <a:ln/>
-        </p:spPr>
-        <p:txBody>
-          <a:bodyPr wrap="square" lIns="0" tIns="0" rIns="0" bIns="0" rtlCol="0" anchor="ctr"/>
-          <a:lstStyle/>
-          <a:p>
-            <a:pPr indent="0" marL="0">
-              <a:buNone/>
-            </a:pPr>
-            <a:r>
-              <a:rPr lang="en-US" sz="1400" b="1" dirty="0">
-                <a:solidFill>
-                  <a:srgbClr val="5A6784"/>
-                </a:solidFill>
-                <a:latin typeface="Cambria" pitchFamily="34" charset="0"/>
-                <a:ea typeface="Cambria" pitchFamily="34" charset="-122"/>
-                <a:cs typeface="Cambria" pitchFamily="34" charset="-120"/>
-              </a:rPr>
-              <a:t>3ª</a:t>
-            </a:r>
-            <a:endParaRPr lang="en-US" sz="1400" dirty="0"/>
-          </a:p>
-        </p:txBody>
-      </p:sp>
-      <p:sp>
-        <p:nvSpPr>
-          <p:cNvPr id="20" name="Text 18"/>
-          <p:cNvSpPr/>
-          <p:nvPr/>
-        </p:nvSpPr>
-        <p:spPr>
-          <a:xfrm>
-            <a:off x="1417320" y="3282696"/>
-            <a:ext cx="6766560" cy="384048"/>
-          </a:xfrm>
-          <a:prstGeom prst="rect">
-            <a:avLst/>
-          </a:prstGeom>
-          <a:noFill/>
-          <a:ln/>
-        </p:spPr>
-        <p:txBody>
-          <a:bodyPr wrap="square" lIns="0" tIns="0" rIns="0" bIns="0" rtlCol="0" anchor="ctr"/>
-          <a:lstStyle/>
-          <a:p>
-            <a:pPr indent="0" marL="0">
-              <a:buNone/>
-            </a:pPr>
-            <a:r>
-              <a:rPr lang="en-US" sz="1300" dirty="0">
-                <a:solidFill>
-                  <a:srgbClr val="13223F"/>
-                </a:solidFill>
-                <a:latin typeface="Calibri" pitchFamily="34" charset="0"/>
-                <a:ea typeface="Calibri" pitchFamily="34" charset="-122"/>
-                <a:cs typeface="Calibri" pitchFamily="34" charset="-120"/>
-              </a:rPr>
-              <a:t>Abertura de conta 100% digital</a:t>
-            </a:r>
-            <a:endParaRPr lang="en-US" sz="1300" dirty="0"/>
-          </a:p>
-        </p:txBody>
-      </p:sp>
-      <p:sp>
-        <p:nvSpPr>
-          <p:cNvPr id="21" name="Text 19"/>
-          <p:cNvSpPr/>
-          <p:nvPr/>
-        </p:nvSpPr>
-        <p:spPr>
-          <a:xfrm>
-            <a:off x="7726680" y="3282696"/>
-            <a:ext cx="1463040" cy="384048"/>
-          </a:xfrm>
-          <a:prstGeom prst="rect">
-            <a:avLst/>
-          </a:prstGeom>
-          <a:noFill/>
-          <a:ln/>
-        </p:spPr>
-        <p:txBody>
-          <a:bodyPr wrap="square" lIns="0" tIns="0" rIns="0" bIns="0" rtlCol="0" anchor="ctr"/>
-          <a:lstStyle/>
-          <a:p>
-            <a:pPr indent="0" marL="0">
-              <a:buNone/>
-            </a:pPr>
-            <a:r>
-              <a:rPr lang="en-US" sz="1200" dirty="0">
-                <a:solidFill>
-                  <a:srgbClr val="5A6784"/>
-                </a:solidFill>
-                <a:latin typeface="Calibri" pitchFamily="34" charset="0"/>
-                <a:ea typeface="Calibri" pitchFamily="34" charset="-122"/>
-                <a:cs typeface="Calibri" pitchFamily="34" charset="-120"/>
-              </a:rPr>
-              <a:t>Alto</a:t>
-            </a:r>
-            <a:endParaRPr lang="en-US" sz="1200" dirty="0"/>
-          </a:p>
-        </p:txBody>
-      </p:sp>
-      <p:sp>
-        <p:nvSpPr>
-          <p:cNvPr id="22" name="Text 20"/>
-          <p:cNvSpPr/>
-          <p:nvPr/>
-        </p:nvSpPr>
-        <p:spPr>
-          <a:xfrm>
-            <a:off x="9555480" y="3282696"/>
-            <a:ext cx="1463040" cy="384048"/>
-          </a:xfrm>
-          <a:prstGeom prst="rect">
-            <a:avLst/>
-          </a:prstGeom>
-          <a:noFill/>
-          <a:ln/>
-        </p:spPr>
-        <p:txBody>
-          <a:bodyPr wrap="square" lIns="0" tIns="0" rIns="0" bIns="0" rtlCol="0" anchor="ctr"/>
-          <a:lstStyle/>
-          <a:p>
-            <a:pPr indent="0" marL="0">
-              <a:buNone/>
-            </a:pPr>
-            <a:r>
-              <a:rPr lang="en-US" sz="1200" dirty="0">
-                <a:solidFill>
-                  <a:srgbClr val="5A6784"/>
-                </a:solidFill>
-                <a:latin typeface="Calibri" pitchFamily="34" charset="0"/>
-                <a:ea typeface="Calibri" pitchFamily="34" charset="-122"/>
-                <a:cs typeface="Calibri" pitchFamily="34" charset="-120"/>
-              </a:rPr>
-              <a:t>Médio</a:t>
-            </a:r>
-            <a:endParaRPr lang="en-US" sz="1200" dirty="0"/>
-          </a:p>
-        </p:txBody>
-      </p:sp>
-      <p:sp>
-        <p:nvSpPr>
-          <p:cNvPr id="23" name="Text 21"/>
-          <p:cNvSpPr/>
-          <p:nvPr/>
-        </p:nvSpPr>
-        <p:spPr>
-          <a:xfrm>
-            <a:off x="777240" y="3849624"/>
-            <a:ext cx="548640" cy="384048"/>
-          </a:xfrm>
-          <a:prstGeom prst="rect">
-            <a:avLst/>
-          </a:prstGeom>
-          <a:noFill/>
-          <a:ln/>
-        </p:spPr>
-        <p:txBody>
-          <a:bodyPr wrap="square" lIns="0" tIns="0" rIns="0" bIns="0" rtlCol="0" anchor="ctr"/>
-          <a:lstStyle/>
-          <a:p>
-            <a:pPr indent="0" marL="0">
-              <a:buNone/>
-            </a:pPr>
-            <a:r>
-              <a:rPr lang="en-US" sz="1400" b="1" dirty="0">
-                <a:solidFill>
-                  <a:srgbClr val="5A6784"/>
-                </a:solidFill>
-                <a:latin typeface="Cambria" pitchFamily="34" charset="0"/>
-                <a:ea typeface="Cambria" pitchFamily="34" charset="-122"/>
-                <a:cs typeface="Cambria" pitchFamily="34" charset="-120"/>
-              </a:rPr>
-              <a:t>4ª</a:t>
-            </a:r>
-            <a:endParaRPr lang="en-US" sz="1400" dirty="0"/>
-          </a:p>
-        </p:txBody>
-      </p:sp>
-      <p:sp>
-        <p:nvSpPr>
-          <p:cNvPr id="24" name="Text 22"/>
-          <p:cNvSpPr/>
-          <p:nvPr/>
-        </p:nvSpPr>
-        <p:spPr>
-          <a:xfrm>
-            <a:off x="1417320" y="3849624"/>
-            <a:ext cx="6766560" cy="384048"/>
-          </a:xfrm>
-          <a:prstGeom prst="rect">
-            <a:avLst/>
-          </a:prstGeom>
-          <a:noFill/>
-          <a:ln/>
-        </p:spPr>
-        <p:txBody>
-          <a:bodyPr wrap="square" lIns="0" tIns="0" rIns="0" bIns="0" rtlCol="0" anchor="ctr"/>
-          <a:lstStyle/>
-          <a:p>
-            <a:pPr indent="0" marL="0">
-              <a:buNone/>
-            </a:pPr>
-            <a:r>
-              <a:rPr lang="en-US" sz="1300" dirty="0">
-                <a:solidFill>
-                  <a:srgbClr val="13223F"/>
-                </a:solidFill>
-                <a:latin typeface="Calibri" pitchFamily="34" charset="0"/>
-                <a:ea typeface="Calibri" pitchFamily="34" charset="-122"/>
-                <a:cs typeface="Calibri" pitchFamily="34" charset="-120"/>
-              </a:rPr>
-              <a:t>Investimento que vira limite de cartão</a:t>
-            </a:r>
-            <a:endParaRPr lang="en-US" sz="1300" dirty="0"/>
-          </a:p>
-        </p:txBody>
-      </p:sp>
-      <p:sp>
-        <p:nvSpPr>
-          <p:cNvPr id="25" name="Text 23"/>
-          <p:cNvSpPr/>
-          <p:nvPr/>
-        </p:nvSpPr>
-        <p:spPr>
-          <a:xfrm>
-            <a:off x="7726680" y="3849624"/>
-            <a:ext cx="1463040" cy="384048"/>
-          </a:xfrm>
-          <a:prstGeom prst="rect">
-            <a:avLst/>
-          </a:prstGeom>
-          <a:noFill/>
-          <a:ln/>
-        </p:spPr>
-        <p:txBody>
-          <a:bodyPr wrap="square" lIns="0" tIns="0" rIns="0" bIns="0" rtlCol="0" anchor="ctr"/>
-          <a:lstStyle/>
-          <a:p>
-            <a:pPr indent="0" marL="0">
-              <a:buNone/>
-            </a:pPr>
-            <a:r>
-              <a:rPr lang="en-US" sz="1200" dirty="0">
-                <a:solidFill>
-                  <a:srgbClr val="5A6784"/>
-                </a:solidFill>
-                <a:latin typeface="Calibri" pitchFamily="34" charset="0"/>
-                <a:ea typeface="Calibri" pitchFamily="34" charset="-122"/>
-                <a:cs typeface="Calibri" pitchFamily="34" charset="-120"/>
-              </a:rPr>
-              <a:t>Alto</a:t>
-            </a:r>
-            <a:endParaRPr lang="en-US" sz="1200" dirty="0"/>
-          </a:p>
-        </p:txBody>
-      </p:sp>
-      <p:sp>
-        <p:nvSpPr>
-          <p:cNvPr id="26" name="Text 24"/>
-          <p:cNvSpPr/>
-          <p:nvPr/>
-        </p:nvSpPr>
-        <p:spPr>
-          <a:xfrm>
-            <a:off x="9555480" y="3849624"/>
-            <a:ext cx="1463040" cy="384048"/>
-          </a:xfrm>
-          <a:prstGeom prst="rect">
-            <a:avLst/>
-          </a:prstGeom>
-          <a:noFill/>
-          <a:ln/>
-        </p:spPr>
-        <p:txBody>
-          <a:bodyPr wrap="square" lIns="0" tIns="0" rIns="0" bIns="0" rtlCol="0" anchor="ctr"/>
-          <a:lstStyle/>
-          <a:p>
-            <a:pPr indent="0" marL="0">
-              <a:buNone/>
-            </a:pPr>
-            <a:r>
-              <a:rPr lang="en-US" sz="1200" dirty="0">
-                <a:solidFill>
-                  <a:srgbClr val="5A6784"/>
-                </a:solidFill>
-                <a:latin typeface="Calibri" pitchFamily="34" charset="0"/>
-                <a:ea typeface="Calibri" pitchFamily="34" charset="-122"/>
-                <a:cs typeface="Calibri" pitchFamily="34" charset="-120"/>
-              </a:rPr>
-              <a:t>Médio</a:t>
-            </a:r>
-            <a:endParaRPr lang="en-US" sz="1200" dirty="0"/>
-          </a:p>
-        </p:txBody>
-      </p:sp>
-      <p:sp>
-        <p:nvSpPr>
-          <p:cNvPr id="27" name="Shape 25"/>
-          <p:cNvSpPr/>
-          <p:nvPr/>
-        </p:nvSpPr>
-        <p:spPr>
-          <a:xfrm>
-            <a:off x="640080" y="4361688"/>
-            <a:ext cx="10881360" cy="512064"/>
-          </a:xfrm>
-          <a:prstGeom prst="roundRect">
-            <a:avLst>
-              <a:gd name="adj" fmla="val 8929"/>
-            </a:avLst>
-          </a:prstGeom>
-          <a:solidFill>
-            <a:srgbClr val="F4F6FA"/>
-          </a:solidFill>
-          <a:ln/>
-        </p:spPr>
-      </p:sp>
-      <p:sp>
-        <p:nvSpPr>
-          <p:cNvPr id="28" name="Text 26"/>
-          <p:cNvSpPr/>
-          <p:nvPr/>
-        </p:nvSpPr>
-        <p:spPr>
-          <a:xfrm>
-            <a:off x="777240" y="4416552"/>
-            <a:ext cx="548640" cy="384048"/>
-          </a:xfrm>
-          <a:prstGeom prst="rect">
-            <a:avLst/>
-          </a:prstGeom>
-          <a:noFill/>
-          <a:ln/>
-        </p:spPr>
-        <p:txBody>
-          <a:bodyPr wrap="square" lIns="0" tIns="0" rIns="0" bIns="0" rtlCol="0" anchor="ctr"/>
-          <a:lstStyle/>
-          <a:p>
-            <a:pPr indent="0" marL="0">
-              <a:buNone/>
-            </a:pPr>
-            <a:r>
-              <a:rPr lang="en-US" sz="1400" b="1" dirty="0">
-                <a:solidFill>
-                  <a:srgbClr val="5A6784"/>
-                </a:solidFill>
-                <a:latin typeface="Cambria" pitchFamily="34" charset="0"/>
-                <a:ea typeface="Cambria" pitchFamily="34" charset="-122"/>
-                <a:cs typeface="Cambria" pitchFamily="34" charset="-120"/>
-              </a:rPr>
-              <a:t>5ª</a:t>
-            </a:r>
-            <a:endParaRPr lang="en-US" sz="1400" dirty="0"/>
-          </a:p>
-        </p:txBody>
-      </p:sp>
-      <p:sp>
-        <p:nvSpPr>
-          <p:cNvPr id="29" name="Text 27"/>
-          <p:cNvSpPr/>
-          <p:nvPr/>
-        </p:nvSpPr>
-        <p:spPr>
-          <a:xfrm>
-            <a:off x="1417320" y="4416552"/>
-            <a:ext cx="6766560" cy="384048"/>
-          </a:xfrm>
-          <a:prstGeom prst="rect">
-            <a:avLst/>
-          </a:prstGeom>
-          <a:noFill/>
-          <a:ln/>
-        </p:spPr>
-        <p:txBody>
-          <a:bodyPr wrap="square" lIns="0" tIns="0" rIns="0" bIns="0" rtlCol="0" anchor="ctr"/>
-          <a:lstStyle/>
-          <a:p>
-            <a:pPr indent="0" marL="0">
-              <a:buNone/>
-            </a:pPr>
-            <a:r>
-              <a:rPr lang="en-US" sz="1300" dirty="0">
-                <a:solidFill>
-                  <a:srgbClr val="13223F"/>
-                </a:solidFill>
-                <a:latin typeface="Calibri" pitchFamily="34" charset="0"/>
-                <a:ea typeface="Calibri" pitchFamily="34" charset="-122"/>
-                <a:cs typeface="Calibri" pitchFamily="34" charset="-120"/>
-              </a:rPr>
-              <a:t>Ativação assistida de cartão</a:t>
-            </a:r>
-            <a:endParaRPr lang="en-US" sz="1300" dirty="0"/>
-          </a:p>
-        </p:txBody>
-      </p:sp>
-      <p:sp>
-        <p:nvSpPr>
-          <p:cNvPr id="30" name="Text 28"/>
-          <p:cNvSpPr/>
-          <p:nvPr/>
-        </p:nvSpPr>
-        <p:spPr>
-          <a:xfrm>
-            <a:off x="7726680" y="4416552"/>
-            <a:ext cx="1463040" cy="384048"/>
-          </a:xfrm>
-          <a:prstGeom prst="rect">
-            <a:avLst/>
-          </a:prstGeom>
-          <a:noFill/>
-          <a:ln/>
-        </p:spPr>
-        <p:txBody>
-          <a:bodyPr wrap="square" lIns="0" tIns="0" rIns="0" bIns="0" rtlCol="0" anchor="ctr"/>
-          <a:lstStyle/>
-          <a:p>
-            <a:pPr indent="0" marL="0">
-              <a:buNone/>
-            </a:pPr>
-            <a:r>
-              <a:rPr lang="en-US" sz="1200" dirty="0">
-                <a:solidFill>
-                  <a:srgbClr val="5A6784"/>
-                </a:solidFill>
-                <a:latin typeface="Calibri" pitchFamily="34" charset="0"/>
-                <a:ea typeface="Calibri" pitchFamily="34" charset="-122"/>
-                <a:cs typeface="Calibri" pitchFamily="34" charset="-120"/>
-              </a:rPr>
-              <a:t>Médio</a:t>
-            </a:r>
-            <a:endParaRPr lang="en-US" sz="1200" dirty="0"/>
-          </a:p>
-        </p:txBody>
-      </p:sp>
-      <p:sp>
-        <p:nvSpPr>
-          <p:cNvPr id="31" name="Text 29"/>
-          <p:cNvSpPr/>
-          <p:nvPr/>
-        </p:nvSpPr>
-        <p:spPr>
-          <a:xfrm>
-            <a:off x="9555480" y="4416552"/>
-            <a:ext cx="1463040" cy="384048"/>
-          </a:xfrm>
-          <a:prstGeom prst="rect">
-            <a:avLst/>
-          </a:prstGeom>
-          <a:noFill/>
-          <a:ln/>
-        </p:spPr>
-        <p:txBody>
-          <a:bodyPr wrap="square" lIns="0" tIns="0" rIns="0" bIns="0" rtlCol="0" anchor="ctr"/>
-          <a:lstStyle/>
-          <a:p>
-            <a:pPr indent="0" marL="0">
-              <a:buNone/>
-            </a:pPr>
-            <a:r>
-              <a:rPr lang="en-US" sz="1200" dirty="0">
-                <a:solidFill>
-                  <a:srgbClr val="5A6784"/>
-                </a:solidFill>
-                <a:latin typeface="Calibri" pitchFamily="34" charset="0"/>
-                <a:ea typeface="Calibri" pitchFamily="34" charset="-122"/>
-                <a:cs typeface="Calibri" pitchFamily="34" charset="-120"/>
-              </a:rPr>
-              <a:t>Baixo</a:t>
-            </a:r>
-            <a:endParaRPr lang="en-US" sz="1200" dirty="0"/>
-          </a:p>
-        </p:txBody>
-      </p:sp>
-      <p:sp>
-        <p:nvSpPr>
-          <p:cNvPr id="32" name="Text 30"/>
-          <p:cNvSpPr/>
-          <p:nvPr/>
-        </p:nvSpPr>
-        <p:spPr>
-          <a:xfrm>
-            <a:off x="777240" y="4983480"/>
-            <a:ext cx="548640" cy="384048"/>
-          </a:xfrm>
-          <a:prstGeom prst="rect">
-            <a:avLst/>
-          </a:prstGeom>
-          <a:noFill/>
-          <a:ln/>
-        </p:spPr>
-        <p:txBody>
-          <a:bodyPr wrap="square" lIns="0" tIns="0" rIns="0" bIns="0" rtlCol="0" anchor="ctr"/>
-          <a:lstStyle/>
-          <a:p>
-            <a:pPr indent="0" marL="0">
-              <a:buNone/>
-            </a:pPr>
-            <a:r>
-              <a:rPr lang="en-US" sz="1400" b="1" dirty="0">
-                <a:solidFill>
-                  <a:srgbClr val="5A6784"/>
-                </a:solidFill>
-                <a:latin typeface="Cambria" pitchFamily="34" charset="0"/>
-                <a:ea typeface="Cambria" pitchFamily="34" charset="-122"/>
-                <a:cs typeface="Cambria" pitchFamily="34" charset="-120"/>
-              </a:rPr>
-              <a:t>6ª</a:t>
-            </a:r>
-            <a:endParaRPr lang="en-US" sz="1400" dirty="0"/>
-          </a:p>
-        </p:txBody>
-      </p:sp>
-      <p:sp>
-        <p:nvSpPr>
-          <p:cNvPr id="33" name="Text 31"/>
-          <p:cNvSpPr/>
-          <p:nvPr/>
-        </p:nvSpPr>
-        <p:spPr>
-          <a:xfrm>
-            <a:off x="1417320" y="4983480"/>
-            <a:ext cx="6766560" cy="384048"/>
-          </a:xfrm>
-          <a:prstGeom prst="rect">
-            <a:avLst/>
-          </a:prstGeom>
-          <a:noFill/>
-          <a:ln/>
-        </p:spPr>
-        <p:txBody>
-          <a:bodyPr wrap="square" lIns="0" tIns="0" rIns="0" bIns="0" rtlCol="0" anchor="ctr"/>
-          <a:lstStyle/>
-          <a:p>
-            <a:pPr indent="0" marL="0">
-              <a:buNone/>
-            </a:pPr>
-            <a:r>
-              <a:rPr lang="en-US" sz="1300" dirty="0">
-                <a:solidFill>
-                  <a:srgbClr val="13223F"/>
-                </a:solidFill>
-                <a:latin typeface="Calibri" pitchFamily="34" charset="0"/>
-                <a:ea typeface="Calibri" pitchFamily="34" charset="-122"/>
-                <a:cs typeface="Calibri" pitchFamily="34" charset="-120"/>
-              </a:rPr>
-              <a:t>Investigação técnica do PIX</a:t>
-            </a:r>
-            <a:endParaRPr lang="en-US" sz="1300" dirty="0"/>
-          </a:p>
-        </p:txBody>
-      </p:sp>
-      <p:sp>
-        <p:nvSpPr>
-          <p:cNvPr id="34" name="Text 32"/>
-          <p:cNvSpPr/>
-          <p:nvPr/>
-        </p:nvSpPr>
-        <p:spPr>
-          <a:xfrm>
-            <a:off x="7726680" y="4983480"/>
-            <a:ext cx="1463040" cy="384048"/>
-          </a:xfrm>
-          <a:prstGeom prst="rect">
-            <a:avLst/>
-          </a:prstGeom>
-          <a:noFill/>
-          <a:ln/>
-        </p:spPr>
-        <p:txBody>
-          <a:bodyPr wrap="square" lIns="0" tIns="0" rIns="0" bIns="0" rtlCol="0" anchor="ctr"/>
-          <a:lstStyle/>
-          <a:p>
-            <a:pPr indent="0" marL="0">
-              <a:buNone/>
-            </a:pPr>
-            <a:r>
-              <a:rPr lang="en-US" sz="1200" dirty="0">
-                <a:solidFill>
-                  <a:srgbClr val="5A6784"/>
-                </a:solidFill>
-                <a:latin typeface="Calibri" pitchFamily="34" charset="0"/>
-                <a:ea typeface="Calibri" pitchFamily="34" charset="-122"/>
-                <a:cs typeface="Calibri" pitchFamily="34" charset="-120"/>
-              </a:rPr>
-              <a:t>Médio</a:t>
-            </a:r>
-            <a:endParaRPr lang="en-US" sz="1200" dirty="0"/>
-          </a:p>
-        </p:txBody>
-      </p:sp>
-      <p:sp>
-        <p:nvSpPr>
-          <p:cNvPr id="35" name="Text 33"/>
-          <p:cNvSpPr/>
-          <p:nvPr/>
-        </p:nvSpPr>
-        <p:spPr>
-          <a:xfrm>
-            <a:off x="9555480" y="4983480"/>
-            <a:ext cx="1463040" cy="384048"/>
-          </a:xfrm>
-          <a:prstGeom prst="rect">
-            <a:avLst/>
-          </a:prstGeom>
-          <a:noFill/>
-          <a:ln/>
-        </p:spPr>
-        <p:txBody>
-          <a:bodyPr wrap="square" lIns="0" tIns="0" rIns="0" bIns="0" rtlCol="0" anchor="ctr"/>
-          <a:lstStyle/>
-          <a:p>
-            <a:pPr indent="0" marL="0">
-              <a:buNone/>
-            </a:pPr>
-            <a:r>
-              <a:rPr lang="en-US" sz="1200" dirty="0">
-                <a:solidFill>
-                  <a:srgbClr val="5A6784"/>
-                </a:solidFill>
-                <a:latin typeface="Calibri" pitchFamily="34" charset="0"/>
-                <a:ea typeface="Calibri" pitchFamily="34" charset="-122"/>
-                <a:cs typeface="Calibri" pitchFamily="34" charset="-120"/>
-              </a:rPr>
-              <a:t>Médio</a:t>
-            </a:r>
-            <a:endParaRPr lang="en-US" sz="1200" dirty="0"/>
-          </a:p>
-        </p:txBody>
-      </p:sp>
-      <p:sp>
-        <p:nvSpPr>
-          <p:cNvPr id="36" name="Text 34"/>
-          <p:cNvSpPr/>
-          <p:nvPr/>
-        </p:nvSpPr>
-        <p:spPr>
-          <a:xfrm>
-            <a:off x="640080" y="5806440"/>
-            <a:ext cx="10881360" cy="365760"/>
-          </a:xfrm>
-          <a:prstGeom prst="rect">
-            <a:avLst/>
-          </a:prstGeom>
-          <a:noFill/>
-          <a:ln/>
-        </p:spPr>
-        <p:txBody>
-          <a:bodyPr wrap="square" lIns="0" tIns="0" rIns="0" bIns="0" rtlCol="0" anchor="ctr"/>
-          <a:lstStyle/>
-          <a:p>
-            <a:pPr indent="0" marL="0">
-              <a:buNone/>
-            </a:pPr>
-            <a:r>
-              <a:rPr lang="en-US" sz="1300" i="1" dirty="0">
-                <a:solidFill>
-                  <a:srgbClr val="13223F"/>
-                </a:solidFill>
-                <a:latin typeface="Calibri" pitchFamily="34" charset="0"/>
-                <a:ea typeface="Calibri" pitchFamily="34" charset="-122"/>
-                <a:cs typeface="Calibri" pitchFamily="34" charset="-120"/>
-              </a:rPr>
-              <a:t>As duas primeiras custam pouco e destravam o resto. As demais exigem projeto e entram em paralelo, sem esperar a primeira terminar.</a:t>
-            </a:r>
-            <a:endParaRPr lang="en-US" sz="1300" dirty="0"/>
+              <a:t>Base do raciocínio: 7,4x mais dinheiro sai do que entra por PIX · frequência -48% com a carteira intacta · cashback é o primeiro diferencial do LuminaPay no benchmarking</a:t>
+            </a:r>
+            <a:endParaRPr lang="en-US" sz="950" dirty="0"/>
           </a:p>
         </p:txBody>
       </p:sp>
@@ -5082,7 +4683,7 @@
                 <a:ea typeface="Cambria" pitchFamily="34" charset="-122"/>
                 <a:cs typeface="Cambria" pitchFamily="34" charset="-120"/>
               </a:rPr>
-              <a:t>Roadmap</a:t>
+              <a:t>Por onde começar</a:t>
             </a:r>
             <a:endParaRPr lang="en-US" sz="3000" dirty="0"/>
           </a:p>
@@ -5121,7 +4722,7 @@
                 <a:ea typeface="Calibri" pitchFamily="34" charset="-122"/>
                 <a:cs typeface="Calibri" pitchFamily="34" charset="-120"/>
               </a:rPr>
-              <a:t>Quatro janelas, do conserto imediato à mudança estrutural</a:t>
+              <a:t>Ordenado por retorno sobre esforço</a:t>
             </a:r>
             <a:endParaRPr lang="en-US" sz="1400" dirty="0"/>
           </a:p>
@@ -5129,98 +4730,247 @@
       </p:sp>
       <p:sp>
         <p:nvSpPr>
-          <p:cNvPr id="6" name="Shape 4"/>
-          <p:cNvSpPr/>
-          <p:nvPr/>
-        </p:nvSpPr>
-        <p:spPr>
-          <a:xfrm>
-            <a:off x="640080" y="1783080"/>
-            <a:ext cx="2606040" cy="713232"/>
+          <p:cNvPr id="6" name="Text 4"/>
+          <p:cNvSpPr/>
+          <p:nvPr/>
+        </p:nvSpPr>
+        <p:spPr>
+          <a:xfrm>
+            <a:off x="1417320" y="1783080"/>
+            <a:ext cx="2011680" cy="274320"/>
+          </a:xfrm>
+          <a:prstGeom prst="rect">
+            <a:avLst/>
+          </a:prstGeom>
+          <a:noFill/>
+          <a:ln/>
+        </p:spPr>
+        <p:txBody>
+          <a:bodyPr wrap="square" lIns="0" tIns="0" rIns="0" bIns="0" rtlCol="0" anchor="ctr"/>
+          <a:lstStyle/>
+          <a:p>
+            <a:pPr indent="0" marL="0">
+              <a:buNone/>
+            </a:pPr>
+            <a:r>
+              <a:rPr lang="en-US" sz="1100" b="1" spc="100" kern="0" dirty="0">
+                <a:solidFill>
+                  <a:srgbClr val="5A6784"/>
+                </a:solidFill>
+                <a:latin typeface="Calibri" pitchFamily="34" charset="0"/>
+                <a:ea typeface="Calibri" pitchFamily="34" charset="-122"/>
+                <a:cs typeface="Calibri" pitchFamily="34" charset="-120"/>
+              </a:rPr>
+              <a:t>Ação</a:t>
+            </a:r>
+            <a:endParaRPr lang="en-US" sz="1100" dirty="0"/>
+          </a:p>
+        </p:txBody>
+      </p:sp>
+      <p:sp>
+        <p:nvSpPr>
+          <p:cNvPr id="7" name="Text 5"/>
+          <p:cNvSpPr/>
+          <p:nvPr/>
+        </p:nvSpPr>
+        <p:spPr>
+          <a:xfrm>
+            <a:off x="7726680" y="1783080"/>
+            <a:ext cx="2011680" cy="274320"/>
+          </a:xfrm>
+          <a:prstGeom prst="rect">
+            <a:avLst/>
+          </a:prstGeom>
+          <a:noFill/>
+          <a:ln/>
+        </p:spPr>
+        <p:txBody>
+          <a:bodyPr wrap="square" lIns="0" tIns="0" rIns="0" bIns="0" rtlCol="0" anchor="ctr"/>
+          <a:lstStyle/>
+          <a:p>
+            <a:pPr indent="0" marL="0">
+              <a:buNone/>
+            </a:pPr>
+            <a:r>
+              <a:rPr lang="en-US" sz="1100" b="1" spc="100" kern="0" dirty="0">
+                <a:solidFill>
+                  <a:srgbClr val="5A6784"/>
+                </a:solidFill>
+                <a:latin typeface="Calibri" pitchFamily="34" charset="0"/>
+                <a:ea typeface="Calibri" pitchFamily="34" charset="-122"/>
+                <a:cs typeface="Calibri" pitchFamily="34" charset="-120"/>
+              </a:rPr>
+              <a:t>Impacto</a:t>
+            </a:r>
+            <a:endParaRPr lang="en-US" sz="1100" dirty="0"/>
+          </a:p>
+        </p:txBody>
+      </p:sp>
+      <p:sp>
+        <p:nvSpPr>
+          <p:cNvPr id="8" name="Text 6"/>
+          <p:cNvSpPr/>
+          <p:nvPr/>
+        </p:nvSpPr>
+        <p:spPr>
+          <a:xfrm>
+            <a:off x="9555480" y="1783080"/>
+            <a:ext cx="2011680" cy="274320"/>
+          </a:xfrm>
+          <a:prstGeom prst="rect">
+            <a:avLst/>
+          </a:prstGeom>
+          <a:noFill/>
+          <a:ln/>
+        </p:spPr>
+        <p:txBody>
+          <a:bodyPr wrap="square" lIns="0" tIns="0" rIns="0" bIns="0" rtlCol="0" anchor="ctr"/>
+          <a:lstStyle/>
+          <a:p>
+            <a:pPr indent="0" marL="0">
+              <a:buNone/>
+            </a:pPr>
+            <a:r>
+              <a:rPr lang="en-US" sz="1100" b="1" spc="100" kern="0" dirty="0">
+                <a:solidFill>
+                  <a:srgbClr val="5A6784"/>
+                </a:solidFill>
+                <a:latin typeface="Calibri" pitchFamily="34" charset="0"/>
+                <a:ea typeface="Calibri" pitchFamily="34" charset="-122"/>
+                <a:cs typeface="Calibri" pitchFamily="34" charset="-120"/>
+              </a:rPr>
+              <a:t>Esforço</a:t>
+            </a:r>
+            <a:endParaRPr lang="en-US" sz="1100" dirty="0"/>
+          </a:p>
+        </p:txBody>
+      </p:sp>
+      <p:sp>
+        <p:nvSpPr>
+          <p:cNvPr id="9" name="Shape 7"/>
+          <p:cNvSpPr/>
+          <p:nvPr/>
+        </p:nvSpPr>
+        <p:spPr>
+          <a:xfrm>
+            <a:off x="640080" y="2093976"/>
+            <a:ext cx="10881360" cy="512064"/>
           </a:xfrm>
           <a:prstGeom prst="roundRect">
             <a:avLst>
-              <a:gd name="adj" fmla="val 10256"/>
+              <a:gd name="adj" fmla="val 8929"/>
             </a:avLst>
           </a:prstGeom>
           <a:solidFill>
-            <a:srgbClr val="E5484D"/>
+            <a:srgbClr val="F4F6FA"/>
           </a:solidFill>
           <a:ln/>
         </p:spPr>
       </p:sp>
       <p:sp>
         <p:nvSpPr>
-          <p:cNvPr id="7" name="Text 5"/>
-          <p:cNvSpPr/>
-          <p:nvPr/>
-        </p:nvSpPr>
-        <p:spPr>
-          <a:xfrm>
-            <a:off x="749808" y="1783080"/>
-            <a:ext cx="2386584" cy="713232"/>
-          </a:xfrm>
-          <a:prstGeom prst="rect">
-            <a:avLst/>
-          </a:prstGeom>
-          <a:noFill/>
-          <a:ln/>
-        </p:spPr>
-        <p:txBody>
-          <a:bodyPr wrap="square" lIns="0" tIns="0" rIns="0" bIns="0" rtlCol="0" anchor="ctr"/>
-          <a:lstStyle/>
-          <a:p>
-            <a:pPr algn="ctr" indent="0" marL="0">
-              <a:buNone/>
-            </a:pPr>
-            <a:r>
-              <a:rPr lang="en-US" sz="1600" b="1" dirty="0">
-                <a:solidFill>
-                  <a:srgbClr val="FFFFFF"/>
+          <p:cNvPr id="10" name="Text 8"/>
+          <p:cNvSpPr/>
+          <p:nvPr/>
+        </p:nvSpPr>
+        <p:spPr>
+          <a:xfrm>
+            <a:off x="777240" y="2148840"/>
+            <a:ext cx="548640" cy="384048"/>
+          </a:xfrm>
+          <a:prstGeom prst="rect">
+            <a:avLst/>
+          </a:prstGeom>
+          <a:noFill/>
+          <a:ln/>
+        </p:spPr>
+        <p:txBody>
+          <a:bodyPr wrap="square" lIns="0" tIns="0" rIns="0" bIns="0" rtlCol="0" anchor="ctr"/>
+          <a:lstStyle/>
+          <a:p>
+            <a:pPr indent="0" marL="0">
+              <a:buNone/>
+            </a:pPr>
+            <a:r>
+              <a:rPr lang="en-US" sz="1400" b="1" dirty="0">
+                <a:solidFill>
+                  <a:srgbClr val="E5484D"/>
                 </a:solidFill>
                 <a:latin typeface="Cambria" pitchFamily="34" charset="0"/>
                 <a:ea typeface="Cambria" pitchFamily="34" charset="-122"/>
                 <a:cs typeface="Cambria" pitchFamily="34" charset="-120"/>
               </a:rPr>
-              <a:t>Parar a hemorragia</a:t>
-            </a:r>
-            <a:endParaRPr lang="en-US" sz="1600" dirty="0"/>
-          </a:p>
-        </p:txBody>
-      </p:sp>
-      <p:sp>
-        <p:nvSpPr>
-          <p:cNvPr id="8" name="Text 6"/>
-          <p:cNvSpPr/>
-          <p:nvPr/>
-        </p:nvSpPr>
-        <p:spPr>
-          <a:xfrm>
-            <a:off x="685800" y="2697480"/>
-            <a:ext cx="2514600" cy="1828800"/>
-          </a:xfrm>
-          <a:prstGeom prst="rect">
-            <a:avLst/>
-          </a:prstGeom>
-          <a:noFill/>
-          <a:ln/>
-        </p:spPr>
-        <p:txBody>
-          <a:bodyPr wrap="square" lIns="0" tIns="0" rIns="0" bIns="0" rtlCol="0" anchor="t"/>
-          <a:lstStyle/>
-          <a:p>
-            <a:pPr marL="152400" indent="-152400">
-              <a:lnSpc>
-                <a:spcPts val="1500"/>
-              </a:lnSpc>
-              <a:spcAft>
-                <a:spcPts val="800"/>
-              </a:spcAft>
-              <a:buSzPct val="100000"/>
-              <a:buChar char="•"/>
-            </a:pPr>
-            <a:r>
-              <a:rPr lang="en-US" sz="1250" dirty="0">
+              <a:t>1ª</a:t>
+            </a:r>
+            <a:endParaRPr lang="en-US" sz="1400" dirty="0"/>
+          </a:p>
+        </p:txBody>
+      </p:sp>
+      <p:sp>
+        <p:nvSpPr>
+          <p:cNvPr id="11" name="Text 9"/>
+          <p:cNvSpPr/>
+          <p:nvPr/>
+        </p:nvSpPr>
+        <p:spPr>
+          <a:xfrm>
+            <a:off x="1417320" y="2148840"/>
+            <a:ext cx="6766560" cy="384048"/>
+          </a:xfrm>
+          <a:prstGeom prst="rect">
+            <a:avLst/>
+          </a:prstGeom>
+          <a:noFill/>
+          <a:ln/>
+        </p:spPr>
+        <p:txBody>
+          <a:bodyPr wrap="square" lIns="0" tIns="0" rIns="0" bIns="0" rtlCol="0" anchor="ctr"/>
+          <a:lstStyle/>
+          <a:p>
+            <a:pPr indent="0" marL="0">
+              <a:buNone/>
+            </a:pPr>
+            <a:r>
+              <a:rPr lang="en-US" sz="1300" dirty="0">
+                <a:solidFill>
+                  <a:srgbClr val="13223F"/>
+                </a:solidFill>
+                <a:latin typeface="Calibri" pitchFamily="34" charset="0"/>
+                <a:ea typeface="Calibri" pitchFamily="34" charset="-122"/>
+                <a:cs typeface="Calibri" pitchFamily="34" charset="-120"/>
+              </a:rPr>
+              <a:t>Descobrir por que a emissão de cartão parou</a:t>
+            </a:r>
+            <a:endParaRPr lang="en-US" sz="1300" dirty="0"/>
+          </a:p>
+        </p:txBody>
+      </p:sp>
+      <p:sp>
+        <p:nvSpPr>
+          <p:cNvPr id="12" name="Text 10"/>
+          <p:cNvSpPr/>
+          <p:nvPr/>
+        </p:nvSpPr>
+        <p:spPr>
+          <a:xfrm>
+            <a:off x="7726680" y="2148840"/>
+            <a:ext cx="1463040" cy="384048"/>
+          </a:xfrm>
+          <a:prstGeom prst="rect">
+            <a:avLst/>
+          </a:prstGeom>
+          <a:noFill/>
+          <a:ln/>
+        </p:spPr>
+        <p:txBody>
+          <a:bodyPr wrap="square" lIns="0" tIns="0" rIns="0" bIns="0" rtlCol="0" anchor="ctr"/>
+          <a:lstStyle/>
+          <a:p>
+            <a:pPr indent="0" marL="0">
+              <a:buNone/>
+            </a:pPr>
+            <a:r>
+              <a:rPr lang="en-US" sz="1200" dirty="0">
                 <a:solidFill>
                   <a:srgbClr val="5A6784"/>
                 </a:solidFill>
@@ -5228,23 +4978,38 @@
                 <a:ea typeface="Calibri" pitchFamily="34" charset="-122"/>
                 <a:cs typeface="Calibri" pitchFamily="34" charset="-120"/>
               </a:rPr>
-              <a:t>Responder por que a emissão parou</a:t>
-            </a:r>
-            <a:endParaRPr lang="en-US" sz="1250" dirty="0"/>
-          </a:p>
-          <a:p>
-            <a:pPr marL="152400" indent="-152400">
-              <a:lnSpc>
-                <a:spcPts val="1500"/>
-              </a:lnSpc>
-              <a:spcAft>
-                <a:spcPts val="800"/>
-              </a:spcAft>
-              <a:buSzPct val="100000"/>
-              <a:buChar char="•"/>
-            </a:pPr>
-            <a:r>
-              <a:rPr lang="en-US" sz="1250" dirty="0">
+              <a:t>Alto</a:t>
+            </a:r>
+            <a:endParaRPr lang="en-US" sz="1200" dirty="0"/>
+          </a:p>
+        </p:txBody>
+      </p:sp>
+      <p:sp>
+        <p:nvSpPr>
+          <p:cNvPr id="13" name="Text 11"/>
+          <p:cNvSpPr/>
+          <p:nvPr/>
+        </p:nvSpPr>
+        <p:spPr>
+          <a:xfrm>
+            <a:off x="9555480" y="2148840"/>
+            <a:ext cx="1463040" cy="384048"/>
+          </a:xfrm>
+          <a:prstGeom prst="rect">
+            <a:avLst/>
+          </a:prstGeom>
+          <a:noFill/>
+          <a:ln/>
+        </p:spPr>
+        <p:txBody>
+          <a:bodyPr wrap="square" lIns="0" tIns="0" rIns="0" bIns="0" rtlCol="0" anchor="ctr"/>
+          <a:lstStyle/>
+          <a:p>
+            <a:pPr indent="0" marL="0">
+              <a:buNone/>
+            </a:pPr>
+            <a:r>
+              <a:rPr lang="en-US" sz="1200" dirty="0">
                 <a:solidFill>
                   <a:srgbClr val="5A6784"/>
                 </a:solidFill>
@@ -5252,211 +5017,116 @@
                 <a:ea typeface="Calibri" pitchFamily="34" charset="-122"/>
                 <a:cs typeface="Calibri" pitchFamily="34" charset="-120"/>
               </a:rPr>
-              <a:t>Campanha sobre os 255 sem renda</a:t>
-            </a:r>
-            <a:endParaRPr lang="en-US" sz="1250" dirty="0"/>
-          </a:p>
-          <a:p>
-            <a:pPr marL="152400" indent="-152400">
-              <a:lnSpc>
-                <a:spcPts val="1500"/>
-              </a:lnSpc>
-              <a:spcAft>
-                <a:spcPts val="800"/>
-              </a:spcAft>
-              <a:buSzPct val="100000"/>
-              <a:buChar char="•"/>
-            </a:pPr>
-            <a:r>
-              <a:rPr lang="en-US" sz="1250" dirty="0">
-                <a:solidFill>
-                  <a:srgbClr val="5A6784"/>
-                </a:solidFill>
-                <a:latin typeface="Calibri" pitchFamily="34" charset="0"/>
-                <a:ea typeface="Calibri" pitchFamily="34" charset="-122"/>
-                <a:cs typeface="Calibri" pitchFamily="34" charset="-120"/>
-              </a:rPr>
-              <a:t>Instrumentar os 8 KPIs</a:t>
-            </a:r>
-            <a:endParaRPr lang="en-US" sz="1250" dirty="0"/>
-          </a:p>
-        </p:txBody>
-      </p:sp>
-      <p:sp>
-        <p:nvSpPr>
-          <p:cNvPr id="9" name="Text 7"/>
-          <p:cNvSpPr/>
-          <p:nvPr/>
-        </p:nvSpPr>
-        <p:spPr>
-          <a:xfrm>
-            <a:off x="685800" y="4114800"/>
-            <a:ext cx="2514600" cy="457200"/>
-          </a:xfrm>
-          <a:prstGeom prst="rect">
-            <a:avLst/>
-          </a:prstGeom>
-          <a:noFill/>
-          <a:ln/>
-        </p:spPr>
-        <p:txBody>
-          <a:bodyPr wrap="square" lIns="0" tIns="0" rIns="0" bIns="0" rtlCol="0" anchor="t"/>
-          <a:lstStyle/>
-          <a:p>
-            <a:pPr indent="0" marL="0">
-              <a:lnSpc>
-                <a:spcPts val="1500"/>
-              </a:lnSpc>
-              <a:buNone/>
-            </a:pPr>
-            <a:r>
-              <a:rPr lang="en-US" sz="1200" i="1" dirty="0">
+              <a:t>Baixo</a:t>
+            </a:r>
+            <a:endParaRPr lang="en-US" sz="1200" dirty="0"/>
+          </a:p>
+        </p:txBody>
+      </p:sp>
+      <p:sp>
+        <p:nvSpPr>
+          <p:cNvPr id="14" name="Text 12"/>
+          <p:cNvSpPr/>
+          <p:nvPr/>
+        </p:nvSpPr>
+        <p:spPr>
+          <a:xfrm>
+            <a:off x="777240" y="2715768"/>
+            <a:ext cx="548640" cy="384048"/>
+          </a:xfrm>
+          <a:prstGeom prst="rect">
+            <a:avLst/>
+          </a:prstGeom>
+          <a:noFill/>
+          <a:ln/>
+        </p:spPr>
+        <p:txBody>
+          <a:bodyPr wrap="square" lIns="0" tIns="0" rIns="0" bIns="0" rtlCol="0" anchor="ctr"/>
+          <a:lstStyle/>
+          <a:p>
+            <a:pPr indent="0" marL="0">
+              <a:buNone/>
+            </a:pPr>
+            <a:r>
+              <a:rPr lang="en-US" sz="1400" b="1" dirty="0">
                 <a:solidFill>
                   <a:srgbClr val="E5484D"/>
-                </a:solidFill>
-                <a:latin typeface="Calibri" pitchFamily="34" charset="0"/>
-                <a:ea typeface="Calibri" pitchFamily="34" charset="-122"/>
-                <a:cs typeface="Calibri" pitchFamily="34" charset="-120"/>
-              </a:rPr>
-              <a:t>Saber o tamanho do buraco</a:t>
-            </a:r>
-            <a:endParaRPr lang="en-US" sz="1200" dirty="0"/>
-          </a:p>
-        </p:txBody>
-      </p:sp>
-      <p:sp>
-        <p:nvSpPr>
-          <p:cNvPr id="10" name="Text 8"/>
-          <p:cNvSpPr/>
-          <p:nvPr/>
-        </p:nvSpPr>
-        <p:spPr>
-          <a:xfrm>
-            <a:off x="3273552" y="1993392"/>
-            <a:ext cx="219456" cy="320040"/>
-          </a:xfrm>
-          <a:prstGeom prst="rect">
-            <a:avLst/>
-          </a:prstGeom>
-          <a:noFill/>
-          <a:ln/>
-        </p:spPr>
-        <p:txBody>
-          <a:bodyPr wrap="square" lIns="0" tIns="0" rIns="0" bIns="0" rtlCol="0" anchor="ctr"/>
-          <a:lstStyle/>
-          <a:p>
-            <a:pPr algn="ctr" indent="0" marL="0">
-              <a:buNone/>
-            </a:pPr>
-            <a:r>
-              <a:rPr lang="en-US" sz="1600" dirty="0">
-                <a:solidFill>
-                  <a:srgbClr val="5A6784"/>
-                </a:solidFill>
-                <a:latin typeface="Calibri" pitchFamily="34" charset="0"/>
-                <a:ea typeface="Calibri" pitchFamily="34" charset="-122"/>
-                <a:cs typeface="Calibri" pitchFamily="34" charset="-120"/>
-              </a:rPr>
-              <a:t>▸</a:t>
-            </a:r>
-            <a:endParaRPr lang="en-US" sz="1600" dirty="0"/>
-          </a:p>
-        </p:txBody>
-      </p:sp>
-      <p:sp>
-        <p:nvSpPr>
-          <p:cNvPr id="11" name="Shape 9"/>
-          <p:cNvSpPr/>
-          <p:nvPr/>
-        </p:nvSpPr>
-        <p:spPr>
-          <a:xfrm>
-            <a:off x="3493008" y="1783080"/>
-            <a:ext cx="2606040" cy="713232"/>
-          </a:xfrm>
-          <a:prstGeom prst="roundRect">
-            <a:avLst>
-              <a:gd name="adj" fmla="val 10256"/>
-            </a:avLst>
-          </a:prstGeom>
-          <a:solidFill>
-            <a:srgbClr val="E08A2E"/>
-          </a:solidFill>
-          <a:ln/>
-        </p:spPr>
-      </p:sp>
-      <p:sp>
-        <p:nvSpPr>
-          <p:cNvPr id="12" name="Text 10"/>
-          <p:cNvSpPr/>
-          <p:nvPr/>
-        </p:nvSpPr>
-        <p:spPr>
-          <a:xfrm>
-            <a:off x="3602736" y="1783080"/>
-            <a:ext cx="2386584" cy="713232"/>
-          </a:xfrm>
-          <a:prstGeom prst="rect">
-            <a:avLst/>
-          </a:prstGeom>
-          <a:noFill/>
-          <a:ln/>
-        </p:spPr>
-        <p:txBody>
-          <a:bodyPr wrap="square" lIns="0" tIns="0" rIns="0" bIns="0" rtlCol="0" anchor="ctr"/>
-          <a:lstStyle/>
-          <a:p>
-            <a:pPr algn="ctr" indent="0" marL="0">
-              <a:buNone/>
-            </a:pPr>
-            <a:r>
-              <a:rPr lang="en-US" sz="1600" b="1" dirty="0">
-                <a:solidFill>
-                  <a:srgbClr val="FFFFFF"/>
                 </a:solidFill>
                 <a:latin typeface="Cambria" pitchFamily="34" charset="0"/>
                 <a:ea typeface="Cambria" pitchFamily="34" charset="-122"/>
                 <a:cs typeface="Cambria" pitchFamily="34" charset="-120"/>
               </a:rPr>
-              <a:t>Quick wins</a:t>
-            </a:r>
-            <a:endParaRPr lang="en-US" sz="1600" dirty="0"/>
-          </a:p>
-        </p:txBody>
-      </p:sp>
-      <p:sp>
-        <p:nvSpPr>
-          <p:cNvPr id="13" name="Text 11"/>
-          <p:cNvSpPr/>
-          <p:nvPr/>
-        </p:nvSpPr>
-        <p:spPr>
-          <a:xfrm>
-            <a:off x="3538728" y="2697480"/>
-            <a:ext cx="2514600" cy="1828800"/>
-          </a:xfrm>
-          <a:prstGeom prst="rect">
-            <a:avLst/>
-          </a:prstGeom>
-          <a:noFill/>
-          <a:ln/>
-        </p:spPr>
-        <p:txBody>
-          <a:bodyPr wrap="square" lIns="0" tIns="0" rIns="0" bIns="0" rtlCol="0" anchor="t"/>
-          <a:lstStyle/>
-          <a:p>
-            <a:pPr marL="152400" indent="-152400">
-              <a:lnSpc>
-                <a:spcPts val="1500"/>
-              </a:lnSpc>
-              <a:spcAft>
-                <a:spcPts val="800"/>
-              </a:spcAft>
-              <a:buSzPct val="100000"/>
-              <a:buChar char="•"/>
-            </a:pPr>
-            <a:r>
-              <a:rPr lang="en-US" sz="1250" dirty="0">
+              <a:t>2ª</a:t>
+            </a:r>
+            <a:endParaRPr lang="en-US" sz="1400" dirty="0"/>
+          </a:p>
+        </p:txBody>
+      </p:sp>
+      <p:sp>
+        <p:nvSpPr>
+          <p:cNvPr id="15" name="Text 13"/>
+          <p:cNvSpPr/>
+          <p:nvPr/>
+        </p:nvSpPr>
+        <p:spPr>
+          <a:xfrm>
+            <a:off x="1417320" y="2715768"/>
+            <a:ext cx="6766560" cy="384048"/>
+          </a:xfrm>
+          <a:prstGeom prst="rect">
+            <a:avLst/>
+          </a:prstGeom>
+          <a:noFill/>
+          <a:ln/>
+        </p:spPr>
+        <p:txBody>
+          <a:bodyPr wrap="square" lIns="0" tIns="0" rIns="0" bIns="0" rtlCol="0" anchor="ctr"/>
+          <a:lstStyle/>
+          <a:p>
+            <a:pPr indent="0" marL="0">
+              <a:buNone/>
+            </a:pPr>
+            <a:r>
+              <a:rPr lang="en-US" sz="1300" dirty="0">
+                <a:solidFill>
+                  <a:srgbClr val="13223F"/>
+                </a:solidFill>
+                <a:latin typeface="Calibri" pitchFamily="34" charset="0"/>
+                <a:ea typeface="Calibri" pitchFamily="34" charset="-122"/>
+                <a:cs typeface="Calibri" pitchFamily="34" charset="-120"/>
+              </a:rPr>
+              <a:t>Recadastrar os 255 clientes sem renda</a:t>
+            </a:r>
+            <a:endParaRPr lang="en-US" sz="1300" dirty="0"/>
+          </a:p>
+        </p:txBody>
+      </p:sp>
+      <p:sp>
+        <p:nvSpPr>
+          <p:cNvPr id="16" name="Text 14"/>
+          <p:cNvSpPr/>
+          <p:nvPr/>
+        </p:nvSpPr>
+        <p:spPr>
+          <a:xfrm>
+            <a:off x="7726680" y="2715768"/>
+            <a:ext cx="1463040" cy="384048"/>
+          </a:xfrm>
+          <a:prstGeom prst="rect">
+            <a:avLst/>
+          </a:prstGeom>
+          <a:noFill/>
+          <a:ln/>
+        </p:spPr>
+        <p:txBody>
+          <a:bodyPr wrap="square" lIns="0" tIns="0" rIns="0" bIns="0" rtlCol="0" anchor="ctr"/>
+          <a:lstStyle/>
+          <a:p>
+            <a:pPr indent="0" marL="0">
+              <a:buNone/>
+            </a:pPr>
+            <a:r>
+              <a:rPr lang="en-US" sz="1200" dirty="0">
                 <a:solidFill>
                   <a:srgbClr val="5A6784"/>
                 </a:solidFill>
@@ -5464,23 +5134,38 @@
                 <a:ea typeface="Calibri" pitchFamily="34" charset="-122"/>
                 <a:cs typeface="Calibri" pitchFamily="34" charset="-120"/>
               </a:rPr>
-              <a:t>Cadastro completo em 97%</a:t>
-            </a:r>
-            <a:endParaRPr lang="en-US" sz="1250" dirty="0"/>
-          </a:p>
-          <a:p>
-            <a:pPr marL="152400" indent="-152400">
-              <a:lnSpc>
-                <a:spcPts val="1500"/>
-              </a:lnSpc>
-              <a:spcAft>
-                <a:spcPts val="800"/>
-              </a:spcAft>
-              <a:buSzPct val="100000"/>
-              <a:buChar char="•"/>
-            </a:pPr>
-            <a:r>
-              <a:rPr lang="en-US" sz="1250" dirty="0">
+              <a:t>Médio</a:t>
+            </a:r>
+            <a:endParaRPr lang="en-US" sz="1200" dirty="0"/>
+          </a:p>
+        </p:txBody>
+      </p:sp>
+      <p:sp>
+        <p:nvSpPr>
+          <p:cNvPr id="17" name="Text 15"/>
+          <p:cNvSpPr/>
+          <p:nvPr/>
+        </p:nvSpPr>
+        <p:spPr>
+          <a:xfrm>
+            <a:off x="9555480" y="2715768"/>
+            <a:ext cx="1463040" cy="384048"/>
+          </a:xfrm>
+          <a:prstGeom prst="rect">
+            <a:avLst/>
+          </a:prstGeom>
+          <a:noFill/>
+          <a:ln/>
+        </p:spPr>
+        <p:txBody>
+          <a:bodyPr wrap="square" lIns="0" tIns="0" rIns="0" bIns="0" rtlCol="0" anchor="ctr"/>
+          <a:lstStyle/>
+          <a:p>
+            <a:pPr indent="0" marL="0">
+              <a:buNone/>
+            </a:pPr>
+            <a:r>
+              <a:rPr lang="en-US" sz="1200" dirty="0">
                 <a:solidFill>
                   <a:srgbClr val="5A6784"/>
                 </a:solidFill>
@@ -5488,73 +5173,7 @@
                 <a:ea typeface="Calibri" pitchFamily="34" charset="-122"/>
                 <a:cs typeface="Calibri" pitchFamily="34" charset="-120"/>
               </a:rPr>
-              <a:t>Onboarding de ativação assistida</a:t>
-            </a:r>
-            <a:endParaRPr lang="en-US" sz="1250" dirty="0"/>
-          </a:p>
-          <a:p>
-            <a:pPr marL="152400" indent="-152400">
-              <a:lnSpc>
-                <a:spcPts val="1500"/>
-              </a:lnSpc>
-              <a:spcAft>
-                <a:spcPts val="800"/>
-              </a:spcAft>
-              <a:buSzPct val="100000"/>
-              <a:buChar char="•"/>
-            </a:pPr>
-            <a:r>
-              <a:rPr lang="en-US" sz="1250" dirty="0">
-                <a:solidFill>
-                  <a:srgbClr val="5A6784"/>
-                </a:solidFill>
-                <a:latin typeface="Calibri" pitchFamily="34" charset="0"/>
-                <a:ea typeface="Calibri" pitchFamily="34" charset="-122"/>
-                <a:cs typeface="Calibri" pitchFamily="34" charset="-120"/>
-              </a:rPr>
-              <a:t>Piloto de portabilidade em 1 praça</a:t>
-            </a:r>
-            <a:endParaRPr lang="en-US" sz="1250" dirty="0"/>
-          </a:p>
-        </p:txBody>
-      </p:sp>
-      <p:sp>
-        <p:nvSpPr>
-          <p:cNvPr id="14" name="Text 12"/>
-          <p:cNvSpPr/>
-          <p:nvPr/>
-        </p:nvSpPr>
-        <p:spPr>
-          <a:xfrm>
-            <a:off x="3538728" y="4114800"/>
-            <a:ext cx="2514600" cy="457200"/>
-          </a:xfrm>
-          <a:prstGeom prst="rect">
-            <a:avLst/>
-          </a:prstGeom>
-          <a:noFill/>
-          <a:ln/>
-        </p:spPr>
-        <p:txBody>
-          <a:bodyPr wrap="square" lIns="0" tIns="0" rIns="0" bIns="0" rtlCol="0" anchor="t"/>
-          <a:lstStyle/>
-          <a:p>
-            <a:pPr indent="0" marL="0">
-              <a:lnSpc>
-                <a:spcPts val="1500"/>
-              </a:lnSpc>
-              <a:buNone/>
-            </a:pPr>
-            <a:r>
-              <a:rPr lang="en-US" sz="1200" i="1" dirty="0">
-                <a:solidFill>
-                  <a:srgbClr val="B06A1E"/>
-                </a:solidFill>
-                <a:latin typeface="Calibri" pitchFamily="34" charset="0"/>
-                <a:ea typeface="Calibri" pitchFamily="34" charset="-122"/>
-                <a:cs typeface="Calibri" pitchFamily="34" charset="-120"/>
-              </a:rPr>
-              <a:t>Resultado sem projeto grande</a:t>
+              <a:t>Baixo</a:t>
             </a:r>
             <a:endParaRPr lang="en-US" sz="1200" dirty="0"/>
           </a:p>
@@ -5562,137 +5181,130 @@
       </p:sp>
       <p:sp>
         <p:nvSpPr>
-          <p:cNvPr id="15" name="Text 13"/>
-          <p:cNvSpPr/>
-          <p:nvPr/>
-        </p:nvSpPr>
-        <p:spPr>
-          <a:xfrm>
-            <a:off x="6126480" y="1993392"/>
-            <a:ext cx="219456" cy="320040"/>
-          </a:xfrm>
-          <a:prstGeom prst="rect">
-            <a:avLst/>
-          </a:prstGeom>
-          <a:noFill/>
-          <a:ln/>
-        </p:spPr>
-        <p:txBody>
-          <a:bodyPr wrap="square" lIns="0" tIns="0" rIns="0" bIns="0" rtlCol="0" anchor="ctr"/>
-          <a:lstStyle/>
-          <a:p>
-            <a:pPr algn="ctr" indent="0" marL="0">
-              <a:buNone/>
-            </a:pPr>
-            <a:r>
-              <a:rPr lang="en-US" sz="1600" dirty="0">
-                <a:solidFill>
-                  <a:srgbClr val="5A6784"/>
-                </a:solidFill>
-                <a:latin typeface="Calibri" pitchFamily="34" charset="0"/>
-                <a:ea typeface="Calibri" pitchFamily="34" charset="-122"/>
-                <a:cs typeface="Calibri" pitchFamily="34" charset="-120"/>
-              </a:rPr>
-              <a:t>▸</a:t>
-            </a:r>
-            <a:endParaRPr lang="en-US" sz="1600" dirty="0"/>
-          </a:p>
-        </p:txBody>
-      </p:sp>
-      <p:sp>
-        <p:nvSpPr>
-          <p:cNvPr id="16" name="Shape 14"/>
-          <p:cNvSpPr/>
-          <p:nvPr/>
-        </p:nvSpPr>
-        <p:spPr>
-          <a:xfrm>
-            <a:off x="6345936" y="1783080"/>
-            <a:ext cx="2606040" cy="713232"/>
+          <p:cNvPr id="18" name="Shape 16"/>
+          <p:cNvSpPr/>
+          <p:nvPr/>
+        </p:nvSpPr>
+        <p:spPr>
+          <a:xfrm>
+            <a:off x="640080" y="3227832"/>
+            <a:ext cx="10881360" cy="512064"/>
           </a:xfrm>
           <a:prstGeom prst="roundRect">
             <a:avLst>
-              <a:gd name="adj" fmla="val 10256"/>
+              <a:gd name="adj" fmla="val 8929"/>
             </a:avLst>
           </a:prstGeom>
           <a:solidFill>
-            <a:srgbClr val="3E8FB0"/>
+            <a:srgbClr val="F4F6FA"/>
           </a:solidFill>
           <a:ln/>
         </p:spPr>
       </p:sp>
       <p:sp>
         <p:nvSpPr>
-          <p:cNvPr id="17" name="Text 15"/>
-          <p:cNvSpPr/>
-          <p:nvPr/>
-        </p:nvSpPr>
-        <p:spPr>
-          <a:xfrm>
-            <a:off x="6455664" y="1783080"/>
-            <a:ext cx="2386584" cy="713232"/>
-          </a:xfrm>
-          <a:prstGeom prst="rect">
-            <a:avLst/>
-          </a:prstGeom>
-          <a:noFill/>
-          <a:ln/>
-        </p:spPr>
-        <p:txBody>
-          <a:bodyPr wrap="square" lIns="0" tIns="0" rIns="0" bIns="0" rtlCol="0" anchor="ctr"/>
-          <a:lstStyle/>
-          <a:p>
-            <a:pPr algn="ctr" indent="0" marL="0">
-              <a:buNone/>
-            </a:pPr>
-            <a:r>
-              <a:rPr lang="en-US" sz="1600" b="1" dirty="0">
-                <a:solidFill>
-                  <a:srgbClr val="FFFFFF"/>
+          <p:cNvPr id="19" name="Text 17"/>
+          <p:cNvSpPr/>
+          <p:nvPr/>
+        </p:nvSpPr>
+        <p:spPr>
+          <a:xfrm>
+            <a:off x="777240" y="3282696"/>
+            <a:ext cx="548640" cy="384048"/>
+          </a:xfrm>
+          <a:prstGeom prst="rect">
+            <a:avLst/>
+          </a:prstGeom>
+          <a:noFill/>
+          <a:ln/>
+        </p:spPr>
+        <p:txBody>
+          <a:bodyPr wrap="square" lIns="0" tIns="0" rIns="0" bIns="0" rtlCol="0" anchor="ctr"/>
+          <a:lstStyle/>
+          <a:p>
+            <a:pPr indent="0" marL="0">
+              <a:buNone/>
+            </a:pPr>
+            <a:r>
+              <a:rPr lang="en-US" sz="1400" b="1" dirty="0">
+                <a:solidFill>
+                  <a:srgbClr val="5A6784"/>
                 </a:solidFill>
                 <a:latin typeface="Cambria" pitchFamily="34" charset="0"/>
                 <a:ea typeface="Cambria" pitchFamily="34" charset="-122"/>
                 <a:cs typeface="Cambria" pitchFamily="34" charset="-120"/>
               </a:rPr>
-              <a:t>Reabrir a entrada</a:t>
-            </a:r>
-            <a:endParaRPr lang="en-US" sz="1600" dirty="0"/>
-          </a:p>
-        </p:txBody>
-      </p:sp>
-      <p:sp>
-        <p:nvSpPr>
-          <p:cNvPr id="18" name="Text 16"/>
-          <p:cNvSpPr/>
-          <p:nvPr/>
-        </p:nvSpPr>
-        <p:spPr>
-          <a:xfrm>
-            <a:off x="6391656" y="2697480"/>
-            <a:ext cx="2514600" cy="1828800"/>
-          </a:xfrm>
-          <a:prstGeom prst="rect">
-            <a:avLst/>
-          </a:prstGeom>
-          <a:noFill/>
-          <a:ln/>
-        </p:spPr>
-        <p:txBody>
-          <a:bodyPr wrap="square" lIns="0" tIns="0" rIns="0" bIns="0" rtlCol="0" anchor="t"/>
-          <a:lstStyle/>
-          <a:p>
-            <a:pPr marL="152400" indent="-152400">
-              <a:lnSpc>
-                <a:spcPts val="1500"/>
-              </a:lnSpc>
-              <a:spcAft>
-                <a:spcPts val="800"/>
-              </a:spcAft>
-              <a:buSzPct val="100000"/>
-              <a:buChar char="•"/>
-            </a:pPr>
-            <a:r>
-              <a:rPr lang="en-US" sz="1250" dirty="0">
+              <a:t>3ª</a:t>
+            </a:r>
+            <a:endParaRPr lang="en-US" sz="1400" dirty="0"/>
+          </a:p>
+        </p:txBody>
+      </p:sp>
+      <p:sp>
+        <p:nvSpPr>
+          <p:cNvPr id="20" name="Text 18"/>
+          <p:cNvSpPr/>
+          <p:nvPr/>
+        </p:nvSpPr>
+        <p:spPr>
+          <a:xfrm>
+            <a:off x="1417320" y="3282696"/>
+            <a:ext cx="6766560" cy="384048"/>
+          </a:xfrm>
+          <a:prstGeom prst="rect">
+            <a:avLst/>
+          </a:prstGeom>
+          <a:noFill/>
+          <a:ln/>
+        </p:spPr>
+        <p:txBody>
+          <a:bodyPr wrap="square" lIns="0" tIns="0" rIns="0" bIns="0" rtlCol="0" anchor="ctr"/>
+          <a:lstStyle/>
+          <a:p>
+            <a:pPr indent="0" marL="0">
+              <a:buNone/>
+            </a:pPr>
+            <a:r>
+              <a:rPr lang="en-US" sz="1300" dirty="0">
+                <a:solidFill>
+                  <a:srgbClr val="13223F"/>
+                </a:solidFill>
+                <a:latin typeface="Calibri" pitchFamily="34" charset="0"/>
+                <a:ea typeface="Calibri" pitchFamily="34" charset="-122"/>
+                <a:cs typeface="Calibri" pitchFamily="34" charset="-120"/>
+              </a:rPr>
+              <a:t>Piloto de cashback por frequência</a:t>
+            </a:r>
+            <a:endParaRPr lang="en-US" sz="1300" dirty="0"/>
+          </a:p>
+        </p:txBody>
+      </p:sp>
+      <p:sp>
+        <p:nvSpPr>
+          <p:cNvPr id="21" name="Text 19"/>
+          <p:cNvSpPr/>
+          <p:nvPr/>
+        </p:nvSpPr>
+        <p:spPr>
+          <a:xfrm>
+            <a:off x="7726680" y="3282696"/>
+            <a:ext cx="1463040" cy="384048"/>
+          </a:xfrm>
+          <a:prstGeom prst="rect">
+            <a:avLst/>
+          </a:prstGeom>
+          <a:noFill/>
+          <a:ln/>
+        </p:spPr>
+        <p:txBody>
+          <a:bodyPr wrap="square" lIns="0" tIns="0" rIns="0" bIns="0" rtlCol="0" anchor="ctr"/>
+          <a:lstStyle/>
+          <a:p>
+            <a:pPr indent="0" marL="0">
+              <a:buNone/>
+            </a:pPr>
+            <a:r>
+              <a:rPr lang="en-US" sz="1200" dirty="0">
                 <a:solidFill>
                   <a:srgbClr val="5A6784"/>
                 </a:solidFill>
@@ -5700,23 +5312,38 @@
                 <a:ea typeface="Calibri" pitchFamily="34" charset="-122"/>
                 <a:cs typeface="Calibri" pitchFamily="34" charset="-120"/>
               </a:rPr>
-              <a:t>Conta 100% digital em produção</a:t>
-            </a:r>
-            <a:endParaRPr lang="en-US" sz="1250" dirty="0"/>
-          </a:p>
-          <a:p>
-            <a:pPr marL="152400" indent="-152400">
-              <a:lnSpc>
-                <a:spcPts val="1500"/>
-              </a:lnSpc>
-              <a:spcAft>
-                <a:spcPts val="800"/>
-              </a:spcAft>
-              <a:buSzPct val="100000"/>
-              <a:buChar char="•"/>
-            </a:pPr>
-            <a:r>
-              <a:rPr lang="en-US" sz="1250" dirty="0">
+              <a:t>Alto</a:t>
+            </a:r>
+            <a:endParaRPr lang="en-US" sz="1200" dirty="0"/>
+          </a:p>
+        </p:txBody>
+      </p:sp>
+      <p:sp>
+        <p:nvSpPr>
+          <p:cNvPr id="22" name="Text 20"/>
+          <p:cNvSpPr/>
+          <p:nvPr/>
+        </p:nvSpPr>
+        <p:spPr>
+          <a:xfrm>
+            <a:off x="9555480" y="3282696"/>
+            <a:ext cx="1463040" cy="384048"/>
+          </a:xfrm>
+          <a:prstGeom prst="rect">
+            <a:avLst/>
+          </a:prstGeom>
+          <a:noFill/>
+          <a:ln/>
+        </p:spPr>
+        <p:txBody>
+          <a:bodyPr wrap="square" lIns="0" tIns="0" rIns="0" bIns="0" rtlCol="0" anchor="ctr"/>
+          <a:lstStyle/>
+          <a:p>
+            <a:pPr indent="0" marL="0">
+              <a:buNone/>
+            </a:pPr>
+            <a:r>
+              <a:rPr lang="en-US" sz="1200" dirty="0">
                 <a:solidFill>
                   <a:srgbClr val="5A6784"/>
                 </a:solidFill>
@@ -5724,211 +5351,116 @@
                 <a:ea typeface="Calibri" pitchFamily="34" charset="-122"/>
                 <a:cs typeface="Calibri" pitchFamily="34" charset="-120"/>
               </a:rPr>
-              <a:t>Open Finance ativo</a:t>
-            </a:r>
-            <a:endParaRPr lang="en-US" sz="1250" dirty="0"/>
-          </a:p>
-          <a:p>
-            <a:pPr marL="152400" indent="-152400">
-              <a:lnSpc>
-                <a:spcPts val="1500"/>
-              </a:lnSpc>
-              <a:spcAft>
-                <a:spcPts val="800"/>
-              </a:spcAft>
-              <a:buSzPct val="100000"/>
-              <a:buChar char="•"/>
-            </a:pPr>
-            <a:r>
-              <a:rPr lang="en-US" sz="1250" dirty="0">
+              <a:t>Médio</a:t>
+            </a:r>
+            <a:endParaRPr lang="en-US" sz="1200" dirty="0"/>
+          </a:p>
+        </p:txBody>
+      </p:sp>
+      <p:sp>
+        <p:nvSpPr>
+          <p:cNvPr id="23" name="Text 21"/>
+          <p:cNvSpPr/>
+          <p:nvPr/>
+        </p:nvSpPr>
+        <p:spPr>
+          <a:xfrm>
+            <a:off x="777240" y="3849624"/>
+            <a:ext cx="548640" cy="384048"/>
+          </a:xfrm>
+          <a:prstGeom prst="rect">
+            <a:avLst/>
+          </a:prstGeom>
+          <a:noFill/>
+          <a:ln/>
+        </p:spPr>
+        <p:txBody>
+          <a:bodyPr wrap="square" lIns="0" tIns="0" rIns="0" bIns="0" rtlCol="0" anchor="ctr"/>
+          <a:lstStyle/>
+          <a:p>
+            <a:pPr indent="0" marL="0">
+              <a:buNone/>
+            </a:pPr>
+            <a:r>
+              <a:rPr lang="en-US" sz="1400" b="1" dirty="0">
                 <a:solidFill>
                   <a:srgbClr val="5A6784"/>
-                </a:solidFill>
-                <a:latin typeface="Calibri" pitchFamily="34" charset="0"/>
-                <a:ea typeface="Calibri" pitchFamily="34" charset="-122"/>
-                <a:cs typeface="Calibri" pitchFamily="34" charset="-120"/>
-              </a:rPr>
-              <a:t>150 novas contas por trimestre</a:t>
-            </a:r>
-            <a:endParaRPr lang="en-US" sz="1250" dirty="0"/>
-          </a:p>
-        </p:txBody>
-      </p:sp>
-      <p:sp>
-        <p:nvSpPr>
-          <p:cNvPr id="19" name="Text 17"/>
-          <p:cNvSpPr/>
-          <p:nvPr/>
-        </p:nvSpPr>
-        <p:spPr>
-          <a:xfrm>
-            <a:off x="6391656" y="4114800"/>
-            <a:ext cx="2514600" cy="457200"/>
-          </a:xfrm>
-          <a:prstGeom prst="rect">
-            <a:avLst/>
-          </a:prstGeom>
-          <a:noFill/>
-          <a:ln/>
-        </p:spPr>
-        <p:txBody>
-          <a:bodyPr wrap="square" lIns="0" tIns="0" rIns="0" bIns="0" rtlCol="0" anchor="t"/>
-          <a:lstStyle/>
-          <a:p>
-            <a:pPr indent="0" marL="0">
-              <a:lnSpc>
-                <a:spcPts val="1500"/>
-              </a:lnSpc>
-              <a:buNone/>
-            </a:pPr>
-            <a:r>
-              <a:rPr lang="en-US" sz="1200" i="1" dirty="0">
-                <a:solidFill>
-                  <a:srgbClr val="3E8FB0"/>
-                </a:solidFill>
-                <a:latin typeface="Calibri" pitchFamily="34" charset="0"/>
-                <a:ea typeface="Calibri" pitchFamily="34" charset="-122"/>
-                <a:cs typeface="Calibri" pitchFamily="34" charset="-120"/>
-              </a:rPr>
-              <a:t>Volta a entrar cliente novo</a:t>
-            </a:r>
-            <a:endParaRPr lang="en-US" sz="1200" dirty="0"/>
-          </a:p>
-        </p:txBody>
-      </p:sp>
-      <p:sp>
-        <p:nvSpPr>
-          <p:cNvPr id="20" name="Text 18"/>
-          <p:cNvSpPr/>
-          <p:nvPr/>
-        </p:nvSpPr>
-        <p:spPr>
-          <a:xfrm>
-            <a:off x="8979408" y="1993392"/>
-            <a:ext cx="219456" cy="320040"/>
-          </a:xfrm>
-          <a:prstGeom prst="rect">
-            <a:avLst/>
-          </a:prstGeom>
-          <a:noFill/>
-          <a:ln/>
-        </p:spPr>
-        <p:txBody>
-          <a:bodyPr wrap="square" lIns="0" tIns="0" rIns="0" bIns="0" rtlCol="0" anchor="ctr"/>
-          <a:lstStyle/>
-          <a:p>
-            <a:pPr algn="ctr" indent="0" marL="0">
-              <a:buNone/>
-            </a:pPr>
-            <a:r>
-              <a:rPr lang="en-US" sz="1600" dirty="0">
-                <a:solidFill>
-                  <a:srgbClr val="5A6784"/>
-                </a:solidFill>
-                <a:latin typeface="Calibri" pitchFamily="34" charset="0"/>
-                <a:ea typeface="Calibri" pitchFamily="34" charset="-122"/>
-                <a:cs typeface="Calibri" pitchFamily="34" charset="-120"/>
-              </a:rPr>
-              <a:t>▸</a:t>
-            </a:r>
-            <a:endParaRPr lang="en-US" sz="1600" dirty="0"/>
-          </a:p>
-        </p:txBody>
-      </p:sp>
-      <p:sp>
-        <p:nvSpPr>
-          <p:cNvPr id="21" name="Shape 19"/>
-          <p:cNvSpPr/>
-          <p:nvPr/>
-        </p:nvSpPr>
-        <p:spPr>
-          <a:xfrm>
-            <a:off x="9198864" y="1783080"/>
-            <a:ext cx="2606040" cy="713232"/>
-          </a:xfrm>
-          <a:prstGeom prst="roundRect">
-            <a:avLst>
-              <a:gd name="adj" fmla="val 10256"/>
-            </a:avLst>
-          </a:prstGeom>
-          <a:solidFill>
-            <a:srgbClr val="00A896"/>
-          </a:solidFill>
-          <a:ln/>
-        </p:spPr>
-      </p:sp>
-      <p:sp>
-        <p:nvSpPr>
-          <p:cNvPr id="22" name="Text 20"/>
-          <p:cNvSpPr/>
-          <p:nvPr/>
-        </p:nvSpPr>
-        <p:spPr>
-          <a:xfrm>
-            <a:off x="9308592" y="1783080"/>
-            <a:ext cx="2386584" cy="713232"/>
-          </a:xfrm>
-          <a:prstGeom prst="rect">
-            <a:avLst/>
-          </a:prstGeom>
-          <a:noFill/>
-          <a:ln/>
-        </p:spPr>
-        <p:txBody>
-          <a:bodyPr wrap="square" lIns="0" tIns="0" rIns="0" bIns="0" rtlCol="0" anchor="ctr"/>
-          <a:lstStyle/>
-          <a:p>
-            <a:pPr algn="ctr" indent="0" marL="0">
-              <a:buNone/>
-            </a:pPr>
-            <a:r>
-              <a:rPr lang="en-US" sz="1600" b="1" dirty="0">
-                <a:solidFill>
-                  <a:srgbClr val="FFFFFF"/>
                 </a:solidFill>
                 <a:latin typeface="Cambria" pitchFamily="34" charset="0"/>
                 <a:ea typeface="Cambria" pitchFamily="34" charset="-122"/>
                 <a:cs typeface="Cambria" pitchFamily="34" charset="-120"/>
               </a:rPr>
-              <a:t>Principalidade</a:t>
-            </a:r>
-            <a:endParaRPr lang="en-US" sz="1600" dirty="0"/>
-          </a:p>
-        </p:txBody>
-      </p:sp>
-      <p:sp>
-        <p:nvSpPr>
-          <p:cNvPr id="23" name="Text 21"/>
-          <p:cNvSpPr/>
-          <p:nvPr/>
-        </p:nvSpPr>
-        <p:spPr>
-          <a:xfrm>
-            <a:off x="9244584" y="2697480"/>
-            <a:ext cx="2514600" cy="1828800"/>
-          </a:xfrm>
-          <a:prstGeom prst="rect">
-            <a:avLst/>
-          </a:prstGeom>
-          <a:noFill/>
-          <a:ln/>
-        </p:spPr>
-        <p:txBody>
-          <a:bodyPr wrap="square" lIns="0" tIns="0" rIns="0" bIns="0" rtlCol="0" anchor="t"/>
-          <a:lstStyle/>
-          <a:p>
-            <a:pPr marL="152400" indent="-152400">
-              <a:lnSpc>
-                <a:spcPts val="1500"/>
-              </a:lnSpc>
-              <a:spcAft>
-                <a:spcPts val="800"/>
-              </a:spcAft>
-              <a:buSzPct val="100000"/>
-              <a:buChar char="•"/>
-            </a:pPr>
-            <a:r>
-              <a:rPr lang="en-US" sz="1250" dirty="0">
+              <a:t>4ª</a:t>
+            </a:r>
+            <a:endParaRPr lang="en-US" sz="1400" dirty="0"/>
+          </a:p>
+        </p:txBody>
+      </p:sp>
+      <p:sp>
+        <p:nvSpPr>
+          <p:cNvPr id="24" name="Text 22"/>
+          <p:cNvSpPr/>
+          <p:nvPr/>
+        </p:nvSpPr>
+        <p:spPr>
+          <a:xfrm>
+            <a:off x="1417320" y="3849624"/>
+            <a:ext cx="6766560" cy="384048"/>
+          </a:xfrm>
+          <a:prstGeom prst="rect">
+            <a:avLst/>
+          </a:prstGeom>
+          <a:noFill/>
+          <a:ln/>
+        </p:spPr>
+        <p:txBody>
+          <a:bodyPr wrap="square" lIns="0" tIns="0" rIns="0" bIns="0" rtlCol="0" anchor="ctr"/>
+          <a:lstStyle/>
+          <a:p>
+            <a:pPr indent="0" marL="0">
+              <a:buNone/>
+            </a:pPr>
+            <a:r>
+              <a:rPr lang="en-US" sz="1300" dirty="0">
+                <a:solidFill>
+                  <a:srgbClr val="13223F"/>
+                </a:solidFill>
+                <a:latin typeface="Calibri" pitchFamily="34" charset="0"/>
+                <a:ea typeface="Calibri" pitchFamily="34" charset="-122"/>
+                <a:cs typeface="Calibri" pitchFamily="34" charset="-120"/>
+              </a:rPr>
+              <a:t>Abertura de conta 100% digital</a:t>
+            </a:r>
+            <a:endParaRPr lang="en-US" sz="1300" dirty="0"/>
+          </a:p>
+        </p:txBody>
+      </p:sp>
+      <p:sp>
+        <p:nvSpPr>
+          <p:cNvPr id="25" name="Text 23"/>
+          <p:cNvSpPr/>
+          <p:nvPr/>
+        </p:nvSpPr>
+        <p:spPr>
+          <a:xfrm>
+            <a:off x="7726680" y="3849624"/>
+            <a:ext cx="1463040" cy="384048"/>
+          </a:xfrm>
+          <a:prstGeom prst="rect">
+            <a:avLst/>
+          </a:prstGeom>
+          <a:noFill/>
+          <a:ln/>
+        </p:spPr>
+        <p:txBody>
+          <a:bodyPr wrap="square" lIns="0" tIns="0" rIns="0" bIns="0" rtlCol="0" anchor="ctr"/>
+          <a:lstStyle/>
+          <a:p>
+            <a:pPr indent="0" marL="0">
+              <a:buNone/>
+            </a:pPr>
+            <a:r>
+              <a:rPr lang="en-US" sz="1200" dirty="0">
                 <a:solidFill>
                   <a:srgbClr val="5A6784"/>
                 </a:solidFill>
@@ -5936,23 +5468,38 @@
                 <a:ea typeface="Calibri" pitchFamily="34" charset="-122"/>
                 <a:cs typeface="Calibri" pitchFamily="34" charset="-120"/>
               </a:rPr>
-              <a:t>Rendimento no saldo em conta</a:t>
-            </a:r>
-            <a:endParaRPr lang="en-US" sz="1250" dirty="0"/>
-          </a:p>
-          <a:p>
-            <a:pPr marL="152400" indent="-152400">
-              <a:lnSpc>
-                <a:spcPts val="1500"/>
-              </a:lnSpc>
-              <a:spcAft>
-                <a:spcPts val="800"/>
-              </a:spcAft>
-              <a:buSzPct val="100000"/>
-              <a:buChar char="•"/>
-            </a:pPr>
-            <a:r>
-              <a:rPr lang="en-US" sz="1250" dirty="0">
+              <a:t>Alto</a:t>
+            </a:r>
+            <a:endParaRPr lang="en-US" sz="1200" dirty="0"/>
+          </a:p>
+        </p:txBody>
+      </p:sp>
+      <p:sp>
+        <p:nvSpPr>
+          <p:cNvPr id="26" name="Text 24"/>
+          <p:cNvSpPr/>
+          <p:nvPr/>
+        </p:nvSpPr>
+        <p:spPr>
+          <a:xfrm>
+            <a:off x="9555480" y="3849624"/>
+            <a:ext cx="1463040" cy="384048"/>
+          </a:xfrm>
+          <a:prstGeom prst="rect">
+            <a:avLst/>
+          </a:prstGeom>
+          <a:noFill/>
+          <a:ln/>
+        </p:spPr>
+        <p:txBody>
+          <a:bodyPr wrap="square" lIns="0" tIns="0" rIns="0" bIns="0" rtlCol="0" anchor="ctr"/>
+          <a:lstStyle/>
+          <a:p>
+            <a:pPr indent="0" marL="0">
+              <a:buNone/>
+            </a:pPr>
+            <a:r>
+              <a:rPr lang="en-US" sz="1200" dirty="0">
                 <a:solidFill>
                   <a:srgbClr val="5A6784"/>
                 </a:solidFill>
@@ -5960,73 +5507,7 @@
                 <a:ea typeface="Calibri" pitchFamily="34" charset="-122"/>
                 <a:cs typeface="Calibri" pitchFamily="34" charset="-120"/>
               </a:rPr>
-              <a:t>Investimento vira limite</a:t>
-            </a:r>
-            <a:endParaRPr lang="en-US" sz="1250" dirty="0"/>
-          </a:p>
-          <a:p>
-            <a:pPr marL="152400" indent="-152400">
-              <a:lnSpc>
-                <a:spcPts val="1500"/>
-              </a:lnSpc>
-              <a:spcAft>
-                <a:spcPts val="800"/>
-              </a:spcAft>
-              <a:buSzPct val="100000"/>
-              <a:buChar char="•"/>
-            </a:pPr>
-            <a:r>
-              <a:rPr lang="en-US" sz="1250" dirty="0">
-                <a:solidFill>
-                  <a:srgbClr val="5A6784"/>
-                </a:solidFill>
-                <a:latin typeface="Calibri" pitchFamily="34" charset="0"/>
-                <a:ea typeface="Calibri" pitchFamily="34" charset="-122"/>
-                <a:cs typeface="Calibri" pitchFamily="34" charset="-120"/>
-              </a:rPr>
-              <a:t>25% com crédito recorrente</a:t>
-            </a:r>
-            <a:endParaRPr lang="en-US" sz="1250" dirty="0"/>
-          </a:p>
-        </p:txBody>
-      </p:sp>
-      <p:sp>
-        <p:nvSpPr>
-          <p:cNvPr id="24" name="Text 22"/>
-          <p:cNvSpPr/>
-          <p:nvPr/>
-        </p:nvSpPr>
-        <p:spPr>
-          <a:xfrm>
-            <a:off x="9244584" y="4114800"/>
-            <a:ext cx="2514600" cy="457200"/>
-          </a:xfrm>
-          <a:prstGeom prst="rect">
-            <a:avLst/>
-          </a:prstGeom>
-          <a:noFill/>
-          <a:ln/>
-        </p:spPr>
-        <p:txBody>
-          <a:bodyPr wrap="square" lIns="0" tIns="0" rIns="0" bIns="0" rtlCol="0" anchor="t"/>
-          <a:lstStyle/>
-          <a:p>
-            <a:pPr indent="0" marL="0">
-              <a:lnSpc>
-                <a:spcPts val="1500"/>
-              </a:lnSpc>
-              <a:buNone/>
-            </a:pPr>
-            <a:r>
-              <a:rPr lang="en-US" sz="1200" i="1" dirty="0">
-                <a:solidFill>
-                  <a:srgbClr val="00A896"/>
-                </a:solidFill>
-                <a:latin typeface="Calibri" pitchFamily="34" charset="0"/>
-                <a:ea typeface="Calibri" pitchFamily="34" charset="-122"/>
-                <a:cs typeface="Calibri" pitchFamily="34" charset="-120"/>
-              </a:rPr>
-              <a:t>O banco vira a opção padrão</a:t>
+              <a:t>Médio</a:t>
             </a:r>
             <a:endParaRPr lang="en-US" sz="1200" dirty="0"/>
           </a:p>
@@ -6034,102 +5515,550 @@
       </p:sp>
       <p:sp>
         <p:nvSpPr>
-          <p:cNvPr id="25" name="Shape 23"/>
-          <p:cNvSpPr/>
-          <p:nvPr/>
-        </p:nvSpPr>
-        <p:spPr>
-          <a:xfrm>
-            <a:off x="640080" y="4983480"/>
-            <a:ext cx="10881360" cy="1051560"/>
+          <p:cNvPr id="27" name="Shape 25"/>
+          <p:cNvSpPr/>
+          <p:nvPr/>
+        </p:nvSpPr>
+        <p:spPr>
+          <a:xfrm>
+            <a:off x="640080" y="4361688"/>
+            <a:ext cx="10881360" cy="512064"/>
           </a:xfrm>
           <a:prstGeom prst="roundRect">
             <a:avLst>
-              <a:gd name="adj" fmla="val 6957"/>
+              <a:gd name="adj" fmla="val 8929"/>
             </a:avLst>
           </a:prstGeom>
           <a:solidFill>
-            <a:srgbClr val="13223F"/>
+            <a:srgbClr val="F4F6FA"/>
           </a:solidFill>
           <a:ln/>
         </p:spPr>
       </p:sp>
       <p:sp>
         <p:nvSpPr>
-          <p:cNvPr id="26" name="Text 24"/>
-          <p:cNvSpPr/>
-          <p:nvPr/>
-        </p:nvSpPr>
-        <p:spPr>
-          <a:xfrm>
-            <a:off x="960120" y="5166360"/>
-            <a:ext cx="2194560" cy="685800"/>
-          </a:xfrm>
-          <a:prstGeom prst="rect">
-            <a:avLst/>
-          </a:prstGeom>
-          <a:noFill/>
-          <a:ln/>
-        </p:spPr>
-        <p:txBody>
-          <a:bodyPr wrap="square" lIns="0" tIns="0" rIns="0" bIns="0" rtlCol="0" anchor="ctr"/>
-          <a:lstStyle/>
-          <a:p>
-            <a:pPr indent="0" marL="0">
-              <a:buNone/>
-            </a:pPr>
-            <a:r>
-              <a:rPr lang="en-US" sz="1500" b="1" dirty="0">
-                <a:solidFill>
-                  <a:srgbClr val="00A896"/>
+          <p:cNvPr id="28" name="Text 26"/>
+          <p:cNvSpPr/>
+          <p:nvPr/>
+        </p:nvSpPr>
+        <p:spPr>
+          <a:xfrm>
+            <a:off x="777240" y="4416552"/>
+            <a:ext cx="548640" cy="384048"/>
+          </a:xfrm>
+          <a:prstGeom prst="rect">
+            <a:avLst/>
+          </a:prstGeom>
+          <a:noFill/>
+          <a:ln/>
+        </p:spPr>
+        <p:txBody>
+          <a:bodyPr wrap="square" lIns="0" tIns="0" rIns="0" bIns="0" rtlCol="0" anchor="ctr"/>
+          <a:lstStyle/>
+          <a:p>
+            <a:pPr indent="0" marL="0">
+              <a:buNone/>
+            </a:pPr>
+            <a:r>
+              <a:rPr lang="en-US" sz="1400" b="1" dirty="0">
+                <a:solidFill>
+                  <a:srgbClr val="5A6784"/>
                 </a:solidFill>
                 <a:latin typeface="Cambria" pitchFamily="34" charset="0"/>
                 <a:ea typeface="Cambria" pitchFamily="34" charset="-122"/>
                 <a:cs typeface="Cambria" pitchFamily="34" charset="-120"/>
               </a:rPr>
-              <a:t>Métrica-mãe</a:t>
-            </a:r>
-            <a:endParaRPr lang="en-US" sz="1500" dirty="0"/>
-          </a:p>
-        </p:txBody>
-      </p:sp>
-      <p:sp>
-        <p:nvSpPr>
-          <p:cNvPr id="27" name="Text 25"/>
-          <p:cNvSpPr/>
-          <p:nvPr/>
-        </p:nvSpPr>
-        <p:spPr>
-          <a:xfrm>
-            <a:off x="3291840" y="5166360"/>
-            <a:ext cx="7863840" cy="685800"/>
-          </a:xfrm>
-          <a:prstGeom prst="rect">
-            <a:avLst/>
-          </a:prstGeom>
-          <a:noFill/>
-          <a:ln/>
-        </p:spPr>
-        <p:txBody>
-          <a:bodyPr wrap="square" lIns="0" tIns="0" rIns="0" bIns="0" rtlCol="0" anchor="ctr"/>
-          <a:lstStyle/>
-          <a:p>
-            <a:pPr indent="0" marL="0">
-              <a:lnSpc>
-                <a:spcPts val="1600"/>
-              </a:lnSpc>
+              <a:t>5ª</a:t>
+            </a:r>
+            <a:endParaRPr lang="en-US" sz="1400" dirty="0"/>
+          </a:p>
+        </p:txBody>
+      </p:sp>
+      <p:sp>
+        <p:nvSpPr>
+          <p:cNvPr id="29" name="Text 27"/>
+          <p:cNvSpPr/>
+          <p:nvPr/>
+        </p:nvSpPr>
+        <p:spPr>
+          <a:xfrm>
+            <a:off x="1417320" y="4416552"/>
+            <a:ext cx="6766560" cy="384048"/>
+          </a:xfrm>
+          <a:prstGeom prst="rect">
+            <a:avLst/>
+          </a:prstGeom>
+          <a:noFill/>
+          <a:ln/>
+        </p:spPr>
+        <p:txBody>
+          <a:bodyPr wrap="square" lIns="0" tIns="0" rIns="0" bIns="0" rtlCol="0" anchor="ctr"/>
+          <a:lstStyle/>
+          <a:p>
+            <a:pPr indent="0" marL="0">
               <a:buNone/>
             </a:pPr>
             <a:r>
               <a:rPr lang="en-US" sz="1300" dirty="0">
                 <a:solidFill>
-                  <a:srgbClr val="CADCFC"/>
-                </a:solidFill>
-                <a:latin typeface="Calibri" pitchFamily="34" charset="0"/>
-                <a:ea typeface="Calibri" pitchFamily="34" charset="-122"/>
-                <a:cs typeface="Calibri" pitchFamily="34" charset="-120"/>
-              </a:rPr>
-              <a:t>Transações por cliente ativo por trimestre. Hoje 7,1, com teto histórico de 13,7 em 2023. Recuperar o patamar de 2023 é o alvo de 24 meses.</a:t>
+                  <a:srgbClr val="13223F"/>
+                </a:solidFill>
+                <a:latin typeface="Calibri" pitchFamily="34" charset="0"/>
+                <a:ea typeface="Calibri" pitchFamily="34" charset="-122"/>
+                <a:cs typeface="Calibri" pitchFamily="34" charset="-120"/>
+              </a:rPr>
+              <a:t>Investimento que vira limite de cartão</a:t>
+            </a:r>
+            <a:endParaRPr lang="en-US" sz="1300" dirty="0"/>
+          </a:p>
+        </p:txBody>
+      </p:sp>
+      <p:sp>
+        <p:nvSpPr>
+          <p:cNvPr id="30" name="Text 28"/>
+          <p:cNvSpPr/>
+          <p:nvPr/>
+        </p:nvSpPr>
+        <p:spPr>
+          <a:xfrm>
+            <a:off x="7726680" y="4416552"/>
+            <a:ext cx="1463040" cy="384048"/>
+          </a:xfrm>
+          <a:prstGeom prst="rect">
+            <a:avLst/>
+          </a:prstGeom>
+          <a:noFill/>
+          <a:ln/>
+        </p:spPr>
+        <p:txBody>
+          <a:bodyPr wrap="square" lIns="0" tIns="0" rIns="0" bIns="0" rtlCol="0" anchor="ctr"/>
+          <a:lstStyle/>
+          <a:p>
+            <a:pPr indent="0" marL="0">
+              <a:buNone/>
+            </a:pPr>
+            <a:r>
+              <a:rPr lang="en-US" sz="1200" dirty="0">
+                <a:solidFill>
+                  <a:srgbClr val="5A6784"/>
+                </a:solidFill>
+                <a:latin typeface="Calibri" pitchFamily="34" charset="0"/>
+                <a:ea typeface="Calibri" pitchFamily="34" charset="-122"/>
+                <a:cs typeface="Calibri" pitchFamily="34" charset="-120"/>
+              </a:rPr>
+              <a:t>Alto</a:t>
+            </a:r>
+            <a:endParaRPr lang="en-US" sz="1200" dirty="0"/>
+          </a:p>
+        </p:txBody>
+      </p:sp>
+      <p:sp>
+        <p:nvSpPr>
+          <p:cNvPr id="31" name="Text 29"/>
+          <p:cNvSpPr/>
+          <p:nvPr/>
+        </p:nvSpPr>
+        <p:spPr>
+          <a:xfrm>
+            <a:off x="9555480" y="4416552"/>
+            <a:ext cx="1463040" cy="384048"/>
+          </a:xfrm>
+          <a:prstGeom prst="rect">
+            <a:avLst/>
+          </a:prstGeom>
+          <a:noFill/>
+          <a:ln/>
+        </p:spPr>
+        <p:txBody>
+          <a:bodyPr wrap="square" lIns="0" tIns="0" rIns="0" bIns="0" rtlCol="0" anchor="ctr"/>
+          <a:lstStyle/>
+          <a:p>
+            <a:pPr indent="0" marL="0">
+              <a:buNone/>
+            </a:pPr>
+            <a:r>
+              <a:rPr lang="en-US" sz="1200" dirty="0">
+                <a:solidFill>
+                  <a:srgbClr val="5A6784"/>
+                </a:solidFill>
+                <a:latin typeface="Calibri" pitchFamily="34" charset="0"/>
+                <a:ea typeface="Calibri" pitchFamily="34" charset="-122"/>
+                <a:cs typeface="Calibri" pitchFamily="34" charset="-120"/>
+              </a:rPr>
+              <a:t>Médio</a:t>
+            </a:r>
+            <a:endParaRPr lang="en-US" sz="1200" dirty="0"/>
+          </a:p>
+        </p:txBody>
+      </p:sp>
+      <p:sp>
+        <p:nvSpPr>
+          <p:cNvPr id="32" name="Text 30"/>
+          <p:cNvSpPr/>
+          <p:nvPr/>
+        </p:nvSpPr>
+        <p:spPr>
+          <a:xfrm>
+            <a:off x="777240" y="4983480"/>
+            <a:ext cx="548640" cy="384048"/>
+          </a:xfrm>
+          <a:prstGeom prst="rect">
+            <a:avLst/>
+          </a:prstGeom>
+          <a:noFill/>
+          <a:ln/>
+        </p:spPr>
+        <p:txBody>
+          <a:bodyPr wrap="square" lIns="0" tIns="0" rIns="0" bIns="0" rtlCol="0" anchor="ctr"/>
+          <a:lstStyle/>
+          <a:p>
+            <a:pPr indent="0" marL="0">
+              <a:buNone/>
+            </a:pPr>
+            <a:r>
+              <a:rPr lang="en-US" sz="1400" b="1" dirty="0">
+                <a:solidFill>
+                  <a:srgbClr val="5A6784"/>
+                </a:solidFill>
+                <a:latin typeface="Cambria" pitchFamily="34" charset="0"/>
+                <a:ea typeface="Cambria" pitchFamily="34" charset="-122"/>
+                <a:cs typeface="Cambria" pitchFamily="34" charset="-120"/>
+              </a:rPr>
+              <a:t>6ª</a:t>
+            </a:r>
+            <a:endParaRPr lang="en-US" sz="1400" dirty="0"/>
+          </a:p>
+        </p:txBody>
+      </p:sp>
+      <p:sp>
+        <p:nvSpPr>
+          <p:cNvPr id="33" name="Text 31"/>
+          <p:cNvSpPr/>
+          <p:nvPr/>
+        </p:nvSpPr>
+        <p:spPr>
+          <a:xfrm>
+            <a:off x="1417320" y="4983480"/>
+            <a:ext cx="6766560" cy="384048"/>
+          </a:xfrm>
+          <a:prstGeom prst="rect">
+            <a:avLst/>
+          </a:prstGeom>
+          <a:noFill/>
+          <a:ln/>
+        </p:spPr>
+        <p:txBody>
+          <a:bodyPr wrap="square" lIns="0" tIns="0" rIns="0" bIns="0" rtlCol="0" anchor="ctr"/>
+          <a:lstStyle/>
+          <a:p>
+            <a:pPr indent="0" marL="0">
+              <a:buNone/>
+            </a:pPr>
+            <a:r>
+              <a:rPr lang="en-US" sz="1300" dirty="0">
+                <a:solidFill>
+                  <a:srgbClr val="13223F"/>
+                </a:solidFill>
+                <a:latin typeface="Calibri" pitchFamily="34" charset="0"/>
+                <a:ea typeface="Calibri" pitchFamily="34" charset="-122"/>
+                <a:cs typeface="Calibri" pitchFamily="34" charset="-120"/>
+              </a:rPr>
+              <a:t>Ativação assistida de cartão</a:t>
+            </a:r>
+            <a:endParaRPr lang="en-US" sz="1300" dirty="0"/>
+          </a:p>
+        </p:txBody>
+      </p:sp>
+      <p:sp>
+        <p:nvSpPr>
+          <p:cNvPr id="34" name="Text 32"/>
+          <p:cNvSpPr/>
+          <p:nvPr/>
+        </p:nvSpPr>
+        <p:spPr>
+          <a:xfrm>
+            <a:off x="7726680" y="4983480"/>
+            <a:ext cx="1463040" cy="384048"/>
+          </a:xfrm>
+          <a:prstGeom prst="rect">
+            <a:avLst/>
+          </a:prstGeom>
+          <a:noFill/>
+          <a:ln/>
+        </p:spPr>
+        <p:txBody>
+          <a:bodyPr wrap="square" lIns="0" tIns="0" rIns="0" bIns="0" rtlCol="0" anchor="ctr"/>
+          <a:lstStyle/>
+          <a:p>
+            <a:pPr indent="0" marL="0">
+              <a:buNone/>
+            </a:pPr>
+            <a:r>
+              <a:rPr lang="en-US" sz="1200" dirty="0">
+                <a:solidFill>
+                  <a:srgbClr val="5A6784"/>
+                </a:solidFill>
+                <a:latin typeface="Calibri" pitchFamily="34" charset="0"/>
+                <a:ea typeface="Calibri" pitchFamily="34" charset="-122"/>
+                <a:cs typeface="Calibri" pitchFamily="34" charset="-120"/>
+              </a:rPr>
+              <a:t>Médio</a:t>
+            </a:r>
+            <a:endParaRPr lang="en-US" sz="1200" dirty="0"/>
+          </a:p>
+        </p:txBody>
+      </p:sp>
+      <p:sp>
+        <p:nvSpPr>
+          <p:cNvPr id="35" name="Text 33"/>
+          <p:cNvSpPr/>
+          <p:nvPr/>
+        </p:nvSpPr>
+        <p:spPr>
+          <a:xfrm>
+            <a:off x="9555480" y="4983480"/>
+            <a:ext cx="1463040" cy="384048"/>
+          </a:xfrm>
+          <a:prstGeom prst="rect">
+            <a:avLst/>
+          </a:prstGeom>
+          <a:noFill/>
+          <a:ln/>
+        </p:spPr>
+        <p:txBody>
+          <a:bodyPr wrap="square" lIns="0" tIns="0" rIns="0" bIns="0" rtlCol="0" anchor="ctr"/>
+          <a:lstStyle/>
+          <a:p>
+            <a:pPr indent="0" marL="0">
+              <a:buNone/>
+            </a:pPr>
+            <a:r>
+              <a:rPr lang="en-US" sz="1200" dirty="0">
+                <a:solidFill>
+                  <a:srgbClr val="5A6784"/>
+                </a:solidFill>
+                <a:latin typeface="Calibri" pitchFamily="34" charset="0"/>
+                <a:ea typeface="Calibri" pitchFamily="34" charset="-122"/>
+                <a:cs typeface="Calibri" pitchFamily="34" charset="-120"/>
+              </a:rPr>
+              <a:t>Baixo</a:t>
+            </a:r>
+            <a:endParaRPr lang="en-US" sz="1200" dirty="0"/>
+          </a:p>
+        </p:txBody>
+      </p:sp>
+      <p:sp>
+        <p:nvSpPr>
+          <p:cNvPr id="36" name="Shape 34"/>
+          <p:cNvSpPr/>
+          <p:nvPr/>
+        </p:nvSpPr>
+        <p:spPr>
+          <a:xfrm>
+            <a:off x="640080" y="5495544"/>
+            <a:ext cx="10881360" cy="512064"/>
+          </a:xfrm>
+          <a:prstGeom prst="roundRect">
+            <a:avLst>
+              <a:gd name="adj" fmla="val 8929"/>
+            </a:avLst>
+          </a:prstGeom>
+          <a:solidFill>
+            <a:srgbClr val="F4F6FA"/>
+          </a:solidFill>
+          <a:ln/>
+        </p:spPr>
+      </p:sp>
+      <p:sp>
+        <p:nvSpPr>
+          <p:cNvPr id="37" name="Text 35"/>
+          <p:cNvSpPr/>
+          <p:nvPr/>
+        </p:nvSpPr>
+        <p:spPr>
+          <a:xfrm>
+            <a:off x="777240" y="5550408"/>
+            <a:ext cx="548640" cy="384048"/>
+          </a:xfrm>
+          <a:prstGeom prst="rect">
+            <a:avLst/>
+          </a:prstGeom>
+          <a:noFill/>
+          <a:ln/>
+        </p:spPr>
+        <p:txBody>
+          <a:bodyPr wrap="square" lIns="0" tIns="0" rIns="0" bIns="0" rtlCol="0" anchor="ctr"/>
+          <a:lstStyle/>
+          <a:p>
+            <a:pPr indent="0" marL="0">
+              <a:buNone/>
+            </a:pPr>
+            <a:r>
+              <a:rPr lang="en-US" sz="1400" b="1" dirty="0">
+                <a:solidFill>
+                  <a:srgbClr val="5A6784"/>
+                </a:solidFill>
+                <a:latin typeface="Cambria" pitchFamily="34" charset="0"/>
+                <a:ea typeface="Cambria" pitchFamily="34" charset="-122"/>
+                <a:cs typeface="Cambria" pitchFamily="34" charset="-120"/>
+              </a:rPr>
+              <a:t>7ª</a:t>
+            </a:r>
+            <a:endParaRPr lang="en-US" sz="1400" dirty="0"/>
+          </a:p>
+        </p:txBody>
+      </p:sp>
+      <p:sp>
+        <p:nvSpPr>
+          <p:cNvPr id="38" name="Text 36"/>
+          <p:cNvSpPr/>
+          <p:nvPr/>
+        </p:nvSpPr>
+        <p:spPr>
+          <a:xfrm>
+            <a:off x="1417320" y="5550408"/>
+            <a:ext cx="6766560" cy="384048"/>
+          </a:xfrm>
+          <a:prstGeom prst="rect">
+            <a:avLst/>
+          </a:prstGeom>
+          <a:noFill/>
+          <a:ln/>
+        </p:spPr>
+        <p:txBody>
+          <a:bodyPr wrap="square" lIns="0" tIns="0" rIns="0" bIns="0" rtlCol="0" anchor="ctr"/>
+          <a:lstStyle/>
+          <a:p>
+            <a:pPr indent="0" marL="0">
+              <a:buNone/>
+            </a:pPr>
+            <a:r>
+              <a:rPr lang="en-US" sz="1300" dirty="0">
+                <a:solidFill>
+                  <a:srgbClr val="13223F"/>
+                </a:solidFill>
+                <a:latin typeface="Calibri" pitchFamily="34" charset="0"/>
+                <a:ea typeface="Calibri" pitchFamily="34" charset="-122"/>
+                <a:cs typeface="Calibri" pitchFamily="34" charset="-120"/>
+              </a:rPr>
+              <a:t>Investigação técnica do PIX</a:t>
+            </a:r>
+            <a:endParaRPr lang="en-US" sz="1300" dirty="0"/>
+          </a:p>
+        </p:txBody>
+      </p:sp>
+      <p:sp>
+        <p:nvSpPr>
+          <p:cNvPr id="39" name="Text 37"/>
+          <p:cNvSpPr/>
+          <p:nvPr/>
+        </p:nvSpPr>
+        <p:spPr>
+          <a:xfrm>
+            <a:off x="7726680" y="5550408"/>
+            <a:ext cx="1463040" cy="384048"/>
+          </a:xfrm>
+          <a:prstGeom prst="rect">
+            <a:avLst/>
+          </a:prstGeom>
+          <a:noFill/>
+          <a:ln/>
+        </p:spPr>
+        <p:txBody>
+          <a:bodyPr wrap="square" lIns="0" tIns="0" rIns="0" bIns="0" rtlCol="0" anchor="ctr"/>
+          <a:lstStyle/>
+          <a:p>
+            <a:pPr indent="0" marL="0">
+              <a:buNone/>
+            </a:pPr>
+            <a:r>
+              <a:rPr lang="en-US" sz="1200" dirty="0">
+                <a:solidFill>
+                  <a:srgbClr val="5A6784"/>
+                </a:solidFill>
+                <a:latin typeface="Calibri" pitchFamily="34" charset="0"/>
+                <a:ea typeface="Calibri" pitchFamily="34" charset="-122"/>
+                <a:cs typeface="Calibri" pitchFamily="34" charset="-120"/>
+              </a:rPr>
+              <a:t>Médio</a:t>
+            </a:r>
+            <a:endParaRPr lang="en-US" sz="1200" dirty="0"/>
+          </a:p>
+        </p:txBody>
+      </p:sp>
+      <p:sp>
+        <p:nvSpPr>
+          <p:cNvPr id="40" name="Text 38"/>
+          <p:cNvSpPr/>
+          <p:nvPr/>
+        </p:nvSpPr>
+        <p:spPr>
+          <a:xfrm>
+            <a:off x="9555480" y="5550408"/>
+            <a:ext cx="1463040" cy="384048"/>
+          </a:xfrm>
+          <a:prstGeom prst="rect">
+            <a:avLst/>
+          </a:prstGeom>
+          <a:noFill/>
+          <a:ln/>
+        </p:spPr>
+        <p:txBody>
+          <a:bodyPr wrap="square" lIns="0" tIns="0" rIns="0" bIns="0" rtlCol="0" anchor="ctr"/>
+          <a:lstStyle/>
+          <a:p>
+            <a:pPr indent="0" marL="0">
+              <a:buNone/>
+            </a:pPr>
+            <a:r>
+              <a:rPr lang="en-US" sz="1200" dirty="0">
+                <a:solidFill>
+                  <a:srgbClr val="5A6784"/>
+                </a:solidFill>
+                <a:latin typeface="Calibri" pitchFamily="34" charset="0"/>
+                <a:ea typeface="Calibri" pitchFamily="34" charset="-122"/>
+                <a:cs typeface="Calibri" pitchFamily="34" charset="-120"/>
+              </a:rPr>
+              <a:t>Médio</a:t>
+            </a:r>
+            <a:endParaRPr lang="en-US" sz="1200" dirty="0"/>
+          </a:p>
+        </p:txBody>
+      </p:sp>
+      <p:sp>
+        <p:nvSpPr>
+          <p:cNvPr id="41" name="Text 39"/>
+          <p:cNvSpPr/>
+          <p:nvPr/>
+        </p:nvSpPr>
+        <p:spPr>
+          <a:xfrm>
+            <a:off x="640080" y="6172200"/>
+            <a:ext cx="10881360" cy="365760"/>
+          </a:xfrm>
+          <a:prstGeom prst="rect">
+            <a:avLst/>
+          </a:prstGeom>
+          <a:noFill/>
+          <a:ln/>
+        </p:spPr>
+        <p:txBody>
+          <a:bodyPr wrap="square" lIns="0" tIns="0" rIns="0" bIns="0" rtlCol="0" anchor="ctr"/>
+          <a:lstStyle/>
+          <a:p>
+            <a:pPr indent="0" marL="0">
+              <a:buNone/>
+            </a:pPr>
+            <a:r>
+              <a:rPr lang="en-US" sz="1300" i="1" dirty="0">
+                <a:solidFill>
+                  <a:srgbClr val="13223F"/>
+                </a:solidFill>
+                <a:latin typeface="Calibri" pitchFamily="34" charset="0"/>
+                <a:ea typeface="Calibri" pitchFamily="34" charset="-122"/>
+                <a:cs typeface="Calibri" pitchFamily="34" charset="-120"/>
+              </a:rPr>
+              <a:t>As duas primeiras custam pouco e destravam o resto. As demais exigem projeto e entram em paralelo, sem esperar a primeira terminar.</a:t>
             </a:r>
             <a:endParaRPr lang="en-US" sz="1300" dirty="0"/>
           </a:p>
@@ -6146,6 +6075,1200 @@
 <file path=ppt/slides/slide12.xml><?xml version="1.0" encoding="utf-8"?>
 <p:sld xmlns:a="http://schemas.openxmlformats.org/drawingml/2006/main" xmlns:r="http://schemas.openxmlformats.org/officeDocument/2006/relationships" xmlns:p="http://schemas.openxmlformats.org/presentationml/2006/main">
   <p:cSld name="Slide 12">
+    <p:spTree>
+      <p:nvGrpSpPr>
+        <p:cNvPr id="1" name=""/>
+        <p:cNvGrpSpPr/>
+        <p:nvPr/>
+      </p:nvGrpSpPr>
+      <p:grpSpPr>
+        <a:xfrm>
+          <a:off x="0" y="0"/>
+          <a:ext cx="0" cy="0"/>
+          <a:chOff x="0" y="0"/>
+          <a:chExt cx="0" cy="0"/>
+        </a:xfrm>
+      </p:grpSpPr>
+      <p:sp>
+        <p:nvSpPr>
+          <p:cNvPr id="2" name="Shape 0"/>
+          <p:cNvSpPr/>
+          <p:nvPr/>
+        </p:nvSpPr>
+        <p:spPr>
+          <a:xfrm>
+            <a:off x="640080" y="475488"/>
+            <a:ext cx="475488" cy="475488"/>
+          </a:xfrm>
+          <a:prstGeom prst="ellipse">
+            <a:avLst/>
+          </a:prstGeom>
+          <a:solidFill>
+            <a:srgbClr val="00A896"/>
+          </a:solidFill>
+          <a:ln/>
+        </p:spPr>
+      </p:sp>
+      <p:sp>
+        <p:nvSpPr>
+          <p:cNvPr id="3" name="Text 1"/>
+          <p:cNvSpPr/>
+          <p:nvPr/>
+        </p:nvSpPr>
+        <p:spPr>
+          <a:xfrm>
+            <a:off x="640080" y="475488"/>
+            <a:ext cx="475488" cy="475488"/>
+          </a:xfrm>
+          <a:prstGeom prst="rect">
+            <a:avLst/>
+          </a:prstGeom>
+          <a:noFill/>
+          <a:ln/>
+        </p:spPr>
+        <p:txBody>
+          <a:bodyPr wrap="square" lIns="0" tIns="0" rIns="0" bIns="0" rtlCol="0" anchor="ctr"/>
+          <a:lstStyle/>
+          <a:p>
+            <a:pPr algn="ctr" indent="0" marL="0">
+              <a:buNone/>
+            </a:pPr>
+            <a:r>
+              <a:rPr lang="en-US" sz="2000" b="1" dirty="0">
+                <a:solidFill>
+                  <a:srgbClr val="FFFFFF"/>
+                </a:solidFill>
+                <a:latin typeface="Calibri" pitchFamily="34" charset="0"/>
+                <a:ea typeface="Calibri" pitchFamily="34" charset="-122"/>
+                <a:cs typeface="Calibri" pitchFamily="34" charset="-120"/>
+              </a:rPr>
+              <a:t>10</a:t>
+            </a:r>
+            <a:endParaRPr lang="en-US" sz="2000" dirty="0"/>
+          </a:p>
+        </p:txBody>
+      </p:sp>
+      <p:sp>
+        <p:nvSpPr>
+          <p:cNvPr id="4" name="Text 2"/>
+          <p:cNvSpPr/>
+          <p:nvPr/>
+        </p:nvSpPr>
+        <p:spPr>
+          <a:xfrm>
+            <a:off x="1325880" y="411480"/>
+            <a:ext cx="10195560" cy="603504"/>
+          </a:xfrm>
+          <a:prstGeom prst="rect">
+            <a:avLst/>
+          </a:prstGeom>
+          <a:noFill/>
+          <a:ln/>
+        </p:spPr>
+        <p:txBody>
+          <a:bodyPr wrap="square" lIns="0" tIns="0" rIns="0" bIns="0" rtlCol="0" anchor="ctr"/>
+          <a:lstStyle/>
+          <a:p>
+            <a:pPr indent="0" marL="0">
+              <a:buNone/>
+            </a:pPr>
+            <a:r>
+              <a:rPr lang="en-US" sz="3000" b="1" dirty="0">
+                <a:solidFill>
+                  <a:srgbClr val="13223F"/>
+                </a:solidFill>
+                <a:latin typeface="Cambria" pitchFamily="34" charset="0"/>
+                <a:ea typeface="Cambria" pitchFamily="34" charset="-122"/>
+                <a:cs typeface="Cambria" pitchFamily="34" charset="-120"/>
+              </a:rPr>
+              <a:t>Roadmap</a:t>
+            </a:r>
+            <a:endParaRPr lang="en-US" sz="3000" dirty="0"/>
+          </a:p>
+        </p:txBody>
+      </p:sp>
+      <p:sp>
+        <p:nvSpPr>
+          <p:cNvPr id="5" name="Text 3"/>
+          <p:cNvSpPr/>
+          <p:nvPr/>
+        </p:nvSpPr>
+        <p:spPr>
+          <a:xfrm>
+            <a:off x="1325880" y="1024128"/>
+            <a:ext cx="10195560" cy="347472"/>
+          </a:xfrm>
+          <a:prstGeom prst="rect">
+            <a:avLst/>
+          </a:prstGeom>
+          <a:noFill/>
+          <a:ln/>
+        </p:spPr>
+        <p:txBody>
+          <a:bodyPr wrap="square" lIns="0" tIns="0" rIns="0" bIns="0" rtlCol="0" anchor="ctr"/>
+          <a:lstStyle/>
+          <a:p>
+            <a:pPr indent="0" marL="0">
+              <a:buNone/>
+            </a:pPr>
+            <a:r>
+              <a:rPr lang="en-US" sz="1400" dirty="0">
+                <a:solidFill>
+                  <a:srgbClr val="5A6784"/>
+                </a:solidFill>
+                <a:latin typeface="Calibri" pitchFamily="34" charset="0"/>
+                <a:ea typeface="Calibri" pitchFamily="34" charset="-122"/>
+                <a:cs typeface="Calibri" pitchFamily="34" charset="-120"/>
+              </a:rPr>
+              <a:t>Quatro janelas, do conserto imediato à mudança estrutural</a:t>
+            </a:r>
+            <a:endParaRPr lang="en-US" sz="1400" dirty="0"/>
+          </a:p>
+        </p:txBody>
+      </p:sp>
+      <p:sp>
+        <p:nvSpPr>
+          <p:cNvPr id="6" name="Shape 4"/>
+          <p:cNvSpPr/>
+          <p:nvPr/>
+        </p:nvSpPr>
+        <p:spPr>
+          <a:xfrm>
+            <a:off x="640080" y="1783080"/>
+            <a:ext cx="2606040" cy="713232"/>
+          </a:xfrm>
+          <a:prstGeom prst="roundRect">
+            <a:avLst>
+              <a:gd name="adj" fmla="val 10256"/>
+            </a:avLst>
+          </a:prstGeom>
+          <a:solidFill>
+            <a:srgbClr val="E5484D"/>
+          </a:solidFill>
+          <a:ln/>
+        </p:spPr>
+      </p:sp>
+      <p:sp>
+        <p:nvSpPr>
+          <p:cNvPr id="7" name="Text 5"/>
+          <p:cNvSpPr/>
+          <p:nvPr/>
+        </p:nvSpPr>
+        <p:spPr>
+          <a:xfrm>
+            <a:off x="749808" y="1783080"/>
+            <a:ext cx="2386584" cy="713232"/>
+          </a:xfrm>
+          <a:prstGeom prst="rect">
+            <a:avLst/>
+          </a:prstGeom>
+          <a:noFill/>
+          <a:ln/>
+        </p:spPr>
+        <p:txBody>
+          <a:bodyPr wrap="square" lIns="0" tIns="0" rIns="0" bIns="0" rtlCol="0" anchor="ctr"/>
+          <a:lstStyle/>
+          <a:p>
+            <a:pPr algn="ctr" indent="0" marL="0">
+              <a:buNone/>
+            </a:pPr>
+            <a:r>
+              <a:rPr lang="en-US" sz="1600" b="1" dirty="0">
+                <a:solidFill>
+                  <a:srgbClr val="FFFFFF"/>
+                </a:solidFill>
+                <a:latin typeface="Cambria" pitchFamily="34" charset="0"/>
+                <a:ea typeface="Cambria" pitchFamily="34" charset="-122"/>
+                <a:cs typeface="Cambria" pitchFamily="34" charset="-120"/>
+              </a:rPr>
+              <a:t>Parar a hemorragia</a:t>
+            </a:r>
+            <a:endParaRPr lang="en-US" sz="1600" dirty="0"/>
+          </a:p>
+        </p:txBody>
+      </p:sp>
+      <p:sp>
+        <p:nvSpPr>
+          <p:cNvPr id="8" name="Text 6"/>
+          <p:cNvSpPr/>
+          <p:nvPr/>
+        </p:nvSpPr>
+        <p:spPr>
+          <a:xfrm>
+            <a:off x="685800" y="2697480"/>
+            <a:ext cx="2514600" cy="1828800"/>
+          </a:xfrm>
+          <a:prstGeom prst="rect">
+            <a:avLst/>
+          </a:prstGeom>
+          <a:noFill/>
+          <a:ln/>
+        </p:spPr>
+        <p:txBody>
+          <a:bodyPr wrap="square" lIns="0" tIns="0" rIns="0" bIns="0" rtlCol="0" anchor="t"/>
+          <a:lstStyle/>
+          <a:p>
+            <a:pPr marL="152400" indent="-152400">
+              <a:lnSpc>
+                <a:spcPts val="1500"/>
+              </a:lnSpc>
+              <a:spcAft>
+                <a:spcPts val="800"/>
+              </a:spcAft>
+              <a:buSzPct val="100000"/>
+              <a:buChar char="•"/>
+            </a:pPr>
+            <a:r>
+              <a:rPr lang="en-US" sz="1250" dirty="0">
+                <a:solidFill>
+                  <a:srgbClr val="5A6784"/>
+                </a:solidFill>
+                <a:latin typeface="Calibri" pitchFamily="34" charset="0"/>
+                <a:ea typeface="Calibri" pitchFamily="34" charset="-122"/>
+                <a:cs typeface="Calibri" pitchFamily="34" charset="-120"/>
+              </a:rPr>
+              <a:t>Responder por que a emissão parou</a:t>
+            </a:r>
+            <a:endParaRPr lang="en-US" sz="1250" dirty="0"/>
+          </a:p>
+          <a:p>
+            <a:pPr marL="152400" indent="-152400">
+              <a:lnSpc>
+                <a:spcPts val="1500"/>
+              </a:lnSpc>
+              <a:spcAft>
+                <a:spcPts val="800"/>
+              </a:spcAft>
+              <a:buSzPct val="100000"/>
+              <a:buChar char="•"/>
+            </a:pPr>
+            <a:r>
+              <a:rPr lang="en-US" sz="1250" dirty="0">
+                <a:solidFill>
+                  <a:srgbClr val="5A6784"/>
+                </a:solidFill>
+                <a:latin typeface="Calibri" pitchFamily="34" charset="0"/>
+                <a:ea typeface="Calibri" pitchFamily="34" charset="-122"/>
+                <a:cs typeface="Calibri" pitchFamily="34" charset="-120"/>
+              </a:rPr>
+              <a:t>Campanha sobre os 255 sem renda</a:t>
+            </a:r>
+            <a:endParaRPr lang="en-US" sz="1250" dirty="0"/>
+          </a:p>
+          <a:p>
+            <a:pPr marL="152400" indent="-152400">
+              <a:lnSpc>
+                <a:spcPts val="1500"/>
+              </a:lnSpc>
+              <a:spcAft>
+                <a:spcPts val="800"/>
+              </a:spcAft>
+              <a:buSzPct val="100000"/>
+              <a:buChar char="•"/>
+            </a:pPr>
+            <a:r>
+              <a:rPr lang="en-US" sz="1250" dirty="0">
+                <a:solidFill>
+                  <a:srgbClr val="5A6784"/>
+                </a:solidFill>
+                <a:latin typeface="Calibri" pitchFamily="34" charset="0"/>
+                <a:ea typeface="Calibri" pitchFamily="34" charset="-122"/>
+                <a:cs typeface="Calibri" pitchFamily="34" charset="-120"/>
+              </a:rPr>
+              <a:t>Instrumentar os 8 KPIs</a:t>
+            </a:r>
+            <a:endParaRPr lang="en-US" sz="1250" dirty="0"/>
+          </a:p>
+        </p:txBody>
+      </p:sp>
+      <p:sp>
+        <p:nvSpPr>
+          <p:cNvPr id="9" name="Text 7"/>
+          <p:cNvSpPr/>
+          <p:nvPr/>
+        </p:nvSpPr>
+        <p:spPr>
+          <a:xfrm>
+            <a:off x="685800" y="4114800"/>
+            <a:ext cx="2514600" cy="457200"/>
+          </a:xfrm>
+          <a:prstGeom prst="rect">
+            <a:avLst/>
+          </a:prstGeom>
+          <a:noFill/>
+          <a:ln/>
+        </p:spPr>
+        <p:txBody>
+          <a:bodyPr wrap="square" lIns="0" tIns="0" rIns="0" bIns="0" rtlCol="0" anchor="t"/>
+          <a:lstStyle/>
+          <a:p>
+            <a:pPr indent="0" marL="0">
+              <a:lnSpc>
+                <a:spcPts val="1500"/>
+              </a:lnSpc>
+              <a:buNone/>
+            </a:pPr>
+            <a:r>
+              <a:rPr lang="en-US" sz="1200" i="1" dirty="0">
+                <a:solidFill>
+                  <a:srgbClr val="E5484D"/>
+                </a:solidFill>
+                <a:latin typeface="Calibri" pitchFamily="34" charset="0"/>
+                <a:ea typeface="Calibri" pitchFamily="34" charset="-122"/>
+                <a:cs typeface="Calibri" pitchFamily="34" charset="-120"/>
+              </a:rPr>
+              <a:t>Saber o tamanho do buraco</a:t>
+            </a:r>
+            <a:endParaRPr lang="en-US" sz="1200" dirty="0"/>
+          </a:p>
+        </p:txBody>
+      </p:sp>
+      <p:sp>
+        <p:nvSpPr>
+          <p:cNvPr id="10" name="Text 8"/>
+          <p:cNvSpPr/>
+          <p:nvPr/>
+        </p:nvSpPr>
+        <p:spPr>
+          <a:xfrm>
+            <a:off x="3273552" y="1993392"/>
+            <a:ext cx="219456" cy="320040"/>
+          </a:xfrm>
+          <a:prstGeom prst="rect">
+            <a:avLst/>
+          </a:prstGeom>
+          <a:noFill/>
+          <a:ln/>
+        </p:spPr>
+        <p:txBody>
+          <a:bodyPr wrap="square" lIns="0" tIns="0" rIns="0" bIns="0" rtlCol="0" anchor="ctr"/>
+          <a:lstStyle/>
+          <a:p>
+            <a:pPr algn="ctr" indent="0" marL="0">
+              <a:buNone/>
+            </a:pPr>
+            <a:r>
+              <a:rPr lang="en-US" sz="1600" dirty="0">
+                <a:solidFill>
+                  <a:srgbClr val="5A6784"/>
+                </a:solidFill>
+                <a:latin typeface="Calibri" pitchFamily="34" charset="0"/>
+                <a:ea typeface="Calibri" pitchFamily="34" charset="-122"/>
+                <a:cs typeface="Calibri" pitchFamily="34" charset="-120"/>
+              </a:rPr>
+              <a:t>▸</a:t>
+            </a:r>
+            <a:endParaRPr lang="en-US" sz="1600" dirty="0"/>
+          </a:p>
+        </p:txBody>
+      </p:sp>
+      <p:sp>
+        <p:nvSpPr>
+          <p:cNvPr id="11" name="Shape 9"/>
+          <p:cNvSpPr/>
+          <p:nvPr/>
+        </p:nvSpPr>
+        <p:spPr>
+          <a:xfrm>
+            <a:off x="3493008" y="1783080"/>
+            <a:ext cx="2606040" cy="713232"/>
+          </a:xfrm>
+          <a:prstGeom prst="roundRect">
+            <a:avLst>
+              <a:gd name="adj" fmla="val 10256"/>
+            </a:avLst>
+          </a:prstGeom>
+          <a:solidFill>
+            <a:srgbClr val="E08A2E"/>
+          </a:solidFill>
+          <a:ln/>
+        </p:spPr>
+      </p:sp>
+      <p:sp>
+        <p:nvSpPr>
+          <p:cNvPr id="12" name="Text 10"/>
+          <p:cNvSpPr/>
+          <p:nvPr/>
+        </p:nvSpPr>
+        <p:spPr>
+          <a:xfrm>
+            <a:off x="3602736" y="1783080"/>
+            <a:ext cx="2386584" cy="713232"/>
+          </a:xfrm>
+          <a:prstGeom prst="rect">
+            <a:avLst/>
+          </a:prstGeom>
+          <a:noFill/>
+          <a:ln/>
+        </p:spPr>
+        <p:txBody>
+          <a:bodyPr wrap="square" lIns="0" tIns="0" rIns="0" bIns="0" rtlCol="0" anchor="ctr"/>
+          <a:lstStyle/>
+          <a:p>
+            <a:pPr algn="ctr" indent="0" marL="0">
+              <a:buNone/>
+            </a:pPr>
+            <a:r>
+              <a:rPr lang="en-US" sz="1600" b="1" dirty="0">
+                <a:solidFill>
+                  <a:srgbClr val="FFFFFF"/>
+                </a:solidFill>
+                <a:latin typeface="Cambria" pitchFamily="34" charset="0"/>
+                <a:ea typeface="Cambria" pitchFamily="34" charset="-122"/>
+                <a:cs typeface="Cambria" pitchFamily="34" charset="-120"/>
+              </a:rPr>
+              <a:t>Quick wins</a:t>
+            </a:r>
+            <a:endParaRPr lang="en-US" sz="1600" dirty="0"/>
+          </a:p>
+        </p:txBody>
+      </p:sp>
+      <p:sp>
+        <p:nvSpPr>
+          <p:cNvPr id="13" name="Text 11"/>
+          <p:cNvSpPr/>
+          <p:nvPr/>
+        </p:nvSpPr>
+        <p:spPr>
+          <a:xfrm>
+            <a:off x="3538728" y="2697480"/>
+            <a:ext cx="2514600" cy="1828800"/>
+          </a:xfrm>
+          <a:prstGeom prst="rect">
+            <a:avLst/>
+          </a:prstGeom>
+          <a:noFill/>
+          <a:ln/>
+        </p:spPr>
+        <p:txBody>
+          <a:bodyPr wrap="square" lIns="0" tIns="0" rIns="0" bIns="0" rtlCol="0" anchor="t"/>
+          <a:lstStyle/>
+          <a:p>
+            <a:pPr marL="152400" indent="-152400">
+              <a:lnSpc>
+                <a:spcPts val="1500"/>
+              </a:lnSpc>
+              <a:spcAft>
+                <a:spcPts val="800"/>
+              </a:spcAft>
+              <a:buSzPct val="100000"/>
+              <a:buChar char="•"/>
+            </a:pPr>
+            <a:r>
+              <a:rPr lang="en-US" sz="1250" dirty="0">
+                <a:solidFill>
+                  <a:srgbClr val="5A6784"/>
+                </a:solidFill>
+                <a:latin typeface="Calibri" pitchFamily="34" charset="0"/>
+                <a:ea typeface="Calibri" pitchFamily="34" charset="-122"/>
+                <a:cs typeface="Calibri" pitchFamily="34" charset="-120"/>
+              </a:rPr>
+              <a:t>Cadastro completo em 97%</a:t>
+            </a:r>
+            <a:endParaRPr lang="en-US" sz="1250" dirty="0"/>
+          </a:p>
+          <a:p>
+            <a:pPr marL="152400" indent="-152400">
+              <a:lnSpc>
+                <a:spcPts val="1500"/>
+              </a:lnSpc>
+              <a:spcAft>
+                <a:spcPts val="800"/>
+              </a:spcAft>
+              <a:buSzPct val="100000"/>
+              <a:buChar char="•"/>
+            </a:pPr>
+            <a:r>
+              <a:rPr lang="en-US" sz="1250" dirty="0">
+                <a:solidFill>
+                  <a:srgbClr val="5A6784"/>
+                </a:solidFill>
+                <a:latin typeface="Calibri" pitchFamily="34" charset="0"/>
+                <a:ea typeface="Calibri" pitchFamily="34" charset="-122"/>
+                <a:cs typeface="Calibri" pitchFamily="34" charset="-120"/>
+              </a:rPr>
+              <a:t>Onboarding de ativação assistida</a:t>
+            </a:r>
+            <a:endParaRPr lang="en-US" sz="1250" dirty="0"/>
+          </a:p>
+          <a:p>
+            <a:pPr marL="152400" indent="-152400">
+              <a:lnSpc>
+                <a:spcPts val="1500"/>
+              </a:lnSpc>
+              <a:spcAft>
+                <a:spcPts val="800"/>
+              </a:spcAft>
+              <a:buSzPct val="100000"/>
+              <a:buChar char="•"/>
+            </a:pPr>
+            <a:r>
+              <a:rPr lang="en-US" sz="1250" dirty="0">
+                <a:solidFill>
+                  <a:srgbClr val="5A6784"/>
+                </a:solidFill>
+                <a:latin typeface="Calibri" pitchFamily="34" charset="0"/>
+                <a:ea typeface="Calibri" pitchFamily="34" charset="-122"/>
+                <a:cs typeface="Calibri" pitchFamily="34" charset="-120"/>
+              </a:rPr>
+              <a:t>Piloto de cashback com holdout</a:t>
+            </a:r>
+            <a:endParaRPr lang="en-US" sz="1250" dirty="0"/>
+          </a:p>
+          <a:p>
+            <a:pPr marL="152400" indent="-152400">
+              <a:lnSpc>
+                <a:spcPts val="1500"/>
+              </a:lnSpc>
+              <a:spcAft>
+                <a:spcPts val="800"/>
+              </a:spcAft>
+              <a:buSzPct val="100000"/>
+              <a:buChar char="•"/>
+            </a:pPr>
+            <a:r>
+              <a:rPr lang="en-US" sz="1250" dirty="0">
+                <a:solidFill>
+                  <a:srgbClr val="5A6784"/>
+                </a:solidFill>
+                <a:latin typeface="Calibri" pitchFamily="34" charset="0"/>
+                <a:ea typeface="Calibri" pitchFamily="34" charset="-122"/>
+                <a:cs typeface="Calibri" pitchFamily="34" charset="-120"/>
+              </a:rPr>
+              <a:t>Piloto de portabilidade em 1 praça</a:t>
+            </a:r>
+            <a:endParaRPr lang="en-US" sz="1250" dirty="0"/>
+          </a:p>
+        </p:txBody>
+      </p:sp>
+      <p:sp>
+        <p:nvSpPr>
+          <p:cNvPr id="14" name="Text 12"/>
+          <p:cNvSpPr/>
+          <p:nvPr/>
+        </p:nvSpPr>
+        <p:spPr>
+          <a:xfrm>
+            <a:off x="3538728" y="4114800"/>
+            <a:ext cx="2514600" cy="457200"/>
+          </a:xfrm>
+          <a:prstGeom prst="rect">
+            <a:avLst/>
+          </a:prstGeom>
+          <a:noFill/>
+          <a:ln/>
+        </p:spPr>
+        <p:txBody>
+          <a:bodyPr wrap="square" lIns="0" tIns="0" rIns="0" bIns="0" rtlCol="0" anchor="t"/>
+          <a:lstStyle/>
+          <a:p>
+            <a:pPr indent="0" marL="0">
+              <a:lnSpc>
+                <a:spcPts val="1500"/>
+              </a:lnSpc>
+              <a:buNone/>
+            </a:pPr>
+            <a:r>
+              <a:rPr lang="en-US" sz="1200" i="1" dirty="0">
+                <a:solidFill>
+                  <a:srgbClr val="B06A1E"/>
+                </a:solidFill>
+                <a:latin typeface="Calibri" pitchFamily="34" charset="0"/>
+                <a:ea typeface="Calibri" pitchFamily="34" charset="-122"/>
+                <a:cs typeface="Calibri" pitchFamily="34" charset="-120"/>
+              </a:rPr>
+              <a:t>Resultado sem projeto grande</a:t>
+            </a:r>
+            <a:endParaRPr lang="en-US" sz="1200" dirty="0"/>
+          </a:p>
+        </p:txBody>
+      </p:sp>
+      <p:sp>
+        <p:nvSpPr>
+          <p:cNvPr id="15" name="Text 13"/>
+          <p:cNvSpPr/>
+          <p:nvPr/>
+        </p:nvSpPr>
+        <p:spPr>
+          <a:xfrm>
+            <a:off x="6126480" y="1993392"/>
+            <a:ext cx="219456" cy="320040"/>
+          </a:xfrm>
+          <a:prstGeom prst="rect">
+            <a:avLst/>
+          </a:prstGeom>
+          <a:noFill/>
+          <a:ln/>
+        </p:spPr>
+        <p:txBody>
+          <a:bodyPr wrap="square" lIns="0" tIns="0" rIns="0" bIns="0" rtlCol="0" anchor="ctr"/>
+          <a:lstStyle/>
+          <a:p>
+            <a:pPr algn="ctr" indent="0" marL="0">
+              <a:buNone/>
+            </a:pPr>
+            <a:r>
+              <a:rPr lang="en-US" sz="1600" dirty="0">
+                <a:solidFill>
+                  <a:srgbClr val="5A6784"/>
+                </a:solidFill>
+                <a:latin typeface="Calibri" pitchFamily="34" charset="0"/>
+                <a:ea typeface="Calibri" pitchFamily="34" charset="-122"/>
+                <a:cs typeface="Calibri" pitchFamily="34" charset="-120"/>
+              </a:rPr>
+              <a:t>▸</a:t>
+            </a:r>
+            <a:endParaRPr lang="en-US" sz="1600" dirty="0"/>
+          </a:p>
+        </p:txBody>
+      </p:sp>
+      <p:sp>
+        <p:nvSpPr>
+          <p:cNvPr id="16" name="Shape 14"/>
+          <p:cNvSpPr/>
+          <p:nvPr/>
+        </p:nvSpPr>
+        <p:spPr>
+          <a:xfrm>
+            <a:off x="6345936" y="1783080"/>
+            <a:ext cx="2606040" cy="713232"/>
+          </a:xfrm>
+          <a:prstGeom prst="roundRect">
+            <a:avLst>
+              <a:gd name="adj" fmla="val 10256"/>
+            </a:avLst>
+          </a:prstGeom>
+          <a:solidFill>
+            <a:srgbClr val="3E8FB0"/>
+          </a:solidFill>
+          <a:ln/>
+        </p:spPr>
+      </p:sp>
+      <p:sp>
+        <p:nvSpPr>
+          <p:cNvPr id="17" name="Text 15"/>
+          <p:cNvSpPr/>
+          <p:nvPr/>
+        </p:nvSpPr>
+        <p:spPr>
+          <a:xfrm>
+            <a:off x="6455664" y="1783080"/>
+            <a:ext cx="2386584" cy="713232"/>
+          </a:xfrm>
+          <a:prstGeom prst="rect">
+            <a:avLst/>
+          </a:prstGeom>
+          <a:noFill/>
+          <a:ln/>
+        </p:spPr>
+        <p:txBody>
+          <a:bodyPr wrap="square" lIns="0" tIns="0" rIns="0" bIns="0" rtlCol="0" anchor="ctr"/>
+          <a:lstStyle/>
+          <a:p>
+            <a:pPr algn="ctr" indent="0" marL="0">
+              <a:buNone/>
+            </a:pPr>
+            <a:r>
+              <a:rPr lang="en-US" sz="1600" b="1" dirty="0">
+                <a:solidFill>
+                  <a:srgbClr val="FFFFFF"/>
+                </a:solidFill>
+                <a:latin typeface="Cambria" pitchFamily="34" charset="0"/>
+                <a:ea typeface="Cambria" pitchFamily="34" charset="-122"/>
+                <a:cs typeface="Cambria" pitchFamily="34" charset="-120"/>
+              </a:rPr>
+              <a:t>Reabrir a entrada</a:t>
+            </a:r>
+            <a:endParaRPr lang="en-US" sz="1600" dirty="0"/>
+          </a:p>
+        </p:txBody>
+      </p:sp>
+      <p:sp>
+        <p:nvSpPr>
+          <p:cNvPr id="18" name="Text 16"/>
+          <p:cNvSpPr/>
+          <p:nvPr/>
+        </p:nvSpPr>
+        <p:spPr>
+          <a:xfrm>
+            <a:off x="6391656" y="2697480"/>
+            <a:ext cx="2514600" cy="1828800"/>
+          </a:xfrm>
+          <a:prstGeom prst="rect">
+            <a:avLst/>
+          </a:prstGeom>
+          <a:noFill/>
+          <a:ln/>
+        </p:spPr>
+        <p:txBody>
+          <a:bodyPr wrap="square" lIns="0" tIns="0" rIns="0" bIns="0" rtlCol="0" anchor="t"/>
+          <a:lstStyle/>
+          <a:p>
+            <a:pPr marL="152400" indent="-152400">
+              <a:lnSpc>
+                <a:spcPts val="1500"/>
+              </a:lnSpc>
+              <a:spcAft>
+                <a:spcPts val="800"/>
+              </a:spcAft>
+              <a:buSzPct val="100000"/>
+              <a:buChar char="•"/>
+            </a:pPr>
+            <a:r>
+              <a:rPr lang="en-US" sz="1250" dirty="0">
+                <a:solidFill>
+                  <a:srgbClr val="5A6784"/>
+                </a:solidFill>
+                <a:latin typeface="Calibri" pitchFamily="34" charset="0"/>
+                <a:ea typeface="Calibri" pitchFamily="34" charset="-122"/>
+                <a:cs typeface="Calibri" pitchFamily="34" charset="-120"/>
+              </a:rPr>
+              <a:t>Conta 100% digital em produção</a:t>
+            </a:r>
+            <a:endParaRPr lang="en-US" sz="1250" dirty="0"/>
+          </a:p>
+          <a:p>
+            <a:pPr marL="152400" indent="-152400">
+              <a:lnSpc>
+                <a:spcPts val="1500"/>
+              </a:lnSpc>
+              <a:spcAft>
+                <a:spcPts val="800"/>
+              </a:spcAft>
+              <a:buSzPct val="100000"/>
+              <a:buChar char="•"/>
+            </a:pPr>
+            <a:r>
+              <a:rPr lang="en-US" sz="1250" dirty="0">
+                <a:solidFill>
+                  <a:srgbClr val="5A6784"/>
+                </a:solidFill>
+                <a:latin typeface="Calibri" pitchFamily="34" charset="0"/>
+                <a:ea typeface="Calibri" pitchFamily="34" charset="-122"/>
+                <a:cs typeface="Calibri" pitchFamily="34" charset="-120"/>
+              </a:rPr>
+              <a:t>Open Finance ativo</a:t>
+            </a:r>
+            <a:endParaRPr lang="en-US" sz="1250" dirty="0"/>
+          </a:p>
+          <a:p>
+            <a:pPr marL="152400" indent="-152400">
+              <a:lnSpc>
+                <a:spcPts val="1500"/>
+              </a:lnSpc>
+              <a:spcAft>
+                <a:spcPts val="800"/>
+              </a:spcAft>
+              <a:buSzPct val="100000"/>
+              <a:buChar char="•"/>
+            </a:pPr>
+            <a:r>
+              <a:rPr lang="en-US" sz="1250" dirty="0">
+                <a:solidFill>
+                  <a:srgbClr val="5A6784"/>
+                </a:solidFill>
+                <a:latin typeface="Calibri" pitchFamily="34" charset="0"/>
+                <a:ea typeface="Calibri" pitchFamily="34" charset="-122"/>
+                <a:cs typeface="Calibri" pitchFamily="34" charset="-120"/>
+              </a:rPr>
+              <a:t>150 novas contas por trimestre</a:t>
+            </a:r>
+            <a:endParaRPr lang="en-US" sz="1250" dirty="0"/>
+          </a:p>
+        </p:txBody>
+      </p:sp>
+      <p:sp>
+        <p:nvSpPr>
+          <p:cNvPr id="19" name="Text 17"/>
+          <p:cNvSpPr/>
+          <p:nvPr/>
+        </p:nvSpPr>
+        <p:spPr>
+          <a:xfrm>
+            <a:off x="6391656" y="4114800"/>
+            <a:ext cx="2514600" cy="457200"/>
+          </a:xfrm>
+          <a:prstGeom prst="rect">
+            <a:avLst/>
+          </a:prstGeom>
+          <a:noFill/>
+          <a:ln/>
+        </p:spPr>
+        <p:txBody>
+          <a:bodyPr wrap="square" lIns="0" tIns="0" rIns="0" bIns="0" rtlCol="0" anchor="t"/>
+          <a:lstStyle/>
+          <a:p>
+            <a:pPr indent="0" marL="0">
+              <a:lnSpc>
+                <a:spcPts val="1500"/>
+              </a:lnSpc>
+              <a:buNone/>
+            </a:pPr>
+            <a:r>
+              <a:rPr lang="en-US" sz="1200" i="1" dirty="0">
+                <a:solidFill>
+                  <a:srgbClr val="3E8FB0"/>
+                </a:solidFill>
+                <a:latin typeface="Calibri" pitchFamily="34" charset="0"/>
+                <a:ea typeface="Calibri" pitchFamily="34" charset="-122"/>
+                <a:cs typeface="Calibri" pitchFamily="34" charset="-120"/>
+              </a:rPr>
+              <a:t>Volta a entrar cliente novo</a:t>
+            </a:r>
+            <a:endParaRPr lang="en-US" sz="1200" dirty="0"/>
+          </a:p>
+        </p:txBody>
+      </p:sp>
+      <p:sp>
+        <p:nvSpPr>
+          <p:cNvPr id="20" name="Text 18"/>
+          <p:cNvSpPr/>
+          <p:nvPr/>
+        </p:nvSpPr>
+        <p:spPr>
+          <a:xfrm>
+            <a:off x="8979408" y="1993392"/>
+            <a:ext cx="219456" cy="320040"/>
+          </a:xfrm>
+          <a:prstGeom prst="rect">
+            <a:avLst/>
+          </a:prstGeom>
+          <a:noFill/>
+          <a:ln/>
+        </p:spPr>
+        <p:txBody>
+          <a:bodyPr wrap="square" lIns="0" tIns="0" rIns="0" bIns="0" rtlCol="0" anchor="ctr"/>
+          <a:lstStyle/>
+          <a:p>
+            <a:pPr algn="ctr" indent="0" marL="0">
+              <a:buNone/>
+            </a:pPr>
+            <a:r>
+              <a:rPr lang="en-US" sz="1600" dirty="0">
+                <a:solidFill>
+                  <a:srgbClr val="5A6784"/>
+                </a:solidFill>
+                <a:latin typeface="Calibri" pitchFamily="34" charset="0"/>
+                <a:ea typeface="Calibri" pitchFamily="34" charset="-122"/>
+                <a:cs typeface="Calibri" pitchFamily="34" charset="-120"/>
+              </a:rPr>
+              <a:t>▸</a:t>
+            </a:r>
+            <a:endParaRPr lang="en-US" sz="1600" dirty="0"/>
+          </a:p>
+        </p:txBody>
+      </p:sp>
+      <p:sp>
+        <p:nvSpPr>
+          <p:cNvPr id="21" name="Shape 19"/>
+          <p:cNvSpPr/>
+          <p:nvPr/>
+        </p:nvSpPr>
+        <p:spPr>
+          <a:xfrm>
+            <a:off x="9198864" y="1783080"/>
+            <a:ext cx="2606040" cy="713232"/>
+          </a:xfrm>
+          <a:prstGeom prst="roundRect">
+            <a:avLst>
+              <a:gd name="adj" fmla="val 10256"/>
+            </a:avLst>
+          </a:prstGeom>
+          <a:solidFill>
+            <a:srgbClr val="00A896"/>
+          </a:solidFill>
+          <a:ln/>
+        </p:spPr>
+      </p:sp>
+      <p:sp>
+        <p:nvSpPr>
+          <p:cNvPr id="22" name="Text 20"/>
+          <p:cNvSpPr/>
+          <p:nvPr/>
+        </p:nvSpPr>
+        <p:spPr>
+          <a:xfrm>
+            <a:off x="9308592" y="1783080"/>
+            <a:ext cx="2386584" cy="713232"/>
+          </a:xfrm>
+          <a:prstGeom prst="rect">
+            <a:avLst/>
+          </a:prstGeom>
+          <a:noFill/>
+          <a:ln/>
+        </p:spPr>
+        <p:txBody>
+          <a:bodyPr wrap="square" lIns="0" tIns="0" rIns="0" bIns="0" rtlCol="0" anchor="ctr"/>
+          <a:lstStyle/>
+          <a:p>
+            <a:pPr algn="ctr" indent="0" marL="0">
+              <a:buNone/>
+            </a:pPr>
+            <a:r>
+              <a:rPr lang="en-US" sz="1600" b="1" dirty="0">
+                <a:solidFill>
+                  <a:srgbClr val="FFFFFF"/>
+                </a:solidFill>
+                <a:latin typeface="Cambria" pitchFamily="34" charset="0"/>
+                <a:ea typeface="Cambria" pitchFamily="34" charset="-122"/>
+                <a:cs typeface="Cambria" pitchFamily="34" charset="-120"/>
+              </a:rPr>
+              <a:t>Principalidade</a:t>
+            </a:r>
+            <a:endParaRPr lang="en-US" sz="1600" dirty="0"/>
+          </a:p>
+        </p:txBody>
+      </p:sp>
+      <p:sp>
+        <p:nvSpPr>
+          <p:cNvPr id="23" name="Text 21"/>
+          <p:cNvSpPr/>
+          <p:nvPr/>
+        </p:nvSpPr>
+        <p:spPr>
+          <a:xfrm>
+            <a:off x="9244584" y="2697480"/>
+            <a:ext cx="2514600" cy="1828800"/>
+          </a:xfrm>
+          <a:prstGeom prst="rect">
+            <a:avLst/>
+          </a:prstGeom>
+          <a:noFill/>
+          <a:ln/>
+        </p:spPr>
+        <p:txBody>
+          <a:bodyPr wrap="square" lIns="0" tIns="0" rIns="0" bIns="0" rtlCol="0" anchor="t"/>
+          <a:lstStyle/>
+          <a:p>
+            <a:pPr marL="152400" indent="-152400">
+              <a:lnSpc>
+                <a:spcPts val="1500"/>
+              </a:lnSpc>
+              <a:spcAft>
+                <a:spcPts val="800"/>
+              </a:spcAft>
+              <a:buSzPct val="100000"/>
+              <a:buChar char="•"/>
+            </a:pPr>
+            <a:r>
+              <a:rPr lang="en-US" sz="1250" dirty="0">
+                <a:solidFill>
+                  <a:srgbClr val="5A6784"/>
+                </a:solidFill>
+                <a:latin typeface="Calibri" pitchFamily="34" charset="0"/>
+                <a:ea typeface="Calibri" pitchFamily="34" charset="-122"/>
+                <a:cs typeface="Calibri" pitchFamily="34" charset="-120"/>
+              </a:rPr>
+              <a:t>Rendimento no saldo em conta</a:t>
+            </a:r>
+            <a:endParaRPr lang="en-US" sz="1250" dirty="0"/>
+          </a:p>
+          <a:p>
+            <a:pPr marL="152400" indent="-152400">
+              <a:lnSpc>
+                <a:spcPts val="1500"/>
+              </a:lnSpc>
+              <a:spcAft>
+                <a:spcPts val="800"/>
+              </a:spcAft>
+              <a:buSzPct val="100000"/>
+              <a:buChar char="•"/>
+            </a:pPr>
+            <a:r>
+              <a:rPr lang="en-US" sz="1250" dirty="0">
+                <a:solidFill>
+                  <a:srgbClr val="5A6784"/>
+                </a:solidFill>
+                <a:latin typeface="Calibri" pitchFamily="34" charset="0"/>
+                <a:ea typeface="Calibri" pitchFamily="34" charset="-122"/>
+                <a:cs typeface="Calibri" pitchFamily="34" charset="-120"/>
+              </a:rPr>
+              <a:t>Investimento vira limite</a:t>
+            </a:r>
+            <a:endParaRPr lang="en-US" sz="1250" dirty="0"/>
+          </a:p>
+          <a:p>
+            <a:pPr marL="152400" indent="-152400">
+              <a:lnSpc>
+                <a:spcPts val="1500"/>
+              </a:lnSpc>
+              <a:spcAft>
+                <a:spcPts val="800"/>
+              </a:spcAft>
+              <a:buSzPct val="100000"/>
+              <a:buChar char="•"/>
+            </a:pPr>
+            <a:r>
+              <a:rPr lang="en-US" sz="1250" dirty="0">
+                <a:solidFill>
+                  <a:srgbClr val="5A6784"/>
+                </a:solidFill>
+                <a:latin typeface="Calibri" pitchFamily="34" charset="0"/>
+                <a:ea typeface="Calibri" pitchFamily="34" charset="-122"/>
+                <a:cs typeface="Calibri" pitchFamily="34" charset="-120"/>
+              </a:rPr>
+              <a:t>25% com crédito recorrente</a:t>
+            </a:r>
+            <a:endParaRPr lang="en-US" sz="1250" dirty="0"/>
+          </a:p>
+        </p:txBody>
+      </p:sp>
+      <p:sp>
+        <p:nvSpPr>
+          <p:cNvPr id="24" name="Text 22"/>
+          <p:cNvSpPr/>
+          <p:nvPr/>
+        </p:nvSpPr>
+        <p:spPr>
+          <a:xfrm>
+            <a:off x="9244584" y="4114800"/>
+            <a:ext cx="2514600" cy="457200"/>
+          </a:xfrm>
+          <a:prstGeom prst="rect">
+            <a:avLst/>
+          </a:prstGeom>
+          <a:noFill/>
+          <a:ln/>
+        </p:spPr>
+        <p:txBody>
+          <a:bodyPr wrap="square" lIns="0" tIns="0" rIns="0" bIns="0" rtlCol="0" anchor="t"/>
+          <a:lstStyle/>
+          <a:p>
+            <a:pPr indent="0" marL="0">
+              <a:lnSpc>
+                <a:spcPts val="1500"/>
+              </a:lnSpc>
+              <a:buNone/>
+            </a:pPr>
+            <a:r>
+              <a:rPr lang="en-US" sz="1200" i="1" dirty="0">
+                <a:solidFill>
+                  <a:srgbClr val="00A896"/>
+                </a:solidFill>
+                <a:latin typeface="Calibri" pitchFamily="34" charset="0"/>
+                <a:ea typeface="Calibri" pitchFamily="34" charset="-122"/>
+                <a:cs typeface="Calibri" pitchFamily="34" charset="-120"/>
+              </a:rPr>
+              <a:t>O banco vira a opção padrão</a:t>
+            </a:r>
+            <a:endParaRPr lang="en-US" sz="1200" dirty="0"/>
+          </a:p>
+        </p:txBody>
+      </p:sp>
+      <p:sp>
+        <p:nvSpPr>
+          <p:cNvPr id="25" name="Shape 23"/>
+          <p:cNvSpPr/>
+          <p:nvPr/>
+        </p:nvSpPr>
+        <p:spPr>
+          <a:xfrm>
+            <a:off x="640080" y="4983480"/>
+            <a:ext cx="10881360" cy="1051560"/>
+          </a:xfrm>
+          <a:prstGeom prst="roundRect">
+            <a:avLst>
+              <a:gd name="adj" fmla="val 6957"/>
+            </a:avLst>
+          </a:prstGeom>
+          <a:solidFill>
+            <a:srgbClr val="13223F"/>
+          </a:solidFill>
+          <a:ln/>
+        </p:spPr>
+      </p:sp>
+      <p:sp>
+        <p:nvSpPr>
+          <p:cNvPr id="26" name="Text 24"/>
+          <p:cNvSpPr/>
+          <p:nvPr/>
+        </p:nvSpPr>
+        <p:spPr>
+          <a:xfrm>
+            <a:off x="960120" y="5166360"/>
+            <a:ext cx="2194560" cy="685800"/>
+          </a:xfrm>
+          <a:prstGeom prst="rect">
+            <a:avLst/>
+          </a:prstGeom>
+          <a:noFill/>
+          <a:ln/>
+        </p:spPr>
+        <p:txBody>
+          <a:bodyPr wrap="square" lIns="0" tIns="0" rIns="0" bIns="0" rtlCol="0" anchor="ctr"/>
+          <a:lstStyle/>
+          <a:p>
+            <a:pPr indent="0" marL="0">
+              <a:buNone/>
+            </a:pPr>
+            <a:r>
+              <a:rPr lang="en-US" sz="1500" b="1" dirty="0">
+                <a:solidFill>
+                  <a:srgbClr val="00A896"/>
+                </a:solidFill>
+                <a:latin typeface="Cambria" pitchFamily="34" charset="0"/>
+                <a:ea typeface="Cambria" pitchFamily="34" charset="-122"/>
+                <a:cs typeface="Cambria" pitchFamily="34" charset="-120"/>
+              </a:rPr>
+              <a:t>Métrica-mãe</a:t>
+            </a:r>
+            <a:endParaRPr lang="en-US" sz="1500" dirty="0"/>
+          </a:p>
+        </p:txBody>
+      </p:sp>
+      <p:sp>
+        <p:nvSpPr>
+          <p:cNvPr id="27" name="Text 25"/>
+          <p:cNvSpPr/>
+          <p:nvPr/>
+        </p:nvSpPr>
+        <p:spPr>
+          <a:xfrm>
+            <a:off x="3291840" y="5166360"/>
+            <a:ext cx="7863840" cy="685800"/>
+          </a:xfrm>
+          <a:prstGeom prst="rect">
+            <a:avLst/>
+          </a:prstGeom>
+          <a:noFill/>
+          <a:ln/>
+        </p:spPr>
+        <p:txBody>
+          <a:bodyPr wrap="square" lIns="0" tIns="0" rIns="0" bIns="0" rtlCol="0" anchor="ctr"/>
+          <a:lstStyle/>
+          <a:p>
+            <a:pPr indent="0" marL="0">
+              <a:lnSpc>
+                <a:spcPts val="1600"/>
+              </a:lnSpc>
+              <a:buNone/>
+            </a:pPr>
+            <a:r>
+              <a:rPr lang="en-US" sz="1300" dirty="0">
+                <a:solidFill>
+                  <a:srgbClr val="CADCFC"/>
+                </a:solidFill>
+                <a:latin typeface="Calibri" pitchFamily="34" charset="0"/>
+                <a:ea typeface="Calibri" pitchFamily="34" charset="-122"/>
+                <a:cs typeface="Calibri" pitchFamily="34" charset="-120"/>
+              </a:rPr>
+              <a:t>Transações por cliente ativo por trimestre. Hoje 7,1, com teto histórico de 13,7 em 2023. Recuperar o patamar de 2023 é o alvo de 24 meses.</a:t>
+            </a:r>
+            <a:endParaRPr lang="en-US" sz="1300" dirty="0"/>
+          </a:p>
+        </p:txBody>
+      </p:sp>
+    </p:spTree>
+  </p:cSld>
+  <p:clrMapOvr>
+    <a:masterClrMapping/>
+  </p:clrMapOvr>
+</p:sld>
+</file>
+
+<file path=ppt/slides/slide13.xml><?xml version="1.0" encoding="utf-8"?>
+<p:sld xmlns:a="http://schemas.openxmlformats.org/drawingml/2006/main" xmlns:r="http://schemas.openxmlformats.org/officeDocument/2006/relationships" xmlns:p="http://schemas.openxmlformats.org/presentationml/2006/main">
+  <p:cSld name="Slide 13">
     <p:bg>
       <p:bgPr>
         <a:solidFill>
@@ -12073,6 +13196,30 @@
                 <a:cs typeface="Calibri" pitchFamily="34" charset="-120"/>
               </a:rPr>
               <a:t>Rendimento no saldo em conta</a:t>
+            </a:r>
+            <a:endParaRPr lang="en-US" sz="1250" dirty="0"/>
+          </a:p>
+          <a:p>
+            <a:pPr marL="152400" indent="-152400">
+              <a:lnSpc>
+                <a:spcPts val="1500"/>
+              </a:lnSpc>
+              <a:spcAft>
+                <a:spcPts val="700"/>
+              </a:spcAft>
+              <a:buSzPct val="100000"/>
+              <a:buChar char="•"/>
+            </a:pPr>
+            <a:r>
+              <a:rPr lang="en-US" sz="1250" dirty="0">
+                <a:solidFill>
+                  <a:srgbClr val="5A6784"/>
+                </a:solidFill>
+                <a:latin typeface="Calibri" pitchFamily="34" charset="0"/>
+                <a:ea typeface="Calibri" pitchFamily="34" charset="-122"/>
+                <a:cs typeface="Calibri" pitchFamily="34" charset="-120"/>
+              </a:rPr>
+              <a:t>Cashback por frequência no cartão</a:t>
             </a:r>
             <a:endParaRPr lang="en-US" sz="1250" dirty="0"/>
           </a:p>
